--- a/docs/保险核保智能分级系统_路演_第10页对比版.pptx
+++ b/docs/保险核保智能分级系统_路演_第10页对比版.pptx
@@ -2,35 +2,36 @@
 <file path=ppt/presentation.xml><?xml version="1.0" encoding="utf-8"?>
 <p:presentation xmlns:p="http://schemas.openxmlformats.org/presentationml/2006/main">
   <p:sldMasterIdLst>
-    <p:sldMasterId xmlns:r="http://schemas.openxmlformats.org/officeDocument/2006/relationships" id="2147483648" r:id="R171125951c7946ef"/>
+    <p:sldMasterId xmlns:r="http://schemas.openxmlformats.org/officeDocument/2006/relationships" id="2147483648" r:id="R108006e007564bc6"/>
   </p:sldMasterIdLst>
   <p:notesMasterIdLst>
-    <p:notesMasterId xmlns:r="http://schemas.openxmlformats.org/officeDocument/2006/relationships" r:id="Re9fa096c127249b3"/>
+    <p:notesMasterId xmlns:r="http://schemas.openxmlformats.org/officeDocument/2006/relationships" r:id="Ree5785078d154069"/>
   </p:notesMasterIdLst>
   <p:sldIdLst>
-    <p:sldId xmlns:r="http://schemas.openxmlformats.org/officeDocument/2006/relationships" id="256" r:id="Reab0f7227e1843e2"/>
-    <p:sldId xmlns:r="http://schemas.openxmlformats.org/officeDocument/2006/relationships" id="257" r:id="R568c36e3551241a1"/>
-    <p:sldId xmlns:r="http://schemas.openxmlformats.org/officeDocument/2006/relationships" id="258" r:id="Rf05677e250f24d13"/>
-    <p:sldId xmlns:r="http://schemas.openxmlformats.org/officeDocument/2006/relationships" id="259" r:id="Rbf8ff923cb5e4996"/>
-    <p:sldId xmlns:r="http://schemas.openxmlformats.org/officeDocument/2006/relationships" id="260" r:id="Rf432dc1f1ba94691"/>
-    <p:sldId xmlns:r="http://schemas.openxmlformats.org/officeDocument/2006/relationships" id="261" r:id="Rc849eb08962e4e2b"/>
-    <p:sldId xmlns:r="http://schemas.openxmlformats.org/officeDocument/2006/relationships" id="262" r:id="R5cf2b79798b64314"/>
-    <p:sldId xmlns:r="http://schemas.openxmlformats.org/officeDocument/2006/relationships" id="263" r:id="R5165a5d0e40b49f6"/>
-    <p:sldId xmlns:r="http://schemas.openxmlformats.org/officeDocument/2006/relationships" id="264" r:id="Rdda772ef78d9498d"/>
-    <p:sldId xmlns:r="http://schemas.openxmlformats.org/officeDocument/2006/relationships" id="265" r:id="R28d535eadeca486b"/>
-    <p:sldId xmlns:r="http://schemas.openxmlformats.org/officeDocument/2006/relationships" id="266" r:id="R43a90b951ee545b7"/>
-    <p:sldId xmlns:r="http://schemas.openxmlformats.org/officeDocument/2006/relationships" id="267" r:id="R4f227e22f72444b0"/>
-    <p:sldId xmlns:r="http://schemas.openxmlformats.org/officeDocument/2006/relationships" id="268" r:id="R01f308cf6689496e"/>
-    <p:sldId xmlns:r="http://schemas.openxmlformats.org/officeDocument/2006/relationships" id="269" r:id="Rc8d5ffc41d6d40aa"/>
-    <p:sldId xmlns:r="http://schemas.openxmlformats.org/officeDocument/2006/relationships" id="270" r:id="R83a8f17547574979"/>
-    <p:sldId xmlns:r="http://schemas.openxmlformats.org/officeDocument/2006/relationships" id="271" r:id="Rba6ba2b085fa49ee"/>
-    <p:sldId xmlns:r="http://schemas.openxmlformats.org/officeDocument/2006/relationships" id="272" r:id="Rc1ffab5a35404983"/>
-    <p:sldId xmlns:r="http://schemas.openxmlformats.org/officeDocument/2006/relationships" id="273" r:id="R8e9f797a27f34268"/>
-    <p:sldId xmlns:r="http://schemas.openxmlformats.org/officeDocument/2006/relationships" id="274" r:id="R7980ca597739428b"/>
-    <p:sldId xmlns:r="http://schemas.openxmlformats.org/officeDocument/2006/relationships" id="275" r:id="R8c6202371fa14426"/>
-    <p:sldId xmlns:r="http://schemas.openxmlformats.org/officeDocument/2006/relationships" id="276" r:id="Rff184d28b80b42d2"/>
-    <p:sldId xmlns:r="http://schemas.openxmlformats.org/officeDocument/2006/relationships" id="277" r:id="R66e78a45164748a4"/>
-    <p:sldId xmlns:r="http://schemas.openxmlformats.org/officeDocument/2006/relationships" id="278" r:id="R44bd513ca0b84b8d"/>
+    <p:sldId xmlns:r="http://schemas.openxmlformats.org/officeDocument/2006/relationships" id="256" r:id="R292acaca577b415a"/>
+    <p:sldId xmlns:r="http://schemas.openxmlformats.org/officeDocument/2006/relationships" id="257" r:id="R2cd8202e74c44a40"/>
+    <p:sldId xmlns:r="http://schemas.openxmlformats.org/officeDocument/2006/relationships" id="258" r:id="Rd7752c04a2e04092"/>
+    <p:sldId xmlns:r="http://schemas.openxmlformats.org/officeDocument/2006/relationships" id="259" r:id="R445e7d19b48741f5"/>
+    <p:sldId xmlns:r="http://schemas.openxmlformats.org/officeDocument/2006/relationships" id="260" r:id="Rc055d7216bf34e20"/>
+    <p:sldId xmlns:r="http://schemas.openxmlformats.org/officeDocument/2006/relationships" id="261" r:id="Rdf7c5760cfc241b3"/>
+    <p:sldId xmlns:r="http://schemas.openxmlformats.org/officeDocument/2006/relationships" id="262" r:id="R70f493f117414ce9"/>
+    <p:sldId xmlns:r="http://schemas.openxmlformats.org/officeDocument/2006/relationships" id="263" r:id="Re725cda21a264975"/>
+    <p:sldId xmlns:r="http://schemas.openxmlformats.org/officeDocument/2006/relationships" id="264" r:id="R11177aba6c674ee9"/>
+    <p:sldId xmlns:r="http://schemas.openxmlformats.org/officeDocument/2006/relationships" id="265" r:id="R8fba160d62234a9e"/>
+    <p:sldId xmlns:r="http://schemas.openxmlformats.org/officeDocument/2006/relationships" id="266" r:id="R28c7a8bf49d443d8"/>
+    <p:sldId xmlns:r="http://schemas.openxmlformats.org/officeDocument/2006/relationships" id="267" r:id="R061e146779644b67"/>
+    <p:sldId xmlns:r="http://schemas.openxmlformats.org/officeDocument/2006/relationships" id="268" r:id="Rd592df91956d4977"/>
+    <p:sldId xmlns:r="http://schemas.openxmlformats.org/officeDocument/2006/relationships" id="269" r:id="R4081722f97e8443d"/>
+    <p:sldId xmlns:r="http://schemas.openxmlformats.org/officeDocument/2006/relationships" id="270" r:id="Rbe2fd01ff7c74934"/>
+    <p:sldId xmlns:r="http://schemas.openxmlformats.org/officeDocument/2006/relationships" id="271" r:id="R7310533d9e4843e1"/>
+    <p:sldId xmlns:r="http://schemas.openxmlformats.org/officeDocument/2006/relationships" id="272" r:id="Rfebeed12fd18414a"/>
+    <p:sldId xmlns:r="http://schemas.openxmlformats.org/officeDocument/2006/relationships" id="273" r:id="Rd33143c398cf4563"/>
+    <p:sldId xmlns:r="http://schemas.openxmlformats.org/officeDocument/2006/relationships" id="274" r:id="Rd2296bd139404832"/>
+    <p:sldId xmlns:r="http://schemas.openxmlformats.org/officeDocument/2006/relationships" id="275" r:id="Rfe566742c56b477c"/>
+    <p:sldId xmlns:r="http://schemas.openxmlformats.org/officeDocument/2006/relationships" id="276" r:id="Rd8931bf23fc442ad"/>
+    <p:sldId xmlns:r="http://schemas.openxmlformats.org/officeDocument/2006/relationships" id="277" r:id="Rd95af5c4cdf84726"/>
+    <p:sldId xmlns:r="http://schemas.openxmlformats.org/officeDocument/2006/relationships" id="278" r:id="R4365795f7c7144d5"/>
+    <p:sldId xmlns:r="http://schemas.openxmlformats.org/officeDocument/2006/relationships" id="279" r:id="R63d1efe1d1984a59"/>
   </p:sldIdLst>
   <p:sldSz cx="12188825" cy="6858000"/>
   <p:notesSz cx="6858000" cy="9144000"/>
@@ -1394,7 +1395,7 @@
           <a:lstStyle xmlns:a="http://schemas.openxmlformats.org/drawingml/2006/main"/>
           <a:p xmlns:a="http://schemas.openxmlformats.org/drawingml/2006/main">
             <a:r>
-              <a:t>金额沿用用户提供的投产比测算口径并做保守调整：一次性投入 3,600 元，月度运营 3,200 元，人力节省 18,000 元/月，质量收益 3,000 元/月。投产后应以真实工时、模型调用量和业务量复核。</a:t>
+              <a:t>本页补充开发人力、Token 单次交互、批量处理、月度 Token 与硬件成本明细。金额为路演预估，投产后以实际调用量和资源账单复核。</a:t>
             </a:r>
           </a:p>
         </p:txBody>
@@ -1425,6 +1426,76 @@
 </file>
 
 <file path=ppt/notesSlides/notesSlide23.xml><?xml version="1.0" encoding="utf-8"?>
+<p:notes xmlns:p="http://schemas.openxmlformats.org/presentationml/2006/main">
+  <p:cSld>
+    <p:spTree>
+      <p:nvGrpSpPr>
+        <p:cNvPr id="1" name=""/>
+        <p:cNvGrpSpPr/>
+        <p:nvPr/>
+      </p:nvGrpSpPr>
+      <p:grpSpPr>
+        <a:xfrm xmlns:a="http://schemas.openxmlformats.org/drawingml/2006/main"/>
+      </p:grpSpPr>
+      <p:sp>
+        <p:nvSpPr>
+          <p:cNvPr id="2" name="Slide Image Placeholder 1"/>
+          <p:cNvSpPr>
+            <a:spLocks xmlns:a="http://schemas.openxmlformats.org/drawingml/2006/main" noGrp="1"/>
+          </p:cNvSpPr>
+          <p:nvPr>
+            <p:ph type="sldImg" idx="0"/>
+          </p:nvPr>
+        </p:nvSpPr>
+        <p:spPr/>
+      </p:sp>
+      <p:sp>
+        <p:nvSpPr>
+          <p:cNvPr id="3" name="Notes Placeholder 2"/>
+          <p:cNvSpPr>
+            <a:spLocks xmlns:a="http://schemas.openxmlformats.org/drawingml/2006/main" noGrp="1"/>
+          </p:cNvSpPr>
+          <p:nvPr>
+            <p:ph type="body" idx="1"/>
+          </p:nvPr>
+        </p:nvSpPr>
+        <p:spPr/>
+        <p:txBody>
+          <a:bodyPr xmlns:a="http://schemas.openxmlformats.org/drawingml/2006/main"/>
+          <a:lstStyle xmlns:a="http://schemas.openxmlformats.org/drawingml/2006/main"/>
+          <a:p xmlns:a="http://schemas.openxmlformats.org/drawingml/2006/main">
+            <a:r>
+              <a:t>本页补充效率、人力节省、质量收益、月度 ROI 与年度收益。金额与效率指标为路演预估，投产后以实际业务数据复核。</a:t>
+            </a:r>
+          </a:p>
+        </p:txBody>
+      </p:sp>
+      <p:sp>
+        <p:nvSpPr>
+          <p:cNvPr id="4" name="Slide Number Placeholder 3"/>
+          <p:cNvSpPr>
+            <a:spLocks xmlns:a="http://schemas.openxmlformats.org/drawingml/2006/main" noGrp="1"/>
+          </p:cNvSpPr>
+          <p:nvPr>
+            <p:ph type="sldNum" idx="5"/>
+          </p:nvPr>
+        </p:nvSpPr>
+        <p:spPr/>
+        <p:txBody>
+          <a:bodyPr xmlns:a="http://schemas.openxmlformats.org/drawingml/2006/main"/>
+          <a:lstStyle xmlns:a="http://schemas.openxmlformats.org/drawingml/2006/main"/>
+          <a:p xmlns:a="http://schemas.openxmlformats.org/drawingml/2006/main"/>
+        </p:txBody>
+      </p:sp>
+    </p:spTree>
+  </p:cSld>
+  <p:clrMapOvr>
+    <a:masterClrMapping xmlns:a="http://schemas.openxmlformats.org/drawingml/2006/main"/>
+  </p:clrMapOvr>
+</p:notes>
+</file>
+
+<file path=ppt/notesSlides/notesSlide24.xml><?xml version="1.0" encoding="utf-8"?>
 <p:notes xmlns:p="http://schemas.openxmlformats.org/presentationml/2006/main">
   <p:cSld>
     <p:spTree>
@@ -1995,7 +2066,7 @@
   </p:cSld>
   <p:clrMap bg1="lt1" tx1="dk1" bg2="lt2" tx2="dk2" accent1="accent1" accent2="accent2" accent3="accent3" accent4="accent4" accent5="accent5" accent6="accent6" hlink="hlink" folHlink="folHlink"/>
   <p:sldLayoutIdLst>
-    <p:sldLayoutId xmlns:r="http://schemas.openxmlformats.org/officeDocument/2006/relationships" id="2147483649" r:id="R18d184adafdf4685"/>
+    <p:sldLayoutId xmlns:r="http://schemas.openxmlformats.org/officeDocument/2006/relationships" id="2147483649" r:id="Raf943387f8404d60"/>
   </p:sldLayoutIdLst>
   <p:hf sldNum="0" hdr="0" ftr="0" dt="0"/>
   <p:txStyles>
@@ -2948,6 +3019,226 @@
 </c:chartSpace>
 </file>
 
+<file path=ppt/slides/charts/chart3.xml><?xml version="1.0" encoding="utf-8"?>
+<c:chartSpace xmlns:mc="http://schemas.openxmlformats.org/markup-compatibility/2006" xmlns:c14="http://schemas.microsoft.com/office/drawing/2007/8/2/chart" xmlns:c="http://schemas.openxmlformats.org/drawingml/2006/chart" mc:Ignorable="c14">
+  <c:lang val="en-US"/>
+  <c:roundedCorners val="1"/>
+  <mc:AlternateContent>
+    <mc:Choice Requires="c14">
+      <c14:style val="102"/>
+    </mc:Choice>
+    <mc:Fallback>
+      <c:style val="2"/>
+    </mc:Fallback>
+  </mc:AlternateContent>
+  <c:chart>
+    <c:autoTitleDeleted val="1"/>
+    <c:plotArea>
+      <c:barChart>
+        <c:barDir val="col"/>
+        <c:grouping val="clustered"/>
+        <c:varyColors val="0"/>
+        <c:ser>
+          <c:idx val="0"/>
+          <c:order val="0"/>
+          <c:tx>
+            <c:strRef>
+              <c:f>Sheet1!$B$1</c:f>
+              <c:strCache>
+                <c:ptCount val="1"/>
+                <c:pt idx="0">
+                  <c:v>复核量</c:v>
+                </c:pt>
+              </c:strCache>
+            </c:strRef>
+          </c:tx>
+          <c:spPr>
+            <a:solidFill xmlns:a="http://schemas.openxmlformats.org/drawingml/2006/main">
+              <a:srgbClr val="1C6DD0"/>
+            </a:solidFill>
+          </c:spPr>
+          <c:dPt>
+            <c:idx val="0"/>
+            <c:invertIfNegative val="0"/>
+            <c:spPr>
+              <a:solidFill xmlns:a="http://schemas.openxmlformats.org/drawingml/2006/main">
+                <a:srgbClr val="1C6DD0"/>
+              </a:solidFill>
+            </c:spPr>
+          </c:dPt>
+          <c:dPt>
+            <c:idx val="1"/>
+            <c:invertIfNegative val="0"/>
+            <c:spPr>
+              <a:solidFill xmlns:a="http://schemas.openxmlformats.org/drawingml/2006/main">
+                <a:srgbClr val="2E9E5B"/>
+              </a:solidFill>
+            </c:spPr>
+          </c:dPt>
+          <c:dLbls>
+            <c:numFmt formatCode="#,##0" sourceLinked="0"/>
+            <c:spPr>
+              <a:noFill xmlns:a="http://schemas.openxmlformats.org/drawingml/2006/main"/>
+              <a:ln xmlns:a="http://schemas.openxmlformats.org/drawingml/2006/main">
+                <a:noFill/>
+              </a:ln>
+            </c:spPr>
+            <c:txPr>
+              <a:bodyPr xmlns:a="http://schemas.openxmlformats.org/drawingml/2006/main" anchorCtr="1"/>
+              <a:lstStyle xmlns:a="http://schemas.openxmlformats.org/drawingml/2006/main"/>
+              <a:p xmlns:a="http://schemas.openxmlformats.org/drawingml/2006/main">
+                <a:pPr>
+                  <a:defRPr sz="1100" b="0" i="0" u="none">
+                    <a:solidFill>
+                      <a:srgbClr val="1F2733"/>
+                    </a:solidFill>
+                    <a:latin typeface="微软雅黑"/>
+                    <a:ea typeface="微软雅黑"/>
+                    <a:cs typeface="微软雅黑"/>
+                  </a:defRPr>
+                </a:pPr>
+              </a:p>
+            </c:txPr>
+            <c:dLblPos val="outEnd"/>
+            <c:showLegendKey val="0"/>
+            <c:showVal val="1"/>
+            <c:showCatName val="0"/>
+            <c:showSerName val="0"/>
+            <c:showPercent val="0"/>
+            <c:showBubbleSize val="0"/>
+            <c:showLeaderLines val="0"/>
+          </c:dLbls>
+          <c:cat>
+            <c:strRef>
+              <c:f>Sheet1!$A$2:$A$3</c:f>
+              <c:strCache>
+                <c:ptCount val="2"/>
+                <c:pt idx="0">
+                  <c:v>改进前</c:v>
+                </c:pt>
+                <c:pt idx="1">
+                  <c:v>改进后</c:v>
+                </c:pt>
+              </c:strCache>
+            </c:strRef>
+          </c:cat>
+          <c:val>
+            <c:numRef>
+              <c:f>Sheet1!$B$2:$B$3</c:f>
+              <c:numCache>
+                <c:formatCode>General</c:formatCode>
+                <c:ptCount val="2"/>
+                <c:pt idx="0">
+                  <c:v>100</c:v>
+                </c:pt>
+                <c:pt idx="1">
+                  <c:v>35</c:v>
+                </c:pt>
+              </c:numCache>
+            </c:numRef>
+          </c:val>
+        </c:ser>
+        <c:dLbls>
+          <c:showLegendKey val="0"/>
+          <c:showVal val="1"/>
+          <c:showCatName val="0"/>
+          <c:showSerName val="0"/>
+          <c:showPercent val="0"/>
+          <c:showBubbleSize val="0"/>
+        </c:dLbls>
+        <c:gapWidth val="60"/>
+        <c:overlap val="0"/>
+        <c:axId val="2094734554"/>
+        <c:axId val="2094734552"/>
+      </c:barChart>
+      <c:catAx>
+        <c:axId val="2094734554"/>
+        <c:scaling>
+          <c:orientation val="minMax"/>
+        </c:scaling>
+        <c:delete val="0"/>
+        <c:axPos val="b"/>
+        <c:numFmt formatCode="General" sourceLinked="1"/>
+        <c:majorTickMark val="out"/>
+        <c:minorTickMark val="none"/>
+        <c:tickLblPos val="low"/>
+        <c:spPr>
+          <a:ln xmlns:a="http://schemas.openxmlformats.org/drawingml/2006/main" w="12700">
+            <a:solidFill>
+              <a:srgbClr val="888888"/>
+            </a:solidFill>
+            <a:prstDash val="solid"/>
+          </a:ln>
+        </c:spPr>
+        <c:txPr>
+          <a:bodyPr xmlns:a="http://schemas.openxmlformats.org/drawingml/2006/main" rot="-60000000" spcFirstLastPara="0" vert="horz" wrap="square" anchor="ctr" anchorCtr="1"/>
+          <a:lstStyle xmlns:a="http://schemas.openxmlformats.org/drawingml/2006/main"/>
+          <a:p xmlns:a="http://schemas.openxmlformats.org/drawingml/2006/main">
+            <a:pPr>
+              <a:defRPr sz="1100" b="0" i="0" u="none">
+                <a:solidFill>
+                  <a:srgbClr val="1F2733"/>
+                </a:solidFill>
+                <a:latin typeface="微软雅黑"/>
+                <a:ea typeface="微软雅黑"/>
+                <a:cs typeface="微软雅黑"/>
+              </a:defRPr>
+            </a:pPr>
+          </a:p>
+        </c:txPr>
+        <c:crossAx val="2094734552"/>
+        <c:crosses val="autoZero"/>
+        <c:lblOffset val="100"/>
+      </c:catAx>
+      <c:valAx>
+        <c:axId val="2094734552"/>
+        <c:scaling>
+          <c:orientation val="minMax"/>
+        </c:scaling>
+        <c:delete val="1"/>
+        <c:axPos val="l"/>
+        <c:numFmt formatCode="General" sourceLinked="0"/>
+        <c:majorTickMark val="out"/>
+        <c:minorTickMark val="none"/>
+        <c:tickLblPos val="nextTo"/>
+        <c:txPr>
+          <a:bodyPr xmlns:a="http://schemas.openxmlformats.org/drawingml/2006/main" rot="-60000000" vert="horz" anchor="ctr" anchorCtr="1"/>
+          <a:lstStyle xmlns:a="http://schemas.openxmlformats.org/drawingml/2006/main"/>
+          <a:p xmlns:a="http://schemas.openxmlformats.org/drawingml/2006/main">
+            <a:pPr>
+              <a:defRPr sz="1200" b="0" i="0" u="none">
+                <a:solidFill>
+                  <a:srgbClr val="000000"/>
+                </a:solidFill>
+                <a:latin typeface="Arial"/>
+                <a:ea typeface="Arial"/>
+                <a:cs typeface="Arial"/>
+              </a:defRPr>
+            </a:pPr>
+          </a:p>
+        </c:txPr>
+        <c:crossAx val="2094734554"/>
+        <c:crosses val="autoZero"/>
+        <c:crossBetween val="between"/>
+      </c:valAx>
+      <c:spPr>
+        <a:noFill xmlns:a="http://schemas.openxmlformats.org/drawingml/2006/main"/>
+        <a:ln xmlns:a="http://schemas.openxmlformats.org/drawingml/2006/main">
+          <a:noFill/>
+        </a:ln>
+      </c:spPr>
+    </c:plotArea>
+    <c:plotVisOnly val="1"/>
+  </c:chart>
+  <c:spPr>
+    <a:noFill xmlns:a="http://schemas.openxmlformats.org/drawingml/2006/main"/>
+    <a:ln xmlns:a="http://schemas.openxmlformats.org/drawingml/2006/main">
+      <a:noFill/>
+    </a:ln>
+  </c:spPr>
+</c:chartSpace>
+</file>
+
 <file path=ppt/slides/slide1.xml><?xml version="1.0" encoding="utf-8"?>
 <p:sld xmlns:p="http://schemas.openxmlformats.org/presentationml/2006/main">
   <p:cSld>
@@ -3863,7 +4154,7 @@
           <p:nvPr/>
         </p:nvPicPr>
         <p:blipFill>
-          <a:blip xmlns:r="http://schemas.openxmlformats.org/officeDocument/2006/relationships" xmlns:a="http://schemas.openxmlformats.org/drawingml/2006/main" r:embed="R3906a72b9b8a48c5"/>
+          <a:blip xmlns:r="http://schemas.openxmlformats.org/officeDocument/2006/relationships" xmlns:a="http://schemas.openxmlformats.org/drawingml/2006/main" r:embed="R8e5bcc8ff2f14660"/>
           <a:srcRect xmlns:a="http://schemas.openxmlformats.org/drawingml/2006/main" l="0" t="0" r="0" b="0"/>
           <a:stretch xmlns:a="http://schemas.openxmlformats.org/drawingml/2006/main">
             <a:fillRect l="0" t="0" r="0" b="0"/>
@@ -5284,7 +5575,7 @@
           <p:nvPr/>
         </p:nvPicPr>
         <p:blipFill>
-          <a:blip xmlns:r="http://schemas.openxmlformats.org/officeDocument/2006/relationships" xmlns:a="http://schemas.openxmlformats.org/drawingml/2006/main" r:embed="Rff3a6886d7dd4276"/>
+          <a:blip xmlns:r="http://schemas.openxmlformats.org/officeDocument/2006/relationships" xmlns:a="http://schemas.openxmlformats.org/drawingml/2006/main" r:embed="R17b2da418a884509"/>
           <a:stretch xmlns:a="http://schemas.openxmlformats.org/drawingml/2006/main">
             <a:fillRect l="0" t="0" r="0" b="0"/>
           </a:stretch>
@@ -5499,7 +5790,7 @@
           <p:nvPr/>
         </p:nvPicPr>
         <p:blipFill>
-          <a:blip xmlns:r="http://schemas.openxmlformats.org/officeDocument/2006/relationships" xmlns:a="http://schemas.openxmlformats.org/drawingml/2006/main" r:embed="Rbfb811f307b04932"/>
+          <a:blip xmlns:r="http://schemas.openxmlformats.org/officeDocument/2006/relationships" xmlns:a="http://schemas.openxmlformats.org/drawingml/2006/main" r:embed="R9c18e5566b954603"/>
           <a:stretch xmlns:a="http://schemas.openxmlformats.org/drawingml/2006/main">
             <a:fillRect l="0" t="0" r="0" b="0"/>
           </a:stretch>
@@ -5714,7 +6005,7 @@
           <p:nvPr/>
         </p:nvPicPr>
         <p:blipFill>
-          <a:blip xmlns:r="http://schemas.openxmlformats.org/officeDocument/2006/relationships" xmlns:a="http://schemas.openxmlformats.org/drawingml/2006/main" r:embed="Rb99760c84afc4db7"/>
+          <a:blip xmlns:r="http://schemas.openxmlformats.org/officeDocument/2006/relationships" xmlns:a="http://schemas.openxmlformats.org/drawingml/2006/main" r:embed="Ra200e8370bfb487e"/>
           <a:stretch xmlns:a="http://schemas.openxmlformats.org/drawingml/2006/main">
             <a:fillRect l="0" t="0" r="0" b="0"/>
           </a:stretch>
@@ -5929,7 +6220,7 @@
           <p:nvPr/>
         </p:nvPicPr>
         <p:blipFill>
-          <a:blip xmlns:r="http://schemas.openxmlformats.org/officeDocument/2006/relationships" xmlns:a="http://schemas.openxmlformats.org/drawingml/2006/main" r:embed="R310277907b4d407d"/>
+          <a:blip xmlns:r="http://schemas.openxmlformats.org/officeDocument/2006/relationships" xmlns:a="http://schemas.openxmlformats.org/drawingml/2006/main" r:embed="Ra223a71da4fe4497"/>
           <a:stretch xmlns:a="http://schemas.openxmlformats.org/drawingml/2006/main">
             <a:fillRect l="0" t="0" r="0" b="0"/>
           </a:stretch>
@@ -19316,7 +19607,7 @@
                 <a:ea typeface="微软雅黑"/>
                 <a:cs typeface="微软雅黑"/>
               </a:rPr>
-              <a:t>按竞赛演示场景的保守预估：成本、节省与回收期将在投产后按运营数据复核。【预估】</a:t>
+              <a:t>按竞赛演示场景的人力口径预估：投入与节省将在投产后按运营数据复核。【预估】</a:t>
             </a:r>
             <a:endParaRPr sz="1200"/>
           </a:p>
@@ -19496,7 +19787,7 @@
                 <a:ea typeface="微软雅黑"/>
                 <a:cs typeface="微软雅黑"/>
               </a:rPr>
-              <a:t>开发人力（前端/后端/测试）</a:t>
+              <a:t>前端 / 后端 / 测试投入</a:t>
             </a:r>
             <a:endParaRPr sz="1100"/>
           </a:p>
@@ -19571,7 +19862,7 @@
                 <a:ea typeface="微软雅黑"/>
                 <a:cs typeface="微软雅黑"/>
               </a:rPr>
-              <a:t>¥ 3,600</a:t>
+              <a:t>7.5 人天</a:t>
             </a:r>
             <a:endParaRPr sz="1150"/>
           </a:p>
@@ -19663,7 +19954,7 @@
                 <a:ea typeface="微软雅黑"/>
                 <a:cs typeface="微软雅黑"/>
               </a:rPr>
-              <a:t>硬件 + LLM Token 调用</a:t>
+              <a:t>系统维护与模型监控</a:t>
             </a:r>
             <a:endParaRPr sz="1100"/>
           </a:p>
@@ -19738,7 +20029,7 @@
                 <a:ea typeface="微软雅黑"/>
                 <a:cs typeface="微软雅黑"/>
               </a:rPr>
-              <a:t>¥ 3,200</a:t>
+              <a:t>0.5 人天 /月</a:t>
             </a:r>
             <a:endParaRPr sz="1150"/>
           </a:p>
@@ -19830,7 +20121,7 @@
                 <a:ea typeface="微软雅黑"/>
                 <a:cs typeface="微软雅黑"/>
               </a:rPr>
-              <a:t>核保 + 复核人力下降</a:t>
+              <a:t>初审与复核工作量减少</a:t>
             </a:r>
             <a:endParaRPr sz="1100"/>
           </a:p>
@@ -19905,7 +20196,7 @@
                 <a:ea typeface="微软雅黑"/>
                 <a:cs typeface="微软雅黑"/>
               </a:rPr>
-              <a:t>¥ 18,000 /月</a:t>
+              <a:t>37.5 人天 /月</a:t>
             </a:r>
             <a:endParaRPr sz="1150"/>
           </a:p>
@@ -19997,7 +20288,7 @@
                 <a:ea typeface="微软雅黑"/>
                 <a:cs typeface="微软雅黑"/>
               </a:rPr>
-              <a:t>漏判下降带来的赔付优化</a:t>
+              <a:t>规则覆盖与模型准确率提升</a:t>
             </a:r>
             <a:endParaRPr sz="1100"/>
           </a:p>
@@ -20072,7 +20363,7 @@
                 <a:ea typeface="微软雅黑"/>
                 <a:cs typeface="微软雅黑"/>
               </a:rPr>
-              <a:t>¥ 3,000 /月</a:t>
+              <a:t>准确率 +15个百分点</a:t>
             </a:r>
             <a:endParaRPr sz="1150"/>
           </a:p>
@@ -20164,7 +20455,7 @@
                 <a:ea typeface="微软雅黑"/>
                 <a:cs typeface="微软雅黑"/>
               </a:rPr>
-              <a:t>净收益 / 投入</a:t>
+              <a:t>一次投入 / 月净人力节省</a:t>
             </a:r>
             <a:endParaRPr sz="1100"/>
           </a:p>
@@ -20345,7 +20636,7 @@
         </p:xfrm>
         <a:graphic xmlns:a="http://schemas.openxmlformats.org/drawingml/2006/main">
           <a:graphicData uri="http://schemas.openxmlformats.org/drawingml/2006/chart">
-            <c:chart xmlns:r="http://schemas.openxmlformats.org/officeDocument/2006/relationships" xmlns:c="http://schemas.openxmlformats.org/drawingml/2006/chart" r:id="R6f79fe25cfdc4ee1"/>
+            <c:chart xmlns:r="http://schemas.openxmlformats.org/officeDocument/2006/relationships" xmlns:c="http://schemas.openxmlformats.org/drawingml/2006/chart" r:id="Rc8d8c3554b3c4c74"/>
           </a:graphicData>
         </a:graphic>
       </p:graphicFrame>
@@ -20711,7 +21002,7 @@
                 <a:ea typeface="微软雅黑"/>
                 <a:cs typeface="微软雅黑"/>
               </a:rPr>
-              <a:t>投产比分析：成本与收益测算</a:t>
+              <a:t>投产比分析：投入成本明细</a:t>
             </a:r>
             <a:endParaRPr sz="3000"/>
           </a:p>
@@ -20757,797 +21048,15 @@
                 <a:ea typeface="微软雅黑"/>
                 <a:cs typeface="微软雅黑"/>
               </a:rPr>
-              <a:t>按开发、人力、Token、硬件与效益测算，全部金额单位为人民币。【预估】</a:t>
+              <a:t>覆盖开发人力、Token 调用、批量处理与硬件资源，金额单位为人民币。【预估】</a:t>
             </a:r>
             <a:endParaRPr sz="1200"/>
-          </a:p>
-        </p:txBody>
-      </p:sp>
-      <p:sp>
-        <p:nvSpPr>
-          <p:cNvPr id="8" name="Text 6">
-            <a:extLst xmlns:a="http://schemas.openxmlformats.org/drawingml/2006/main">
-              <a:ext uri="{FF2B5EF4-FFF2-40B4-BE49-F238E27FC236}">
-                <a16:creationId xmlns:a16="http://schemas.microsoft.com/office/drawing/2014/main" id="{3C490C37-E8E9-4981-89D0-D13223C61502}"/>
-              </a:ext>
-            </a:extLst>
-          </p:cNvPr>
-          <p:cNvSpPr>
-            <a:spLocks xmlns:a="http://schemas.openxmlformats.org/drawingml/2006/main" noGrp="1"/>
-          </p:cNvSpPr>
-          <p:nvPr/>
-        </p:nvSpPr>
-        <p:spPr>
-          <a:xfrm xmlns:a="http://schemas.openxmlformats.org/drawingml/2006/main">
-            <a:off x="822960" y="2331720"/>
-            <a:ext cx="5394960" cy="329184"/>
-          </a:xfrm>
-          <a:prstGeom xmlns:a="http://schemas.openxmlformats.org/drawingml/2006/main" prst="rect">
-            <a:avLst/>
-          </a:prstGeom>
-          <a:noFill xmlns:a="http://schemas.openxmlformats.org/drawingml/2006/main"/>
-        </p:spPr>
-        <p:txBody>
-          <a:bodyPr xmlns:a="http://schemas.openxmlformats.org/drawingml/2006/main" wrap="square" lIns="0" tIns="0" rIns="0" bIns="0" anchor="ctr"/>
-          <a:lstStyle xmlns:a="http://schemas.openxmlformats.org/drawingml/2006/main"/>
-          <a:p xmlns:a="http://schemas.openxmlformats.org/drawingml/2006/main">
-            <a:pPr marL="0" indent="0">
-              <a:buNone/>
-            </a:pPr>
-            <a:r>
-              <a:rPr sz="1500" b="1">
-                <a:solidFill>
-                  <a:srgbClr val="13315C"/>
-                </a:solidFill>
-                <a:latin typeface="微软雅黑"/>
-                <a:ea typeface="微软雅黑"/>
-                <a:cs typeface="微软雅黑"/>
-              </a:rPr>
-              <a:t>投入与产出（月度测算）</a:t>
-            </a:r>
-            <a:endParaRPr sz="1500"/>
-          </a:p>
-        </p:txBody>
-      </p:sp>
-      <p:sp>
-        <p:nvSpPr>
-          <p:cNvPr id="9" name="Text 7">
-            <a:extLst xmlns:a="http://schemas.openxmlformats.org/drawingml/2006/main">
-              <a:ext uri="{FF2B5EF4-FFF2-40B4-BE49-F238E27FC236}">
-                <a16:creationId xmlns:a16="http://schemas.microsoft.com/office/drawing/2014/main" id="{E587816D-DC0D-4B83-A9CB-0AA6D5F0C700}"/>
-              </a:ext>
-            </a:extLst>
-          </p:cNvPr>
-          <p:cNvSpPr>
-            <a:spLocks xmlns:a="http://schemas.openxmlformats.org/drawingml/2006/main" noGrp="1"/>
-          </p:cNvSpPr>
-          <p:nvPr/>
-        </p:nvSpPr>
-        <p:spPr>
-          <a:xfrm xmlns:a="http://schemas.openxmlformats.org/drawingml/2006/main">
-            <a:off x="841248" y="2788920"/>
-            <a:ext cx="2011680" cy="457200"/>
-          </a:xfrm>
-          <a:prstGeom xmlns:a="http://schemas.openxmlformats.org/drawingml/2006/main" prst="rect">
-            <a:avLst/>
-          </a:prstGeom>
-          <a:noFill xmlns:a="http://schemas.openxmlformats.org/drawingml/2006/main"/>
-        </p:spPr>
-        <p:txBody>
-          <a:bodyPr xmlns:a="http://schemas.openxmlformats.org/drawingml/2006/main" wrap="square" lIns="0" tIns="0" rIns="0" bIns="0" anchor="ctr"/>
-          <a:lstStyle xmlns:a="http://schemas.openxmlformats.org/drawingml/2006/main"/>
-          <a:p xmlns:a="http://schemas.openxmlformats.org/drawingml/2006/main">
-            <a:pPr marL="0" indent="0">
-              <a:buNone/>
-            </a:pPr>
-            <a:r>
-              <a:rPr sz="1300" b="1">
-                <a:solidFill>
-                  <a:srgbClr val="1F2733"/>
-                </a:solidFill>
-                <a:latin typeface="微软雅黑"/>
-                <a:ea typeface="微软雅黑"/>
-                <a:cs typeface="微软雅黑"/>
-              </a:rPr>
-              <a:t>一次性投入</a:t>
-            </a:r>
-            <a:endParaRPr sz="1300"/>
-          </a:p>
-        </p:txBody>
-      </p:sp>
-      <p:sp>
-        <p:nvSpPr>
-          <p:cNvPr id="10" name="Text 8">
-            <a:extLst xmlns:a="http://schemas.openxmlformats.org/drawingml/2006/main">
-              <a:ext uri="{FF2B5EF4-FFF2-40B4-BE49-F238E27FC236}">
-                <a16:creationId xmlns:a16="http://schemas.microsoft.com/office/drawing/2014/main" id="{C58F3606-0407-4BDA-AEF5-A3CE99A91C9C}"/>
-              </a:ext>
-            </a:extLst>
-          </p:cNvPr>
-          <p:cNvSpPr>
-            <a:spLocks xmlns:a="http://schemas.openxmlformats.org/drawingml/2006/main" noGrp="1"/>
-          </p:cNvSpPr>
-          <p:nvPr/>
-        </p:nvSpPr>
-        <p:spPr>
-          <a:xfrm xmlns:a="http://schemas.openxmlformats.org/drawingml/2006/main">
-            <a:off x="2852928" y="2788920"/>
-            <a:ext cx="2286000" cy="457200"/>
-          </a:xfrm>
-          <a:prstGeom xmlns:a="http://schemas.openxmlformats.org/drawingml/2006/main" prst="rect">
-            <a:avLst/>
-          </a:prstGeom>
-          <a:noFill xmlns:a="http://schemas.openxmlformats.org/drawingml/2006/main"/>
-        </p:spPr>
-        <p:txBody>
-          <a:bodyPr xmlns:a="http://schemas.openxmlformats.org/drawingml/2006/main" wrap="square" lIns="0" tIns="0" rIns="0" bIns="0" anchor="ctr"/>
-          <a:lstStyle xmlns:a="http://schemas.openxmlformats.org/drawingml/2006/main"/>
-          <a:p xmlns:a="http://schemas.openxmlformats.org/drawingml/2006/main">
-            <a:pPr marL="0" indent="0">
-              <a:buNone/>
-            </a:pPr>
-            <a:r>
-              <a:rPr sz="1100">
-                <a:solidFill>
-                  <a:srgbClr val="6B7280"/>
-                </a:solidFill>
-                <a:latin typeface="微软雅黑"/>
-                <a:ea typeface="微软雅黑"/>
-                <a:cs typeface="微软雅黑"/>
-              </a:rPr>
-              <a:t>开发人力（前端/后端/测试）</a:t>
-            </a:r>
-            <a:endParaRPr sz="1100"/>
-          </a:p>
-        </p:txBody>
-      </p:sp>
-      <p:sp>
-        <p:nvSpPr>
-          <p:cNvPr id="12" name="Text 10">
-            <a:extLst xmlns:a="http://schemas.openxmlformats.org/drawingml/2006/main">
-              <a:ext uri="{FF2B5EF4-FFF2-40B4-BE49-F238E27FC236}">
-                <a16:creationId xmlns:a16="http://schemas.microsoft.com/office/drawing/2014/main" id="{A5BE1E28-0237-4A5D-AAF3-909700AAF01A}"/>
-              </a:ext>
-            </a:extLst>
-          </p:cNvPr>
-          <p:cNvSpPr>
-            <a:spLocks xmlns:a="http://schemas.openxmlformats.org/drawingml/2006/main" noGrp="1"/>
-          </p:cNvSpPr>
-          <p:nvPr/>
-        </p:nvSpPr>
-        <p:spPr>
-          <a:xfrm xmlns:a="http://schemas.openxmlformats.org/drawingml/2006/main">
-            <a:off x="4956048" y="2834640"/>
-            <a:ext cx="1234440" cy="365760"/>
-          </a:xfrm>
-          <a:prstGeom xmlns:a="http://schemas.openxmlformats.org/drawingml/2006/main" prst="rect">
-            <a:avLst/>
-          </a:prstGeom>
-          <a:noFill xmlns:a="http://schemas.openxmlformats.org/drawingml/2006/main"/>
-        </p:spPr>
-        <p:txBody>
-          <a:bodyPr xmlns:a="http://schemas.openxmlformats.org/drawingml/2006/main" wrap="square" lIns="0" tIns="0" rIns="0" bIns="0" anchor="ctr"/>
-          <a:lstStyle xmlns:a="http://schemas.openxmlformats.org/drawingml/2006/main"/>
-          <a:p xmlns:a="http://schemas.openxmlformats.org/drawingml/2006/main">
-            <a:pPr marL="0" indent="0" algn="ctr">
-              <a:buNone/>
-            </a:pPr>
-            <a:r>
-              <a:rPr sz="1150" b="1">
-                <a:solidFill>
-                  <a:srgbClr val="13315C"/>
-                </a:solidFill>
-                <a:latin typeface="微软雅黑"/>
-                <a:ea typeface="微软雅黑"/>
-                <a:cs typeface="微软雅黑"/>
-              </a:rPr>
-              <a:t>¥ ____</a:t>
-            </a:r>
-            <a:endParaRPr sz="1150"/>
-          </a:p>
-        </p:txBody>
-      </p:sp>
-      <p:sp>
-        <p:nvSpPr>
-          <p:cNvPr id="13" name="Text 11">
-            <a:extLst xmlns:a="http://schemas.openxmlformats.org/drawingml/2006/main">
-              <a:ext uri="{FF2B5EF4-FFF2-40B4-BE49-F238E27FC236}">
-                <a16:creationId xmlns:a16="http://schemas.microsoft.com/office/drawing/2014/main" id="{5ED3F58C-EB4B-4011-87BE-74A1FF5C39C1}"/>
-              </a:ext>
-            </a:extLst>
-          </p:cNvPr>
-          <p:cNvSpPr>
-            <a:spLocks xmlns:a="http://schemas.openxmlformats.org/drawingml/2006/main" noGrp="1"/>
-          </p:cNvSpPr>
-          <p:nvPr/>
-        </p:nvSpPr>
-        <p:spPr>
-          <a:xfrm xmlns:a="http://schemas.openxmlformats.org/drawingml/2006/main">
-            <a:off x="841248" y="3410712"/>
-            <a:ext cx="2011680" cy="457200"/>
-          </a:xfrm>
-          <a:prstGeom xmlns:a="http://schemas.openxmlformats.org/drawingml/2006/main" prst="rect">
-            <a:avLst/>
-          </a:prstGeom>
-          <a:noFill xmlns:a="http://schemas.openxmlformats.org/drawingml/2006/main"/>
-        </p:spPr>
-        <p:txBody>
-          <a:bodyPr xmlns:a="http://schemas.openxmlformats.org/drawingml/2006/main" wrap="square" lIns="0" tIns="0" rIns="0" bIns="0" anchor="ctr"/>
-          <a:lstStyle xmlns:a="http://schemas.openxmlformats.org/drawingml/2006/main"/>
-          <a:p xmlns:a="http://schemas.openxmlformats.org/drawingml/2006/main">
-            <a:pPr marL="0" indent="0">
-              <a:buNone/>
-            </a:pPr>
-            <a:r>
-              <a:rPr sz="1300" b="1">
-                <a:solidFill>
-                  <a:srgbClr val="1F2733"/>
-                </a:solidFill>
-                <a:latin typeface="微软雅黑"/>
-                <a:ea typeface="微软雅黑"/>
-                <a:cs typeface="微软雅黑"/>
-              </a:rPr>
-              <a:t>月度运营</a:t>
-            </a:r>
-            <a:endParaRPr sz="1300"/>
-          </a:p>
-        </p:txBody>
-      </p:sp>
-      <p:sp>
-        <p:nvSpPr>
-          <p:cNvPr id="14" name="Text 12">
-            <a:extLst xmlns:a="http://schemas.openxmlformats.org/drawingml/2006/main">
-              <a:ext uri="{FF2B5EF4-FFF2-40B4-BE49-F238E27FC236}">
-                <a16:creationId xmlns:a16="http://schemas.microsoft.com/office/drawing/2014/main" id="{59DF116C-C97A-4163-8B68-E10A7D765FDC}"/>
-              </a:ext>
-            </a:extLst>
-          </p:cNvPr>
-          <p:cNvSpPr>
-            <a:spLocks xmlns:a="http://schemas.openxmlformats.org/drawingml/2006/main" noGrp="1"/>
-          </p:cNvSpPr>
-          <p:nvPr/>
-        </p:nvSpPr>
-        <p:spPr>
-          <a:xfrm xmlns:a="http://schemas.openxmlformats.org/drawingml/2006/main">
-            <a:off x="2852928" y="3410712"/>
-            <a:ext cx="2286000" cy="457200"/>
-          </a:xfrm>
-          <a:prstGeom xmlns:a="http://schemas.openxmlformats.org/drawingml/2006/main" prst="rect">
-            <a:avLst/>
-          </a:prstGeom>
-          <a:noFill xmlns:a="http://schemas.openxmlformats.org/drawingml/2006/main"/>
-        </p:spPr>
-        <p:txBody>
-          <a:bodyPr xmlns:a="http://schemas.openxmlformats.org/drawingml/2006/main" wrap="square" lIns="0" tIns="0" rIns="0" bIns="0" anchor="ctr"/>
-          <a:lstStyle xmlns:a="http://schemas.openxmlformats.org/drawingml/2006/main"/>
-          <a:p xmlns:a="http://schemas.openxmlformats.org/drawingml/2006/main">
-            <a:pPr marL="0" indent="0">
-              <a:buNone/>
-            </a:pPr>
-            <a:r>
-              <a:rPr sz="1100">
-                <a:solidFill>
-                  <a:srgbClr val="6B7280"/>
-                </a:solidFill>
-                <a:latin typeface="微软雅黑"/>
-                <a:ea typeface="微软雅黑"/>
-                <a:cs typeface="微软雅黑"/>
-              </a:rPr>
-              <a:t>硬件 + LLM Token 调用</a:t>
-            </a:r>
-            <a:endParaRPr sz="1100"/>
-          </a:p>
-        </p:txBody>
-      </p:sp>
-      <p:sp>
-        <p:nvSpPr>
-          <p:cNvPr id="16" name="Text 14">
-            <a:extLst xmlns:a="http://schemas.openxmlformats.org/drawingml/2006/main">
-              <a:ext uri="{FF2B5EF4-FFF2-40B4-BE49-F238E27FC236}">
-                <a16:creationId xmlns:a16="http://schemas.microsoft.com/office/drawing/2014/main" id="{72CDB67E-A5E2-4CC0-A0C2-83394DC037A5}"/>
-              </a:ext>
-            </a:extLst>
-          </p:cNvPr>
-          <p:cNvSpPr>
-            <a:spLocks xmlns:a="http://schemas.openxmlformats.org/drawingml/2006/main" noGrp="1"/>
-          </p:cNvSpPr>
-          <p:nvPr/>
-        </p:nvSpPr>
-        <p:spPr>
-          <a:xfrm xmlns:a="http://schemas.openxmlformats.org/drawingml/2006/main">
-            <a:off x="4956048" y="3456432"/>
-            <a:ext cx="1234440" cy="365760"/>
-          </a:xfrm>
-          <a:prstGeom xmlns:a="http://schemas.openxmlformats.org/drawingml/2006/main" prst="rect">
-            <a:avLst/>
-          </a:prstGeom>
-          <a:noFill xmlns:a="http://schemas.openxmlformats.org/drawingml/2006/main"/>
-        </p:spPr>
-        <p:txBody>
-          <a:bodyPr xmlns:a="http://schemas.openxmlformats.org/drawingml/2006/main" wrap="square" lIns="0" tIns="0" rIns="0" bIns="0" anchor="ctr"/>
-          <a:lstStyle xmlns:a="http://schemas.openxmlformats.org/drawingml/2006/main"/>
-          <a:p xmlns:a="http://schemas.openxmlformats.org/drawingml/2006/main">
-            <a:pPr marL="0" indent="0" algn="ctr">
-              <a:buNone/>
-            </a:pPr>
-            <a:r>
-              <a:rPr sz="1150" b="1">
-                <a:solidFill>
-                  <a:srgbClr val="13315C"/>
-                </a:solidFill>
-                <a:latin typeface="微软雅黑"/>
-                <a:ea typeface="微软雅黑"/>
-                <a:cs typeface="微软雅黑"/>
-              </a:rPr>
-              <a:t>¥ ____</a:t>
-            </a:r>
-            <a:endParaRPr sz="1150"/>
-          </a:p>
-        </p:txBody>
-      </p:sp>
-      <p:sp>
-        <p:nvSpPr>
-          <p:cNvPr id="17" name="Text 15">
-            <a:extLst xmlns:a="http://schemas.openxmlformats.org/drawingml/2006/main">
-              <a:ext uri="{FF2B5EF4-FFF2-40B4-BE49-F238E27FC236}">
-                <a16:creationId xmlns:a16="http://schemas.microsoft.com/office/drawing/2014/main" id="{1C1B339C-34E8-485A-ABC1-8531B6AF192B}"/>
-              </a:ext>
-            </a:extLst>
-          </p:cNvPr>
-          <p:cNvSpPr>
-            <a:spLocks xmlns:a="http://schemas.openxmlformats.org/drawingml/2006/main" noGrp="1"/>
-          </p:cNvSpPr>
-          <p:nvPr/>
-        </p:nvSpPr>
-        <p:spPr>
-          <a:xfrm xmlns:a="http://schemas.openxmlformats.org/drawingml/2006/main">
-            <a:off x="841248" y="4032504"/>
-            <a:ext cx="2011680" cy="457200"/>
-          </a:xfrm>
-          <a:prstGeom xmlns:a="http://schemas.openxmlformats.org/drawingml/2006/main" prst="rect">
-            <a:avLst/>
-          </a:prstGeom>
-          <a:noFill xmlns:a="http://schemas.openxmlformats.org/drawingml/2006/main"/>
-        </p:spPr>
-        <p:txBody>
-          <a:bodyPr xmlns:a="http://schemas.openxmlformats.org/drawingml/2006/main" wrap="square" lIns="0" tIns="0" rIns="0" bIns="0" anchor="ctr"/>
-          <a:lstStyle xmlns:a="http://schemas.openxmlformats.org/drawingml/2006/main"/>
-          <a:p xmlns:a="http://schemas.openxmlformats.org/drawingml/2006/main">
-            <a:pPr marL="0" indent="0">
-              <a:buNone/>
-            </a:pPr>
-            <a:r>
-              <a:rPr sz="1300" b="1">
-                <a:solidFill>
-                  <a:srgbClr val="1F2733"/>
-                </a:solidFill>
-                <a:latin typeface="微软雅黑"/>
-                <a:ea typeface="微软雅黑"/>
-                <a:cs typeface="微软雅黑"/>
-              </a:rPr>
-              <a:t>人力节省</a:t>
-            </a:r>
-            <a:endParaRPr sz="1300"/>
-          </a:p>
-        </p:txBody>
-      </p:sp>
-      <p:sp>
-        <p:nvSpPr>
-          <p:cNvPr id="18" name="Text 16">
-            <a:extLst xmlns:a="http://schemas.openxmlformats.org/drawingml/2006/main">
-              <a:ext uri="{FF2B5EF4-FFF2-40B4-BE49-F238E27FC236}">
-                <a16:creationId xmlns:a16="http://schemas.microsoft.com/office/drawing/2014/main" id="{412A966E-2287-484D-BA88-329E8FC3296C}"/>
-              </a:ext>
-            </a:extLst>
-          </p:cNvPr>
-          <p:cNvSpPr>
-            <a:spLocks xmlns:a="http://schemas.openxmlformats.org/drawingml/2006/main" noGrp="1"/>
-          </p:cNvSpPr>
-          <p:nvPr/>
-        </p:nvSpPr>
-        <p:spPr>
-          <a:xfrm xmlns:a="http://schemas.openxmlformats.org/drawingml/2006/main">
-            <a:off x="2852928" y="4032504"/>
-            <a:ext cx="2286000" cy="457200"/>
-          </a:xfrm>
-          <a:prstGeom xmlns:a="http://schemas.openxmlformats.org/drawingml/2006/main" prst="rect">
-            <a:avLst/>
-          </a:prstGeom>
-          <a:noFill xmlns:a="http://schemas.openxmlformats.org/drawingml/2006/main"/>
-        </p:spPr>
-        <p:txBody>
-          <a:bodyPr xmlns:a="http://schemas.openxmlformats.org/drawingml/2006/main" wrap="square" lIns="0" tIns="0" rIns="0" bIns="0" anchor="ctr"/>
-          <a:lstStyle xmlns:a="http://schemas.openxmlformats.org/drawingml/2006/main"/>
-          <a:p xmlns:a="http://schemas.openxmlformats.org/drawingml/2006/main">
-            <a:pPr marL="0" indent="0">
-              <a:buNone/>
-            </a:pPr>
-            <a:r>
-              <a:rPr sz="1100">
-                <a:solidFill>
-                  <a:srgbClr val="6B7280"/>
-                </a:solidFill>
-                <a:latin typeface="微软雅黑"/>
-                <a:ea typeface="微软雅黑"/>
-                <a:cs typeface="微软雅黑"/>
-              </a:rPr>
-              <a:t>核保 + 复核人力下降</a:t>
-            </a:r>
-            <a:endParaRPr sz="1100"/>
-          </a:p>
-        </p:txBody>
-      </p:sp>
-      <p:sp>
-        <p:nvSpPr>
-          <p:cNvPr id="20" name="Text 18">
-            <a:extLst xmlns:a="http://schemas.openxmlformats.org/drawingml/2006/main">
-              <a:ext uri="{FF2B5EF4-FFF2-40B4-BE49-F238E27FC236}">
-                <a16:creationId xmlns:a16="http://schemas.microsoft.com/office/drawing/2014/main" id="{6F6DE4A5-61A9-4CB1-9E9E-F19E76312DEA}"/>
-              </a:ext>
-            </a:extLst>
-          </p:cNvPr>
-          <p:cNvSpPr>
-            <a:spLocks xmlns:a="http://schemas.openxmlformats.org/drawingml/2006/main" noGrp="1"/>
-          </p:cNvSpPr>
-          <p:nvPr/>
-        </p:nvSpPr>
-        <p:spPr>
-          <a:xfrm xmlns:a="http://schemas.openxmlformats.org/drawingml/2006/main">
-            <a:off x="4956048" y="4078224"/>
-            <a:ext cx="1234440" cy="365760"/>
-          </a:xfrm>
-          <a:prstGeom xmlns:a="http://schemas.openxmlformats.org/drawingml/2006/main" prst="rect">
-            <a:avLst/>
-          </a:prstGeom>
-          <a:noFill xmlns:a="http://schemas.openxmlformats.org/drawingml/2006/main"/>
-        </p:spPr>
-        <p:txBody>
-          <a:bodyPr xmlns:a="http://schemas.openxmlformats.org/drawingml/2006/main" wrap="square" lIns="0" tIns="0" rIns="0" bIns="0" anchor="ctr"/>
-          <a:lstStyle xmlns:a="http://schemas.openxmlformats.org/drawingml/2006/main"/>
-          <a:p xmlns:a="http://schemas.openxmlformats.org/drawingml/2006/main">
-            <a:pPr marL="0" indent="0" algn="ctr">
-              <a:buNone/>
-            </a:pPr>
-            <a:r>
-              <a:rPr sz="1150" b="1">
-                <a:solidFill>
-                  <a:srgbClr val="13315C"/>
-                </a:solidFill>
-                <a:latin typeface="微软雅黑"/>
-                <a:ea typeface="微软雅黑"/>
-                <a:cs typeface="微软雅黑"/>
-              </a:rPr>
-              <a:t>¥ ____ /月</a:t>
-            </a:r>
-            <a:endParaRPr sz="1150"/>
-          </a:p>
-        </p:txBody>
-      </p:sp>
-      <p:sp>
-        <p:nvSpPr>
-          <p:cNvPr id="21" name="Text 19">
-            <a:extLst xmlns:a="http://schemas.openxmlformats.org/drawingml/2006/main">
-              <a:ext uri="{FF2B5EF4-FFF2-40B4-BE49-F238E27FC236}">
-                <a16:creationId xmlns:a16="http://schemas.microsoft.com/office/drawing/2014/main" id="{FE5AB551-B943-45BA-A939-7CBAD1EEFBA2}"/>
-              </a:ext>
-            </a:extLst>
-          </p:cNvPr>
-          <p:cNvSpPr>
-            <a:spLocks xmlns:a="http://schemas.openxmlformats.org/drawingml/2006/main" noGrp="1"/>
-          </p:cNvSpPr>
-          <p:nvPr/>
-        </p:nvSpPr>
-        <p:spPr>
-          <a:xfrm xmlns:a="http://schemas.openxmlformats.org/drawingml/2006/main">
-            <a:off x="841248" y="4654296"/>
-            <a:ext cx="2011680" cy="457200"/>
-          </a:xfrm>
-          <a:prstGeom xmlns:a="http://schemas.openxmlformats.org/drawingml/2006/main" prst="rect">
-            <a:avLst/>
-          </a:prstGeom>
-          <a:noFill xmlns:a="http://schemas.openxmlformats.org/drawingml/2006/main"/>
-        </p:spPr>
-        <p:txBody>
-          <a:bodyPr xmlns:a="http://schemas.openxmlformats.org/drawingml/2006/main" wrap="square" lIns="0" tIns="0" rIns="0" bIns="0" anchor="ctr"/>
-          <a:lstStyle xmlns:a="http://schemas.openxmlformats.org/drawingml/2006/main"/>
-          <a:p xmlns:a="http://schemas.openxmlformats.org/drawingml/2006/main">
-            <a:pPr marL="0" indent="0">
-              <a:buNone/>
-            </a:pPr>
-            <a:r>
-              <a:rPr sz="1300" b="1">
-                <a:solidFill>
-                  <a:srgbClr val="1F2733"/>
-                </a:solidFill>
-                <a:latin typeface="微软雅黑"/>
-                <a:ea typeface="微软雅黑"/>
-                <a:cs typeface="微软雅黑"/>
-              </a:rPr>
-              <a:t>质量收益</a:t>
-            </a:r>
-            <a:endParaRPr sz="1300"/>
-          </a:p>
-        </p:txBody>
-      </p:sp>
-      <p:sp>
-        <p:nvSpPr>
-          <p:cNvPr id="22" name="Text 20">
-            <a:extLst xmlns:a="http://schemas.openxmlformats.org/drawingml/2006/main">
-              <a:ext uri="{FF2B5EF4-FFF2-40B4-BE49-F238E27FC236}">
-                <a16:creationId xmlns:a16="http://schemas.microsoft.com/office/drawing/2014/main" id="{8958C2EB-B747-464A-9E6A-525C1C44653A}"/>
-              </a:ext>
-            </a:extLst>
-          </p:cNvPr>
-          <p:cNvSpPr>
-            <a:spLocks xmlns:a="http://schemas.openxmlformats.org/drawingml/2006/main" noGrp="1"/>
-          </p:cNvSpPr>
-          <p:nvPr/>
-        </p:nvSpPr>
-        <p:spPr>
-          <a:xfrm xmlns:a="http://schemas.openxmlformats.org/drawingml/2006/main">
-            <a:off x="2852928" y="4654296"/>
-            <a:ext cx="2286000" cy="457200"/>
-          </a:xfrm>
-          <a:prstGeom xmlns:a="http://schemas.openxmlformats.org/drawingml/2006/main" prst="rect">
-            <a:avLst/>
-          </a:prstGeom>
-          <a:noFill xmlns:a="http://schemas.openxmlformats.org/drawingml/2006/main"/>
-        </p:spPr>
-        <p:txBody>
-          <a:bodyPr xmlns:a="http://schemas.openxmlformats.org/drawingml/2006/main" wrap="square" lIns="0" tIns="0" rIns="0" bIns="0" anchor="ctr"/>
-          <a:lstStyle xmlns:a="http://schemas.openxmlformats.org/drawingml/2006/main"/>
-          <a:p xmlns:a="http://schemas.openxmlformats.org/drawingml/2006/main">
-            <a:pPr marL="0" indent="0">
-              <a:buNone/>
-            </a:pPr>
-            <a:r>
-              <a:rPr sz="1100">
-                <a:solidFill>
-                  <a:srgbClr val="6B7280"/>
-                </a:solidFill>
-                <a:latin typeface="微软雅黑"/>
-                <a:ea typeface="微软雅黑"/>
-                <a:cs typeface="微软雅黑"/>
-              </a:rPr>
-              <a:t>漏判下降带来的赔付优化</a:t>
-            </a:r>
-            <a:endParaRPr sz="1100"/>
-          </a:p>
-        </p:txBody>
-      </p:sp>
-      <p:sp>
-        <p:nvSpPr>
-          <p:cNvPr id="24" name="Text 22">
-            <a:extLst xmlns:a="http://schemas.openxmlformats.org/drawingml/2006/main">
-              <a:ext uri="{FF2B5EF4-FFF2-40B4-BE49-F238E27FC236}">
-                <a16:creationId xmlns:a16="http://schemas.microsoft.com/office/drawing/2014/main" id="{C61170BC-8E39-4E5F-BDBA-EF93A44A4846}"/>
-              </a:ext>
-            </a:extLst>
-          </p:cNvPr>
-          <p:cNvSpPr>
-            <a:spLocks xmlns:a="http://schemas.openxmlformats.org/drawingml/2006/main" noGrp="1"/>
-          </p:cNvSpPr>
-          <p:nvPr/>
-        </p:nvSpPr>
-        <p:spPr>
-          <a:xfrm xmlns:a="http://schemas.openxmlformats.org/drawingml/2006/main">
-            <a:off x="4956048" y="4700016"/>
-            <a:ext cx="1234440" cy="365760"/>
-          </a:xfrm>
-          <a:prstGeom xmlns:a="http://schemas.openxmlformats.org/drawingml/2006/main" prst="rect">
-            <a:avLst/>
-          </a:prstGeom>
-          <a:noFill xmlns:a="http://schemas.openxmlformats.org/drawingml/2006/main"/>
-        </p:spPr>
-        <p:txBody>
-          <a:bodyPr xmlns:a="http://schemas.openxmlformats.org/drawingml/2006/main" wrap="square" lIns="0" tIns="0" rIns="0" bIns="0" anchor="ctr"/>
-          <a:lstStyle xmlns:a="http://schemas.openxmlformats.org/drawingml/2006/main"/>
-          <a:p xmlns:a="http://schemas.openxmlformats.org/drawingml/2006/main">
-            <a:pPr marL="0" indent="0" algn="ctr">
-              <a:buNone/>
-            </a:pPr>
-            <a:r>
-              <a:rPr sz="1150" b="1">
-                <a:solidFill>
-                  <a:srgbClr val="13315C"/>
-                </a:solidFill>
-                <a:latin typeface="微软雅黑"/>
-                <a:ea typeface="微软雅黑"/>
-                <a:cs typeface="微软雅黑"/>
-              </a:rPr>
-              <a:t>¥ ____ /月</a:t>
-            </a:r>
-            <a:endParaRPr sz="1150"/>
-          </a:p>
-        </p:txBody>
-      </p:sp>
-      <p:sp>
-        <p:nvSpPr>
-          <p:cNvPr id="25" name="Text 23">
-            <a:extLst xmlns:a="http://schemas.openxmlformats.org/drawingml/2006/main">
-              <a:ext uri="{FF2B5EF4-FFF2-40B4-BE49-F238E27FC236}">
-                <a16:creationId xmlns:a16="http://schemas.microsoft.com/office/drawing/2014/main" id="{27E7AF6D-4419-41B9-9991-9D2BE927628A}"/>
-              </a:ext>
-            </a:extLst>
-          </p:cNvPr>
-          <p:cNvSpPr>
-            <a:spLocks xmlns:a="http://schemas.openxmlformats.org/drawingml/2006/main" noGrp="1"/>
-          </p:cNvSpPr>
-          <p:nvPr/>
-        </p:nvSpPr>
-        <p:spPr>
-          <a:xfrm xmlns:a="http://schemas.openxmlformats.org/drawingml/2006/main">
-            <a:off x="841248" y="5276088"/>
-            <a:ext cx="2011680" cy="457200"/>
-          </a:xfrm>
-          <a:prstGeom xmlns:a="http://schemas.openxmlformats.org/drawingml/2006/main" prst="rect">
-            <a:avLst/>
-          </a:prstGeom>
-          <a:noFill xmlns:a="http://schemas.openxmlformats.org/drawingml/2006/main"/>
-        </p:spPr>
-        <p:txBody>
-          <a:bodyPr xmlns:a="http://schemas.openxmlformats.org/drawingml/2006/main" wrap="square" lIns="0" tIns="0" rIns="0" bIns="0" anchor="ctr"/>
-          <a:lstStyle xmlns:a="http://schemas.openxmlformats.org/drawingml/2006/main"/>
-          <a:p xmlns:a="http://schemas.openxmlformats.org/drawingml/2006/main">
-            <a:pPr marL="0" indent="0">
-              <a:buNone/>
-            </a:pPr>
-            <a:r>
-              <a:rPr sz="1300" b="1">
-                <a:solidFill>
-                  <a:srgbClr val="1F2733"/>
-                </a:solidFill>
-                <a:latin typeface="微软雅黑"/>
-                <a:ea typeface="微软雅黑"/>
-                <a:cs typeface="微软雅黑"/>
-              </a:rPr>
-              <a:t>投资回收期</a:t>
-            </a:r>
-            <a:endParaRPr sz="1300"/>
-          </a:p>
-        </p:txBody>
-      </p:sp>
-      <p:sp>
-        <p:nvSpPr>
-          <p:cNvPr id="26" name="Text 24">
-            <a:extLst xmlns:a="http://schemas.openxmlformats.org/drawingml/2006/main">
-              <a:ext uri="{FF2B5EF4-FFF2-40B4-BE49-F238E27FC236}">
-                <a16:creationId xmlns:a16="http://schemas.microsoft.com/office/drawing/2014/main" id="{2BB1EE71-7EB6-4492-AA37-169B8656E563}"/>
-              </a:ext>
-            </a:extLst>
-          </p:cNvPr>
-          <p:cNvSpPr>
-            <a:spLocks xmlns:a="http://schemas.openxmlformats.org/drawingml/2006/main" noGrp="1"/>
-          </p:cNvSpPr>
-          <p:nvPr/>
-        </p:nvSpPr>
-        <p:spPr>
-          <a:xfrm xmlns:a="http://schemas.openxmlformats.org/drawingml/2006/main">
-            <a:off x="2852928" y="5276088"/>
-            <a:ext cx="2286000" cy="457200"/>
-          </a:xfrm>
-          <a:prstGeom xmlns:a="http://schemas.openxmlformats.org/drawingml/2006/main" prst="rect">
-            <a:avLst/>
-          </a:prstGeom>
-          <a:noFill xmlns:a="http://schemas.openxmlformats.org/drawingml/2006/main"/>
-        </p:spPr>
-        <p:txBody>
-          <a:bodyPr xmlns:a="http://schemas.openxmlformats.org/drawingml/2006/main" wrap="square" lIns="0" tIns="0" rIns="0" bIns="0" anchor="ctr"/>
-          <a:lstStyle xmlns:a="http://schemas.openxmlformats.org/drawingml/2006/main"/>
-          <a:p xmlns:a="http://schemas.openxmlformats.org/drawingml/2006/main">
-            <a:pPr marL="0" indent="0">
-              <a:buNone/>
-            </a:pPr>
-            <a:r>
-              <a:rPr sz="1100">
-                <a:solidFill>
-                  <a:srgbClr val="6B7280"/>
-                </a:solidFill>
-                <a:latin typeface="微软雅黑"/>
-                <a:ea typeface="微软雅黑"/>
-                <a:cs typeface="微软雅黑"/>
-              </a:rPr>
-              <a:t>净收益 / 投入</a:t>
-            </a:r>
-            <a:endParaRPr sz="1100"/>
-          </a:p>
-        </p:txBody>
-      </p:sp>
-      <p:sp>
-        <p:nvSpPr>
-          <p:cNvPr id="28" name="Text 26">
-            <a:extLst xmlns:a="http://schemas.openxmlformats.org/drawingml/2006/main">
-              <a:ext uri="{FF2B5EF4-FFF2-40B4-BE49-F238E27FC236}">
-                <a16:creationId xmlns:a16="http://schemas.microsoft.com/office/drawing/2014/main" id="{5A5D895B-4FFA-4FE1-B83F-76F1FC18D271}"/>
-              </a:ext>
-            </a:extLst>
-          </p:cNvPr>
-          <p:cNvSpPr>
-            <a:spLocks xmlns:a="http://schemas.openxmlformats.org/drawingml/2006/main" noGrp="1"/>
-          </p:cNvSpPr>
-          <p:nvPr/>
-        </p:nvSpPr>
-        <p:spPr>
-          <a:xfrm xmlns:a="http://schemas.openxmlformats.org/drawingml/2006/main">
-            <a:off x="4956048" y="5321808"/>
-            <a:ext cx="1234440" cy="365760"/>
-          </a:xfrm>
-          <a:prstGeom xmlns:a="http://schemas.openxmlformats.org/drawingml/2006/main" prst="rect">
-            <a:avLst/>
-          </a:prstGeom>
-          <a:noFill xmlns:a="http://schemas.openxmlformats.org/drawingml/2006/main"/>
-        </p:spPr>
-        <p:txBody>
-          <a:bodyPr xmlns:a="http://schemas.openxmlformats.org/drawingml/2006/main" wrap="square" lIns="0" tIns="0" rIns="0" bIns="0" anchor="ctr"/>
-          <a:lstStyle xmlns:a="http://schemas.openxmlformats.org/drawingml/2006/main"/>
-          <a:p xmlns:a="http://schemas.openxmlformats.org/drawingml/2006/main">
-            <a:pPr marL="0" indent="0" algn="ctr">
-              <a:buNone/>
-            </a:pPr>
-            <a:r>
-              <a:rPr sz="1150" b="1">
-                <a:solidFill>
-                  <a:srgbClr val="13315C"/>
-                </a:solidFill>
-                <a:latin typeface="微软雅黑"/>
-                <a:ea typeface="微软雅黑"/>
-                <a:cs typeface="微软雅黑"/>
-              </a:rPr>
-              <a:t>____ 个月</a:t>
-            </a:r>
-            <a:endParaRPr sz="1150"/>
-          </a:p>
-        </p:txBody>
-      </p:sp>
-      <p:sp>
-        <p:nvSpPr>
-          <p:cNvPr id="30" name="Text 28">
-            <a:extLst xmlns:a="http://schemas.openxmlformats.org/drawingml/2006/main">
-              <a:ext uri="{FF2B5EF4-FFF2-40B4-BE49-F238E27FC236}">
-                <a16:creationId xmlns:a16="http://schemas.microsoft.com/office/drawing/2014/main" id="{78E9AAF4-C881-4C9C-87CD-DE182F22201B}"/>
-              </a:ext>
-            </a:extLst>
-          </p:cNvPr>
-          <p:cNvSpPr>
-            <a:spLocks xmlns:a="http://schemas.openxmlformats.org/drawingml/2006/main" noGrp="1"/>
-          </p:cNvSpPr>
-          <p:nvPr/>
-        </p:nvSpPr>
-        <p:spPr>
-          <a:xfrm xmlns:a="http://schemas.openxmlformats.org/drawingml/2006/main">
-            <a:off x="6995160" y="2313432"/>
-            <a:ext cx="4425696" cy="310896"/>
-          </a:xfrm>
-          <a:prstGeom xmlns:a="http://schemas.openxmlformats.org/drawingml/2006/main" prst="rect">
-            <a:avLst/>
-          </a:prstGeom>
-          <a:noFill xmlns:a="http://schemas.openxmlformats.org/drawingml/2006/main"/>
-        </p:spPr>
-        <p:txBody>
-          <a:bodyPr xmlns:a="http://schemas.openxmlformats.org/drawingml/2006/main" wrap="square" lIns="0" tIns="0" rIns="0" bIns="0" anchor="ctr"/>
-          <a:lstStyle xmlns:a="http://schemas.openxmlformats.org/drawingml/2006/main"/>
-          <a:p xmlns:a="http://schemas.openxmlformats.org/drawingml/2006/main">
-            <a:pPr marL="0" indent="0">
-              <a:buNone/>
-            </a:pPr>
-            <a:r>
-              <a:rPr sz="1350" b="1">
-                <a:solidFill>
-                  <a:srgbClr val="13315C"/>
-                </a:solidFill>
-                <a:latin typeface="微软雅黑"/>
-                <a:ea typeface="微软雅黑"/>
-                <a:cs typeface="微软雅黑"/>
-              </a:rPr>
-              <a:t>人力复核量对比（示意）</a:t>
-            </a:r>
-            <a:endParaRPr sz="1350"/>
           </a:p>
         </p:txBody>
       </p:sp>
       <p:graphicFrame>
         <p:nvGraphicFramePr>
-          <p:cNvPr id="79" name="Chart 0"/>
+          <p:cNvPr id="59" name="Chart 0"/>
           <p:cNvGraphicFramePr/>
           <p:nvPr/>
         </p:nvGraphicFramePr>
@@ -21557,104 +21066,12 @@
         </p:xfrm>
         <a:graphic xmlns:a="http://schemas.openxmlformats.org/drawingml/2006/main">
           <a:graphicData uri="http://schemas.openxmlformats.org/drawingml/2006/chart">
-            <c:chart xmlns:r="http://schemas.openxmlformats.org/officeDocument/2006/relationships" xmlns:c="http://schemas.openxmlformats.org/drawingml/2006/chart" r:id="R0b07b1ed31d74edf"/>
+            <c:chart xmlns:r="http://schemas.openxmlformats.org/officeDocument/2006/relationships" xmlns:c="http://schemas.openxmlformats.org/drawingml/2006/chart" r:id="R0f6341e0559f4ce2"/>
           </a:graphicData>
         </a:graphic>
       </p:graphicFrame>
       <p:sp>
         <p:nvSpPr>
-          <p:cNvPr id="33" name="Text 30">
-            <a:extLst xmlns:a="http://schemas.openxmlformats.org/drawingml/2006/main">
-              <a:ext uri="{FF2B5EF4-FFF2-40B4-BE49-F238E27FC236}">
-                <a16:creationId xmlns:a16="http://schemas.microsoft.com/office/drawing/2014/main" id="{AE896881-7CE7-4582-92A8-F8F78749520A}"/>
-              </a:ext>
-            </a:extLst>
-          </p:cNvPr>
-          <p:cNvSpPr>
-            <a:spLocks xmlns:a="http://schemas.openxmlformats.org/drawingml/2006/main" noGrp="1"/>
-          </p:cNvSpPr>
-          <p:nvPr/>
-        </p:nvSpPr>
-        <p:spPr>
-          <a:xfrm xmlns:a="http://schemas.openxmlformats.org/drawingml/2006/main">
-            <a:off x="6995160" y="4846320"/>
-            <a:ext cx="4425696" cy="402336"/>
-          </a:xfrm>
-          <a:prstGeom xmlns:a="http://schemas.openxmlformats.org/drawingml/2006/main" prst="rect">
-            <a:avLst/>
-          </a:prstGeom>
-          <a:noFill xmlns:a="http://schemas.openxmlformats.org/drawingml/2006/main"/>
-        </p:spPr>
-        <p:txBody>
-          <a:bodyPr xmlns:a="http://schemas.openxmlformats.org/drawingml/2006/main" wrap="square" lIns="0" tIns="0" rIns="0" bIns="0" anchor="ctr"/>
-          <a:lstStyle xmlns:a="http://schemas.openxmlformats.org/drawingml/2006/main"/>
-          <a:p xmlns:a="http://schemas.openxmlformats.org/drawingml/2006/main">
-            <a:pPr marL="0" indent="0">
-              <a:buNone/>
-            </a:pPr>
-            <a:r>
-              <a:rPr sz="1400" b="1">
-                <a:solidFill>
-                  <a:srgbClr val="FFFFFF"/>
-                </a:solidFill>
-                <a:latin typeface="微软雅黑"/>
-                <a:ea typeface="微软雅黑"/>
-                <a:cs typeface="微软雅黑"/>
-              </a:rPr>
-              <a:t>人工复核量预计下降 60%+【待核实】</a:t>
-            </a:r>
-            <a:endParaRPr sz="1400"/>
-          </a:p>
-        </p:txBody>
-      </p:sp>
-      <p:sp>
-        <p:nvSpPr>
-          <p:cNvPr id="34" name="Text 31">
-            <a:extLst xmlns:a="http://schemas.openxmlformats.org/drawingml/2006/main">
-              <a:ext uri="{FF2B5EF4-FFF2-40B4-BE49-F238E27FC236}">
-                <a16:creationId xmlns:a16="http://schemas.microsoft.com/office/drawing/2014/main" id="{8EADD0DE-1934-48E1-B147-14E9073E50A3}"/>
-              </a:ext>
-            </a:extLst>
-          </p:cNvPr>
-          <p:cNvSpPr>
-            <a:spLocks xmlns:a="http://schemas.openxmlformats.org/drawingml/2006/main" noGrp="1"/>
-          </p:cNvSpPr>
-          <p:nvPr/>
-        </p:nvSpPr>
-        <p:spPr>
-          <a:xfrm xmlns:a="http://schemas.openxmlformats.org/drawingml/2006/main">
-            <a:off x="6995160" y="5257800"/>
-            <a:ext cx="4379976" cy="777240"/>
-          </a:xfrm>
-          <a:prstGeom xmlns:a="http://schemas.openxmlformats.org/drawingml/2006/main" prst="rect">
-            <a:avLst/>
-          </a:prstGeom>
-          <a:noFill xmlns:a="http://schemas.openxmlformats.org/drawingml/2006/main"/>
-        </p:spPr>
-        <p:txBody>
-          <a:bodyPr xmlns:a="http://schemas.openxmlformats.org/drawingml/2006/main" wrap="square" lIns="0" tIns="0" rIns="0" bIns="0" anchor="t"/>
-          <a:lstStyle xmlns:a="http://schemas.openxmlformats.org/drawingml/2006/main"/>
-          <a:p xmlns:a="http://schemas.openxmlformats.org/drawingml/2006/main">
-            <a:pPr marL="0" indent="0">
-              <a:buNone/>
-            </a:pPr>
-            <a:r>
-              <a:rPr sz="1150">
-                <a:solidFill>
-                  <a:srgbClr val="CADCFC"/>
-                </a:solidFill>
-                <a:latin typeface="微软雅黑"/>
-                <a:ea typeface="微软雅黑"/>
-                <a:cs typeface="微软雅黑"/>
-              </a:rPr>
-              <a:t>高置信自动放行 + 分级审批聚焦重大单，人力投入显著下降，投资回收期短。</a:t>
-            </a:r>
-            <a:endParaRPr sz="1150"/>
-          </a:p>
-        </p:txBody>
-      </p:sp>
-      <p:sp>
-        <p:nvSpPr>
           <p:cNvPr id="36" name="Text 33">
             <a:extLst xmlns:a="http://schemas.openxmlformats.org/drawingml/2006/main">
               <a:ext uri="{FF2B5EF4-FFF2-40B4-BE49-F238E27FC236}">
@@ -21704,7 +21121,7 @@
           <p:cNvPr id="38" name="">
             <a:extLst xmlns:a="http://schemas.openxmlformats.org/drawingml/2006/main">
               <a:ext uri="{FF2B5EF4-FFF2-40B4-BE49-F238E27FC236}">
-                <a16:creationId xmlns:a16="http://schemas.microsoft.com/office/drawing/2014/main" id="{31A2BBCA-ECEC-4DB9-86B2-159D89C49900}"/>
+                <a16:creationId xmlns:a16="http://schemas.microsoft.com/office/drawing/2014/main" id="{866642C3-8E16-4447-A60D-BB1661C10D1E}"/>
               </a:ext>
             </a:extLst>
           </p:cNvPr>
@@ -21734,25 +21151,25 @@
           <p:cNvPr id="39" name="">
             <a:extLst xmlns:a="http://schemas.openxmlformats.org/drawingml/2006/main">
               <a:ext uri="{FF2B5EF4-FFF2-40B4-BE49-F238E27FC236}">
-                <a16:creationId xmlns:a16="http://schemas.microsoft.com/office/drawing/2014/main" id="{E054AE39-0D43-4374-9873-EF0EE74B6B42}"/>
-              </a:ext>
-            </a:extLst>
-          </p:cNvPr>
-          <p:cNvSpPr>
-            <a:spLocks xmlns:a="http://schemas.openxmlformats.org/drawingml/2006/main" noGrp="1"/>
-          </p:cNvSpPr>
-          <p:nvPr/>
-        </p:nvSpPr>
-        <p:spPr>
-          <a:xfrm xmlns:a="http://schemas.openxmlformats.org/drawingml/2006/main">
-            <a:off x="571500" y="2038350"/>
-            <a:ext cx="47625" cy="161925"/>
+                <a16:creationId xmlns:a16="http://schemas.microsoft.com/office/drawing/2014/main" id="{DCA9513B-7B7B-4E4B-AA45-A3973F92583B}"/>
+              </a:ext>
+            </a:extLst>
+          </p:cNvPr>
+          <p:cNvSpPr>
+            <a:spLocks xmlns:a="http://schemas.openxmlformats.org/drawingml/2006/main" noGrp="1"/>
+          </p:cNvSpPr>
+          <p:nvPr/>
+        </p:nvSpPr>
+        <p:spPr>
+          <a:xfrm xmlns:a="http://schemas.openxmlformats.org/drawingml/2006/main">
+            <a:off x="571500" y="2000250"/>
+            <a:ext cx="47625" cy="190500"/>
           </a:xfrm>
           <a:prstGeom xmlns:a="http://schemas.openxmlformats.org/drawingml/2006/main" prst="rect">
             <a:avLst/>
           </a:prstGeom>
           <a:solidFill xmlns:a="http://schemas.openxmlformats.org/drawingml/2006/main">
-            <a:srgbClr val="1D5B9C"/>
+            <a:srgbClr val="1479C9"/>
           </a:solidFill>
           <a:ln xmlns:a="http://schemas.openxmlformats.org/drawingml/2006/main" w="0">
             <a:noFill/>
@@ -21764,19 +21181,19 @@
           <p:cNvPr id="40" name="">
             <a:extLst xmlns:a="http://schemas.openxmlformats.org/drawingml/2006/main">
               <a:ext uri="{FF2B5EF4-FFF2-40B4-BE49-F238E27FC236}">
-                <a16:creationId xmlns:a16="http://schemas.microsoft.com/office/drawing/2014/main" id="{E108FAB5-7A18-4589-95ED-224695DF786D}"/>
-              </a:ext>
-            </a:extLst>
-          </p:cNvPr>
-          <p:cNvSpPr>
-            <a:spLocks xmlns:a="http://schemas.openxmlformats.org/drawingml/2006/main" noGrp="1"/>
-          </p:cNvSpPr>
-          <p:nvPr/>
-        </p:nvSpPr>
-        <p:spPr>
-          <a:xfrm xmlns:a="http://schemas.openxmlformats.org/drawingml/2006/main">
-            <a:off x="695325" y="2019300"/>
-            <a:ext cx="4857750" cy="209550"/>
+                <a16:creationId xmlns:a16="http://schemas.microsoft.com/office/drawing/2014/main" id="{D121DEB5-5687-42B9-9D1B-8EB57B10237D}"/>
+              </a:ext>
+            </a:extLst>
+          </p:cNvPr>
+          <p:cNvSpPr>
+            <a:spLocks xmlns:a="http://schemas.openxmlformats.org/drawingml/2006/main" noGrp="1"/>
+          </p:cNvSpPr>
+          <p:nvPr/>
+        </p:nvSpPr>
+        <p:spPr>
+          <a:xfrm xmlns:a="http://schemas.openxmlformats.org/drawingml/2006/main">
+            <a:off x="714375" y="1981200"/>
+            <a:ext cx="4762500" cy="238125"/>
           </a:xfrm>
           <a:prstGeom xmlns:a="http://schemas.openxmlformats.org/drawingml/2006/main" prst="rect">
             <a:avLst/>
@@ -21788,37 +21205,37 @@
         </p:spPr>
         <p:txBody>
           <a:bodyPr xmlns:a="http://schemas.openxmlformats.org/drawingml/2006/main">
-            <a:normAutofit fontScale="43056"/>
+            <a:normAutofit fontScale="53472"/>
           </a:bodyPr>
           <a:lstStyle xmlns:a="http://schemas.openxmlformats.org/drawingml/2006/main"/>
           <a:p xmlns:a="http://schemas.openxmlformats.org/drawingml/2006/main">
             <a:pPr>
               <a:defRPr b="1">
                 <a:solidFill>
-                  <a:srgbClr val="173B6B"/>
+                  <a:srgbClr val="113B68"/>
                 </a:solidFill>
               </a:defRPr>
             </a:pPr>
             <a:r>
               <a:rPr b="1">
                 <a:solidFill>
-                  <a:srgbClr val="173B6B"/>
-                </a:solidFill>
-              </a:rPr>
-              <a:t>1. 资源投入成本</a:t>
+                  <a:srgbClr val="113B68"/>
+                </a:solidFill>
+              </a:rPr>
+              <a:t>1.1. 开发人力成本</a:t>
             </a:r>
           </a:p>
         </p:txBody>
       </p:sp>
       <p:graphicFrame>
         <p:nvGraphicFramePr>
-          <p:cNvPr id="86" name=""/>
+          <p:cNvPr id="64" name=""/>
           <p:cNvGraphicFramePr/>
           <p:nvPr/>
         </p:nvGraphicFramePr>
         <p:xfrm>
           <a:off xmlns:a="http://schemas.openxmlformats.org/drawingml/2006/main" x="571500" y="2266950"/>
-          <a:ext xmlns:a="http://schemas.openxmlformats.org/drawingml/2006/main" cx="5257800" cy="1066800"/>
+          <a:ext xmlns:a="http://schemas.openxmlformats.org/drawingml/2006/main" cx="5191125" cy="1143000"/>
         </p:xfrm>
         <a:graphic xmlns:a="http://schemas.openxmlformats.org/drawingml/2006/main">
           <a:graphicData uri="http://schemas.openxmlformats.org/drawingml/2006/table">
@@ -21826,11 +21243,11 @@
               <a:tblPr firstRow="1" bandRow="1"/>
               <a:tblGrid>
                 <a:gridCol w="2047875"/>
-                <a:gridCol w="952500"/>
-                <a:gridCol w="1047750"/>
-                <a:gridCol w="1209675"/>
+                <a:gridCol w="1000125"/>
+                <a:gridCol w="1000125"/>
+                <a:gridCol w="1143000"/>
               </a:tblGrid>
-              <a:tr h="213360">
+              <a:tr h="228600">
                 <a:tc>
                   <a:txBody>
                     <a:bodyPr>
@@ -21840,18 +21257,18 @@
                     <a:p>
                       <a:pPr algn="ctr"/>
                       <a:r>
-                        <a:rPr sz="615" b="1">
+                        <a:rPr sz="788" b="1">
                           <a:solidFill>
-                            <a:srgbClr val="173B6B"/>
+                            <a:srgbClr val="113B68"/>
                           </a:solidFill>
                         </a:rPr>
-                        <a:t>人力投入</a:t>
+                        <a:t>角色</a:t>
                       </a:r>
                     </a:p>
                   </a:txBody>
                   <a:tcPr marL="91440" marR="91440" marT="45720" marB="45720">
                     <a:solidFill>
-                      <a:srgbClr val="E8F1FA"/>
+                      <a:srgbClr val="E3EFFA"/>
                     </a:solidFill>
                   </a:tcPr>
                 </a:tc>
@@ -21864,9 +21281,9 @@
                     <a:p>
                       <a:pPr algn="ctr"/>
                       <a:r>
-                        <a:rPr sz="615" b="1">
+                        <a:rPr sz="788" b="1">
                           <a:solidFill>
-                            <a:srgbClr val="173B6B"/>
+                            <a:srgbClr val="113B68"/>
                           </a:solidFill>
                         </a:rPr>
                         <a:t>工时</a:t>
@@ -21875,7 +21292,7 @@
                   </a:txBody>
                   <a:tcPr marL="91440" marR="91440" marT="45720" marB="45720">
                     <a:solidFill>
-                      <a:srgbClr val="E8F1FA"/>
+                      <a:srgbClr val="E3EFFA"/>
                     </a:solidFill>
                   </a:tcPr>
                 </a:tc>
@@ -21888,9 +21305,9 @@
                     <a:p>
                       <a:pPr algn="ctr"/>
                       <a:r>
-                        <a:rPr sz="615" b="1">
+                        <a:rPr sz="788" b="1">
                           <a:solidFill>
-                            <a:srgbClr val="173B6B"/>
+                            <a:srgbClr val="113B68"/>
                           </a:solidFill>
                         </a:rPr>
                         <a:t>单价</a:t>
@@ -21899,7 +21316,7 @@
                   </a:txBody>
                   <a:tcPr marL="91440" marR="91440" marT="45720" marB="45720">
                     <a:solidFill>
-                      <a:srgbClr val="E8F1FA"/>
+                      <a:srgbClr val="E3EFFA"/>
                     </a:solidFill>
                   </a:tcPr>
                 </a:tc>
@@ -21912,9 +21329,9 @@
                     <a:p>
                       <a:pPr algn="ctr"/>
                       <a:r>
-                        <a:rPr sz="615" b="1">
+                        <a:rPr sz="788" b="1">
                           <a:solidFill>
-                            <a:srgbClr val="173B6B"/>
+                            <a:srgbClr val="113B68"/>
                           </a:solidFill>
                         </a:rPr>
                         <a:t>成本</a:t>
@@ -21923,12 +21340,12 @@
                   </a:txBody>
                   <a:tcPr marL="91440" marR="91440" marT="45720" marB="45720">
                     <a:solidFill>
-                      <a:srgbClr val="E8F1FA"/>
+                      <a:srgbClr val="E3EFFA"/>
                     </a:solidFill>
                   </a:tcPr>
                 </a:tc>
               </a:tr>
-              <a:tr h="213360">
+              <a:tr h="228600">
                 <a:tc>
                   <a:txBody>
                     <a:bodyPr>
@@ -21938,9 +21355,9 @@
                     <a:p>
                       <a:pPr algn="l"/>
                       <a:r>
-                        <a:rPr sz="540">
+                        <a:rPr sz="694">
                           <a:solidFill>
-                            <a:srgbClr val="3E4C5D"/>
+                            <a:srgbClr val="34495E"/>
                           </a:solidFill>
                         </a:rPr>
                         <a:t>后端开发（Java）</a:t>
@@ -21962,9 +21379,9 @@
                     <a:p>
                       <a:pPr algn="ctr"/>
                       <a:r>
-                        <a:rPr sz="540">
+                        <a:rPr sz="694">
                           <a:solidFill>
-                            <a:srgbClr val="3E4C5D"/>
+                            <a:srgbClr val="34495E"/>
                           </a:solidFill>
                         </a:rPr>
                         <a:t>32h</a:t>
@@ -21986,9 +21403,9 @@
                     <a:p>
                       <a:pPr algn="ctr"/>
                       <a:r>
-                        <a:rPr sz="540">
+                        <a:rPr sz="694">
                           <a:solidFill>
-                            <a:srgbClr val="3E4C5D"/>
+                            <a:srgbClr val="34495E"/>
                           </a:solidFill>
                         </a:rPr>
                         <a:t>60元/h</a:t>
@@ -22010,9 +21427,9 @@
                     <a:p>
                       <a:pPr algn="ctr"/>
                       <a:r>
-                        <a:rPr sz="540">
+                        <a:rPr sz="694">
                           <a:solidFill>
-                            <a:srgbClr val="3E4C5D"/>
+                            <a:srgbClr val="34495E"/>
                           </a:solidFill>
                         </a:rPr>
                         <a:t>1,920元</a:t>
@@ -22026,7 +21443,7 @@
                   </a:tcPr>
                 </a:tc>
               </a:tr>
-              <a:tr h="213360">
+              <a:tr h="228600">
                 <a:tc>
                   <a:txBody>
                     <a:bodyPr>
@@ -22036,9 +21453,9 @@
                     <a:p>
                       <a:pPr algn="l"/>
                       <a:r>
-                        <a:rPr sz="540">
+                        <a:rPr sz="694">
                           <a:solidFill>
-                            <a:srgbClr val="3E4C5D"/>
+                            <a:srgbClr val="34495E"/>
                           </a:solidFill>
                         </a:rPr>
                         <a:t>前端开发（Vue）</a:t>
@@ -22060,9 +21477,9 @@
                     <a:p>
                       <a:pPr algn="ctr"/>
                       <a:r>
-                        <a:rPr sz="540">
+                        <a:rPr sz="694">
                           <a:solidFill>
-                            <a:srgbClr val="3E4C5D"/>
+                            <a:srgbClr val="34495E"/>
                           </a:solidFill>
                         </a:rPr>
                         <a:t>15h</a:t>
@@ -22084,9 +21501,9 @@
                     <a:p>
                       <a:pPr algn="ctr"/>
                       <a:r>
-                        <a:rPr sz="540">
+                        <a:rPr sz="694">
                           <a:solidFill>
-                            <a:srgbClr val="3E4C5D"/>
+                            <a:srgbClr val="34495E"/>
                           </a:solidFill>
                         </a:rPr>
                         <a:t>60元/h</a:t>
@@ -22108,9 +21525,9 @@
                     <a:p>
                       <a:pPr algn="ctr"/>
                       <a:r>
-                        <a:rPr sz="540">
+                        <a:rPr sz="694">
                           <a:solidFill>
-                            <a:srgbClr val="3E4C5D"/>
+                            <a:srgbClr val="34495E"/>
                           </a:solidFill>
                         </a:rPr>
                         <a:t>900元</a:t>
@@ -22124,7 +21541,7 @@
                   </a:tcPr>
                 </a:tc>
               </a:tr>
-              <a:tr h="213360">
+              <a:tr h="228600">
                 <a:tc>
                   <a:txBody>
                     <a:bodyPr>
@@ -22134,9 +21551,9 @@
                     <a:p>
                       <a:pPr algn="l"/>
                       <a:r>
-                        <a:rPr sz="540">
+                        <a:rPr sz="694">
                           <a:solidFill>
-                            <a:srgbClr val="3E4C5D"/>
+                            <a:srgbClr val="34495E"/>
                           </a:solidFill>
                         </a:rPr>
                         <a:t>测试 / 压测</a:t>
@@ -22158,9 +21575,9 @@
                     <a:p>
                       <a:pPr algn="ctr"/>
                       <a:r>
-                        <a:rPr sz="540">
+                        <a:rPr sz="694">
                           <a:solidFill>
-                            <a:srgbClr val="3E4C5D"/>
+                            <a:srgbClr val="34495E"/>
                           </a:solidFill>
                         </a:rPr>
                         <a:t>13h</a:t>
@@ -22182,9 +21599,9 @@
                     <a:p>
                       <a:pPr algn="ctr"/>
                       <a:r>
-                        <a:rPr sz="540">
+                        <a:rPr sz="694">
                           <a:solidFill>
-                            <a:srgbClr val="3E4C5D"/>
+                            <a:srgbClr val="34495E"/>
                           </a:solidFill>
                         </a:rPr>
                         <a:t>60元/h</a:t>
@@ -22206,9 +21623,9 @@
                     <a:p>
                       <a:pPr algn="ctr"/>
                       <a:r>
-                        <a:rPr sz="540">
+                        <a:rPr sz="694">
                           <a:solidFill>
-                            <a:srgbClr val="3E4C5D"/>
+                            <a:srgbClr val="34495E"/>
                           </a:solidFill>
                         </a:rPr>
                         <a:t>780元</a:t>
@@ -22222,7 +21639,7 @@
                   </a:tcPr>
                 </a:tc>
               </a:tr>
-              <a:tr h="213360">
+              <a:tr h="228600">
                 <a:tc>
                   <a:txBody>
                     <a:bodyPr>
@@ -22232,9 +21649,9 @@
                     <a:p>
                       <a:pPr algn="l"/>
                       <a:r>
-                        <a:rPr sz="540" b="1">
+                        <a:rPr sz="694" b="1">
                           <a:solidFill>
-                            <a:srgbClr val="187A43"/>
+                            <a:srgbClr val="087A3F"/>
                           </a:solidFill>
                         </a:rPr>
                         <a:t>一次性开发投入</a:t>
@@ -22243,7 +21660,7 @@
                   </a:txBody>
                   <a:tcPr marL="91440" marR="91440" marT="45720" marB="45720">
                     <a:solidFill>
-                      <a:srgbClr val="EAF6EF"/>
+                      <a:srgbClr val="E8F5ED"/>
                     </a:solidFill>
                   </a:tcPr>
                 </a:tc>
@@ -22256,9 +21673,9 @@
                     <a:p>
                       <a:pPr algn="ctr"/>
                       <a:r>
-                        <a:rPr sz="540" b="1">
+                        <a:rPr sz="694" b="1">
                           <a:solidFill>
-                            <a:srgbClr val="187A43"/>
+                            <a:srgbClr val="087A3F"/>
                           </a:solidFill>
                         </a:rPr>
                         <a:t>60h</a:t>
@@ -22267,7 +21684,7 @@
                   </a:txBody>
                   <a:tcPr marL="91440" marR="91440" marT="45720" marB="45720">
                     <a:solidFill>
-                      <a:srgbClr val="EAF6EF"/>
+                      <a:srgbClr val="E8F5ED"/>
                     </a:solidFill>
                   </a:tcPr>
                 </a:tc>
@@ -22280,9 +21697,9 @@
                     <a:p>
                       <a:pPr algn="ctr"/>
                       <a:r>
-                        <a:rPr sz="540" b="1">
+                        <a:rPr sz="694" b="1">
                           <a:solidFill>
-                            <a:srgbClr val="187A43"/>
+                            <a:srgbClr val="087A3F"/>
                           </a:solidFill>
                         </a:rPr>
                         <a:t>—</a:t>
@@ -22291,7 +21708,7 @@
                   </a:txBody>
                   <a:tcPr marL="91440" marR="91440" marT="45720" marB="45720">
                     <a:solidFill>
-                      <a:srgbClr val="EAF6EF"/>
+                      <a:srgbClr val="E8F5ED"/>
                     </a:solidFill>
                   </a:tcPr>
                 </a:tc>
@@ -22304,9 +21721,9 @@
                     <a:p>
                       <a:pPr algn="ctr"/>
                       <a:r>
-                        <a:rPr sz="540" b="1">
+                        <a:rPr sz="694" b="1">
                           <a:solidFill>
-                            <a:srgbClr val="187A43"/>
+                            <a:srgbClr val="087A3F"/>
                           </a:solidFill>
                         </a:rPr>
                         <a:t>3,600元</a:t>
@@ -22315,7 +21732,7 @@
                   </a:txBody>
                   <a:tcPr marL="91440" marR="91440" marT="45720" marB="45720">
                     <a:solidFill>
-                      <a:srgbClr val="EAF6EF"/>
+                      <a:srgbClr val="E8F5ED"/>
                     </a:solidFill>
                   </a:tcPr>
                 </a:tc>
@@ -22329,25 +21746,25 @@
           <p:cNvPr id="42" name="">
             <a:extLst xmlns:a="http://schemas.openxmlformats.org/drawingml/2006/main">
               <a:ext uri="{FF2B5EF4-FFF2-40B4-BE49-F238E27FC236}">
-                <a16:creationId xmlns:a16="http://schemas.microsoft.com/office/drawing/2014/main" id="{E7BEE15C-AD0F-4BD3-8EDF-258ACCEA173D}"/>
-              </a:ext>
-            </a:extLst>
-          </p:cNvPr>
-          <p:cNvSpPr>
-            <a:spLocks xmlns:a="http://schemas.openxmlformats.org/drawingml/2006/main" noGrp="1"/>
-          </p:cNvSpPr>
-          <p:nvPr/>
-        </p:nvSpPr>
-        <p:spPr>
-          <a:xfrm xmlns:a="http://schemas.openxmlformats.org/drawingml/2006/main">
-            <a:off x="571500" y="3495675"/>
-            <a:ext cx="47625" cy="161925"/>
+                <a16:creationId xmlns:a16="http://schemas.microsoft.com/office/drawing/2014/main" id="{AA218474-4361-4716-A3B2-359807AE817A}"/>
+              </a:ext>
+            </a:extLst>
+          </p:cNvPr>
+          <p:cNvSpPr>
+            <a:spLocks xmlns:a="http://schemas.openxmlformats.org/drawingml/2006/main" noGrp="1"/>
+          </p:cNvSpPr>
+          <p:nvPr/>
+        </p:nvSpPr>
+        <p:spPr>
+          <a:xfrm xmlns:a="http://schemas.openxmlformats.org/drawingml/2006/main">
+            <a:off x="571500" y="3638550"/>
+            <a:ext cx="47625" cy="190500"/>
           </a:xfrm>
           <a:prstGeom xmlns:a="http://schemas.openxmlformats.org/drawingml/2006/main" prst="rect">
             <a:avLst/>
           </a:prstGeom>
           <a:solidFill xmlns:a="http://schemas.openxmlformats.org/drawingml/2006/main">
-            <a:srgbClr val="2C8B77"/>
+            <a:srgbClr val="179B83"/>
           </a:solidFill>
           <a:ln xmlns:a="http://schemas.openxmlformats.org/drawingml/2006/main" w="0">
             <a:noFill/>
@@ -22359,19 +21776,19 @@
           <p:cNvPr id="43" name="">
             <a:extLst xmlns:a="http://schemas.openxmlformats.org/drawingml/2006/main">
               <a:ext uri="{FF2B5EF4-FFF2-40B4-BE49-F238E27FC236}">
-                <a16:creationId xmlns:a16="http://schemas.microsoft.com/office/drawing/2014/main" id="{8E27B060-AFBA-41A4-A6A6-558FCEEB6BD8}"/>
-              </a:ext>
-            </a:extLst>
-          </p:cNvPr>
-          <p:cNvSpPr>
-            <a:spLocks xmlns:a="http://schemas.openxmlformats.org/drawingml/2006/main" noGrp="1"/>
-          </p:cNvSpPr>
-          <p:nvPr/>
-        </p:nvSpPr>
-        <p:spPr>
-          <a:xfrm xmlns:a="http://schemas.openxmlformats.org/drawingml/2006/main">
-            <a:off x="695325" y="3476625"/>
-            <a:ext cx="4857750" cy="209550"/>
+                <a16:creationId xmlns:a16="http://schemas.microsoft.com/office/drawing/2014/main" id="{440C7CFF-D86B-4C63-868E-CC55E389EE2D}"/>
+              </a:ext>
+            </a:extLst>
+          </p:cNvPr>
+          <p:cNvSpPr>
+            <a:spLocks xmlns:a="http://schemas.openxmlformats.org/drawingml/2006/main" noGrp="1"/>
+          </p:cNvSpPr>
+          <p:nvPr/>
+        </p:nvSpPr>
+        <p:spPr>
+          <a:xfrm xmlns:a="http://schemas.openxmlformats.org/drawingml/2006/main">
+            <a:off x="714375" y="3619500"/>
+            <a:ext cx="5048250" cy="238125"/>
           </a:xfrm>
           <a:prstGeom xmlns:a="http://schemas.openxmlformats.org/drawingml/2006/main" prst="rect">
             <a:avLst/>
@@ -22383,49 +21800,50 @@
         </p:spPr>
         <p:txBody>
           <a:bodyPr xmlns:a="http://schemas.openxmlformats.org/drawingml/2006/main">
-            <a:normAutofit fontScale="43056"/>
+            <a:normAutofit fontScale="53472"/>
           </a:bodyPr>
           <a:lstStyle xmlns:a="http://schemas.openxmlformats.org/drawingml/2006/main"/>
           <a:p xmlns:a="http://schemas.openxmlformats.org/drawingml/2006/main">
             <a:pPr>
               <a:defRPr b="1">
                 <a:solidFill>
-                  <a:srgbClr val="173B6B"/>
+                  <a:srgbClr val="113B68"/>
                 </a:solidFill>
               </a:defRPr>
             </a:pPr>
             <a:r>
               <a:rPr b="1">
                 <a:solidFill>
-                  <a:srgbClr val="173B6B"/>
-                </a:solidFill>
-              </a:rPr>
-              <a:t>1.2. 模型与 Token 成本</a:t>
+                  <a:srgbClr val="113B68"/>
+                </a:solidFill>
+              </a:rPr>
+              <a:t>1.2. 模型与 Token 成本（单次交互预估）</a:t>
             </a:r>
           </a:p>
         </p:txBody>
       </p:sp>
       <p:graphicFrame>
         <p:nvGraphicFramePr>
-          <p:cNvPr id="89" name=""/>
+          <p:cNvPr id="67" name=""/>
           <p:cNvGraphicFramePr/>
           <p:nvPr/>
         </p:nvGraphicFramePr>
         <p:xfrm>
-          <a:off xmlns:a="http://schemas.openxmlformats.org/drawingml/2006/main" x="571500" y="3724275"/>
-          <a:ext xmlns:a="http://schemas.openxmlformats.org/drawingml/2006/main" cx="5257800" cy="695325"/>
+          <a:off xmlns:a="http://schemas.openxmlformats.org/drawingml/2006/main" x="571500" y="3905250"/>
+          <a:ext xmlns:a="http://schemas.openxmlformats.org/drawingml/2006/main" cx="5191125" cy="1847850"/>
         </p:xfrm>
         <a:graphic xmlns:a="http://schemas.openxmlformats.org/drawingml/2006/main">
           <a:graphicData uri="http://schemas.openxmlformats.org/drawingml/2006/table">
             <a:tbl>
               <a:tblPr firstRow="1" bandRow="1"/>
               <a:tblGrid>
-                <a:gridCol w="1857375"/>
-                <a:gridCol w="1162050"/>
-                <a:gridCol w="1190625"/>
-                <a:gridCol w="1047750"/>
+                <a:gridCol w="1666875"/>
+                <a:gridCol w="1000125"/>
+                <a:gridCol w="1000125"/>
+                <a:gridCol w="762000"/>
+                <a:gridCol w="762000"/>
               </a:tblGrid>
-              <a:tr h="173831">
+              <a:tr h="263979">
                 <a:tc>
                   <a:txBody>
                     <a:bodyPr>
@@ -22435,9 +21853,9 @@
                     <a:p>
                       <a:pPr algn="ctr"/>
                       <a:r>
-                        <a:rPr sz="615" b="1">
+                        <a:rPr sz="788" b="1">
                           <a:solidFill>
-                            <a:srgbClr val="173B6B"/>
+                            <a:srgbClr val="113B68"/>
                           </a:solidFill>
                         </a:rPr>
                         <a:t>调用场景</a:t>
@@ -22446,7 +21864,7 @@
                   </a:txBody>
                   <a:tcPr marL="91440" marR="91440" marT="45720" marB="45720">
                     <a:solidFill>
-                      <a:srgbClr val="E8F1FA"/>
+                      <a:srgbClr val="E3EFFA"/>
                     </a:solidFill>
                   </a:tcPr>
                 </a:tc>
@@ -22459,18 +21877,18 @@
                     <a:p>
                       <a:pPr algn="ctr"/>
                       <a:r>
-                        <a:rPr sz="615" b="1">
+                        <a:rPr sz="788" b="1">
                           <a:solidFill>
-                            <a:srgbClr val="173B6B"/>
+                            <a:srgbClr val="113B68"/>
                           </a:solidFill>
                         </a:rPr>
-                        <a:t>输入 / 输出</a:t>
+                        <a:t>Token 输入</a:t>
                       </a:r>
                     </a:p>
                   </a:txBody>
                   <a:tcPr marL="91440" marR="91440" marT="45720" marB="45720">
                     <a:solidFill>
-                      <a:srgbClr val="E8F1FA"/>
+                      <a:srgbClr val="E3EFFA"/>
                     </a:solidFill>
                   </a:tcPr>
                 </a:tc>
@@ -22483,18 +21901,18 @@
                     <a:p>
                       <a:pPr algn="ctr"/>
                       <a:r>
-                        <a:rPr sz="615" b="1">
+                        <a:rPr sz="788" b="1">
                           <a:solidFill>
-                            <a:srgbClr val="173B6B"/>
+                            <a:srgbClr val="113B68"/>
                           </a:solidFill>
                         </a:rPr>
-                        <a:t>单次成本</a:t>
+                        <a:t>Token 输出</a:t>
                       </a:r>
                     </a:p>
                   </a:txBody>
                   <a:tcPr marL="91440" marR="91440" marT="45720" marB="45720">
                     <a:solidFill>
-                      <a:srgbClr val="E8F1FA"/>
+                      <a:srgbClr val="E3EFFA"/>
                     </a:solidFill>
                   </a:tcPr>
                 </a:tc>
@@ -22507,23 +21925,47 @@
                     <a:p>
                       <a:pPr algn="ctr"/>
                       <a:r>
-                        <a:rPr sz="615" b="1">
+                        <a:rPr sz="788" b="1">
                           <a:solidFill>
-                            <a:srgbClr val="173B6B"/>
+                            <a:srgbClr val="113B68"/>
                           </a:solidFill>
                         </a:rPr>
-                        <a:t>月度成本</a:t>
+                        <a:t>单次成本</a:t>
                       </a:r>
                     </a:p>
                   </a:txBody>
                   <a:tcPr marL="91440" marR="91440" marT="45720" marB="45720">
                     <a:solidFill>
-                      <a:srgbClr val="E8F1FA"/>
+                      <a:srgbClr val="E3EFFA"/>
+                    </a:solidFill>
+                  </a:tcPr>
+                </a:tc>
+                <a:tc>
+                  <a:txBody>
+                    <a:bodyPr>
+                      <a:normAutofit/>
+                    </a:bodyPr>
+                    <a:lstStyle/>
+                    <a:p>
+                      <a:pPr algn="ctr"/>
+                      <a:r>
+                        <a:rPr sz="788" b="1">
+                          <a:solidFill>
+                            <a:srgbClr val="113B68"/>
+                          </a:solidFill>
+                        </a:rPr>
+                        <a:t>频率</a:t>
+                      </a:r>
+                    </a:p>
+                  </a:txBody>
+                  <a:tcPr marL="91440" marR="91440" marT="45720" marB="45720">
+                    <a:solidFill>
+                      <a:srgbClr val="E3EFFA"/>
                     </a:solidFill>
                   </a:tcPr>
                 </a:tc>
               </a:tr>
-              <a:tr h="173831">
+              <a:tr h="263979">
                 <a:tc>
                   <a:txBody>
                     <a:bodyPr>
@@ -22533,12 +21975,12 @@
                     <a:p>
                       <a:pPr algn="l"/>
                       <a:r>
-                        <a:rPr sz="540">
+                        <a:rPr sz="694">
                           <a:solidFill>
-                            <a:srgbClr val="3E4C5D"/>
+                            <a:srgbClr val="34495E"/>
                           </a:solidFill>
                         </a:rPr>
-                        <a:t>意图识别 / 回复生成</a:t>
+                        <a:t>意图识别</a:t>
                       </a:r>
                     </a:p>
                   </a:txBody>
@@ -22557,12 +21999,12 @@
                     <a:p>
                       <a:pPr algn="ctr"/>
                       <a:r>
-                        <a:rPr sz="540">
+                        <a:rPr sz="694">
                           <a:solidFill>
-                            <a:srgbClr val="3E4C5D"/>
+                            <a:srgbClr val="34495E"/>
                           </a:solidFill>
                         </a:rPr>
-                        <a:t>1,500 / 100～500</a:t>
+                        <a:t>约1,500</a:t>
                       </a:r>
                     </a:p>
                   </a:txBody>
@@ -22581,12 +22023,12 @@
                     <a:p>
                       <a:pPr algn="ctr"/>
                       <a:r>
-                        <a:rPr sz="540">
+                        <a:rPr sz="694">
                           <a:solidFill>
-                            <a:srgbClr val="3E4C5D"/>
+                            <a:srgbClr val="34495E"/>
                           </a:solidFill>
                         </a:rPr>
-                        <a:t>0.03～0.05元</a:t>
+                        <a:t>约100</a:t>
                       </a:r>
                     </a:p>
                   </a:txBody>
@@ -22605,9 +22047,1392 @@
                     <a:p>
                       <a:pPr algn="ctr"/>
                       <a:r>
-                        <a:rPr sz="540">
+                        <a:rPr sz="694">
                           <a:solidFill>
-                            <a:srgbClr val="3E4C5D"/>
+                            <a:srgbClr val="34495E"/>
+                          </a:solidFill>
+                        </a:rPr>
+                        <a:t>0.03元</a:t>
+                      </a:r>
+                    </a:p>
+                  </a:txBody>
+                  <a:tcPr marL="91440" marR="91440" marT="45720" marB="45720">
+                    <a:solidFill>
+                      <a:srgbClr val="FFFFFF"/>
+                    </a:solidFill>
+                  </a:tcPr>
+                </a:tc>
+                <a:tc>
+                  <a:txBody>
+                    <a:bodyPr>
+                      <a:normAutofit/>
+                    </a:bodyPr>
+                    <a:lstStyle/>
+                    <a:p>
+                      <a:pPr algn="ctr"/>
+                      <a:r>
+                        <a:rPr sz="694">
+                          <a:solidFill>
+                            <a:srgbClr val="34495E"/>
+                          </a:solidFill>
+                        </a:rPr>
+                        <a:t>每次查询</a:t>
+                      </a:r>
+                    </a:p>
+                  </a:txBody>
+                  <a:tcPr marL="91440" marR="91440" marT="45720" marB="45720">
+                    <a:solidFill>
+                      <a:srgbClr val="FFFFFF"/>
+                    </a:solidFill>
+                  </a:tcPr>
+                </a:tc>
+              </a:tr>
+              <a:tr h="263979">
+                <a:tc>
+                  <a:txBody>
+                    <a:bodyPr>
+                      <a:normAutofit/>
+                    </a:bodyPr>
+                    <a:lstStyle/>
+                    <a:p>
+                      <a:pPr algn="l"/>
+                      <a:r>
+                        <a:rPr sz="694">
+                          <a:solidFill>
+                            <a:srgbClr val="34495E"/>
+                          </a:solidFill>
+                        </a:rPr>
+                        <a:t>回复生成</a:t>
+                      </a:r>
+                    </a:p>
+                  </a:txBody>
+                  <a:tcPr marL="91440" marR="91440" marT="45720" marB="45720">
+                    <a:solidFill>
+                      <a:srgbClr val="F7FAFD"/>
+                    </a:solidFill>
+                  </a:tcPr>
+                </a:tc>
+                <a:tc>
+                  <a:txBody>
+                    <a:bodyPr>
+                      <a:normAutofit/>
+                    </a:bodyPr>
+                    <a:lstStyle/>
+                    <a:p>
+                      <a:pPr algn="ctr"/>
+                      <a:r>
+                        <a:rPr sz="694">
+                          <a:solidFill>
+                            <a:srgbClr val="34495E"/>
+                          </a:solidFill>
+                        </a:rPr>
+                        <a:t>约2,000</a:t>
+                      </a:r>
+                    </a:p>
+                  </a:txBody>
+                  <a:tcPr marL="91440" marR="91440" marT="45720" marB="45720">
+                    <a:solidFill>
+                      <a:srgbClr val="F7FAFD"/>
+                    </a:solidFill>
+                  </a:tcPr>
+                </a:tc>
+                <a:tc>
+                  <a:txBody>
+                    <a:bodyPr>
+                      <a:normAutofit/>
+                    </a:bodyPr>
+                    <a:lstStyle/>
+                    <a:p>
+                      <a:pPr algn="ctr"/>
+                      <a:r>
+                        <a:rPr sz="694">
+                          <a:solidFill>
+                            <a:srgbClr val="34495E"/>
+                          </a:solidFill>
+                        </a:rPr>
+                        <a:t>约500</a:t>
+                      </a:r>
+                    </a:p>
+                  </a:txBody>
+                  <a:tcPr marL="91440" marR="91440" marT="45720" marB="45720">
+                    <a:solidFill>
+                      <a:srgbClr val="F7FAFD"/>
+                    </a:solidFill>
+                  </a:tcPr>
+                </a:tc>
+                <a:tc>
+                  <a:txBody>
+                    <a:bodyPr>
+                      <a:normAutofit/>
+                    </a:bodyPr>
+                    <a:lstStyle/>
+                    <a:p>
+                      <a:pPr algn="ctr"/>
+                      <a:r>
+                        <a:rPr sz="694">
+                          <a:solidFill>
+                            <a:srgbClr val="34495E"/>
+                          </a:solidFill>
+                        </a:rPr>
+                        <a:t>0.05元</a:t>
+                      </a:r>
+                    </a:p>
+                  </a:txBody>
+                  <a:tcPr marL="91440" marR="91440" marT="45720" marB="45720">
+                    <a:solidFill>
+                      <a:srgbClr val="F7FAFD"/>
+                    </a:solidFill>
+                  </a:tcPr>
+                </a:tc>
+                <a:tc>
+                  <a:txBody>
+                    <a:bodyPr>
+                      <a:normAutofit/>
+                    </a:bodyPr>
+                    <a:lstStyle/>
+                    <a:p>
+                      <a:pPr algn="ctr"/>
+                      <a:r>
+                        <a:rPr sz="694">
+                          <a:solidFill>
+                            <a:srgbClr val="34495E"/>
+                          </a:solidFill>
+                        </a:rPr>
+                        <a:t>每次查询</a:t>
+                      </a:r>
+                    </a:p>
+                  </a:txBody>
+                  <a:tcPr marL="91440" marR="91440" marT="45720" marB="45720">
+                    <a:solidFill>
+                      <a:srgbClr val="F7FAFD"/>
+                    </a:solidFill>
+                  </a:tcPr>
+                </a:tc>
+              </a:tr>
+              <a:tr h="263979">
+                <a:tc>
+                  <a:txBody>
+                    <a:bodyPr>
+                      <a:normAutofit/>
+                    </a:bodyPr>
+                    <a:lstStyle/>
+                    <a:p>
+                      <a:pPr algn="l"/>
+                      <a:r>
+                        <a:rPr sz="694">
+                          <a:solidFill>
+                            <a:srgbClr val="34495E"/>
+                          </a:solidFill>
+                        </a:rPr>
+                        <a:t>项目名称映射</a:t>
+                      </a:r>
+                    </a:p>
+                  </a:txBody>
+                  <a:tcPr marL="91440" marR="91440" marT="45720" marB="45720">
+                    <a:solidFill>
+                      <a:srgbClr val="FFFFFF"/>
+                    </a:solidFill>
+                  </a:tcPr>
+                </a:tc>
+                <a:tc>
+                  <a:txBody>
+                    <a:bodyPr>
+                      <a:normAutofit/>
+                    </a:bodyPr>
+                    <a:lstStyle/>
+                    <a:p>
+                      <a:pPr algn="ctr"/>
+                      <a:r>
+                        <a:rPr sz="694">
+                          <a:solidFill>
+                            <a:srgbClr val="34495E"/>
+                          </a:solidFill>
+                        </a:rPr>
+                        <a:t>约1,000</a:t>
+                      </a:r>
+                    </a:p>
+                  </a:txBody>
+                  <a:tcPr marL="91440" marR="91440" marT="45720" marB="45720">
+                    <a:solidFill>
+                      <a:srgbClr val="FFFFFF"/>
+                    </a:solidFill>
+                  </a:tcPr>
+                </a:tc>
+                <a:tc>
+                  <a:txBody>
+                    <a:bodyPr>
+                      <a:normAutofit/>
+                    </a:bodyPr>
+                    <a:lstStyle/>
+                    <a:p>
+                      <a:pPr algn="ctr"/>
+                      <a:r>
+                        <a:rPr sz="694">
+                          <a:solidFill>
+                            <a:srgbClr val="34495E"/>
+                          </a:solidFill>
+                        </a:rPr>
+                        <a:t>约500</a:t>
+                      </a:r>
+                    </a:p>
+                  </a:txBody>
+                  <a:tcPr marL="91440" marR="91440" marT="45720" marB="45720">
+                    <a:solidFill>
+                      <a:srgbClr val="FFFFFF"/>
+                    </a:solidFill>
+                  </a:tcPr>
+                </a:tc>
+                <a:tc>
+                  <a:txBody>
+                    <a:bodyPr>
+                      <a:normAutofit/>
+                    </a:bodyPr>
+                    <a:lstStyle/>
+                    <a:p>
+                      <a:pPr algn="ctr"/>
+                      <a:r>
+                        <a:rPr sz="694">
+                          <a:solidFill>
+                            <a:srgbClr val="34495E"/>
+                          </a:solidFill>
+                        </a:rPr>
+                        <a:t>0.03元</a:t>
+                      </a:r>
+                    </a:p>
+                  </a:txBody>
+                  <a:tcPr marL="91440" marR="91440" marT="45720" marB="45720">
+                    <a:solidFill>
+                      <a:srgbClr val="FFFFFF"/>
+                    </a:solidFill>
+                  </a:tcPr>
+                </a:tc>
+                <a:tc>
+                  <a:txBody>
+                    <a:bodyPr>
+                      <a:normAutofit/>
+                    </a:bodyPr>
+                    <a:lstStyle/>
+                    <a:p>
+                      <a:pPr algn="ctr"/>
+                      <a:r>
+                        <a:rPr sz="694">
+                          <a:solidFill>
+                            <a:srgbClr val="34495E"/>
+                          </a:solidFill>
+                        </a:rPr>
+                        <a:t>每条记录</a:t>
+                      </a:r>
+                    </a:p>
+                  </a:txBody>
+                  <a:tcPr marL="91440" marR="91440" marT="45720" marB="45720">
+                    <a:solidFill>
+                      <a:srgbClr val="FFFFFF"/>
+                    </a:solidFill>
+                  </a:tcPr>
+                </a:tc>
+              </a:tr>
+              <a:tr h="263979">
+                <a:tc>
+                  <a:txBody>
+                    <a:bodyPr>
+                      <a:normAutofit/>
+                    </a:bodyPr>
+                    <a:lstStyle/>
+                    <a:p>
+                      <a:pPr algn="l"/>
+                      <a:r>
+                        <a:rPr sz="694">
+                          <a:solidFill>
+                            <a:srgbClr val="34495E"/>
+                          </a:solidFill>
+                        </a:rPr>
+                        <a:t>项目差异对比</a:t>
+                      </a:r>
+                    </a:p>
+                  </a:txBody>
+                  <a:tcPr marL="91440" marR="91440" marT="45720" marB="45720">
+                    <a:solidFill>
+                      <a:srgbClr val="F7FAFD"/>
+                    </a:solidFill>
+                  </a:tcPr>
+                </a:tc>
+                <a:tc>
+                  <a:txBody>
+                    <a:bodyPr>
+                      <a:normAutofit/>
+                    </a:bodyPr>
+                    <a:lstStyle/>
+                    <a:p>
+                      <a:pPr algn="ctr"/>
+                      <a:r>
+                        <a:rPr sz="694">
+                          <a:solidFill>
+                            <a:srgbClr val="34495E"/>
+                          </a:solidFill>
+                        </a:rPr>
+                        <a:t>约2,000</a:t>
+                      </a:r>
+                    </a:p>
+                  </a:txBody>
+                  <a:tcPr marL="91440" marR="91440" marT="45720" marB="45720">
+                    <a:solidFill>
+                      <a:srgbClr val="F7FAFD"/>
+                    </a:solidFill>
+                  </a:tcPr>
+                </a:tc>
+                <a:tc>
+                  <a:txBody>
+                    <a:bodyPr>
+                      <a:normAutofit/>
+                    </a:bodyPr>
+                    <a:lstStyle/>
+                    <a:p>
+                      <a:pPr algn="ctr"/>
+                      <a:r>
+                        <a:rPr sz="694">
+                          <a:solidFill>
+                            <a:srgbClr val="34495E"/>
+                          </a:solidFill>
+                        </a:rPr>
+                        <a:t>约300</a:t>
+                      </a:r>
+                    </a:p>
+                  </a:txBody>
+                  <a:tcPr marL="91440" marR="91440" marT="45720" marB="45720">
+                    <a:solidFill>
+                      <a:srgbClr val="F7FAFD"/>
+                    </a:solidFill>
+                  </a:tcPr>
+                </a:tc>
+                <a:tc>
+                  <a:txBody>
+                    <a:bodyPr>
+                      <a:normAutofit/>
+                    </a:bodyPr>
+                    <a:lstStyle/>
+                    <a:p>
+                      <a:pPr algn="ctr"/>
+                      <a:r>
+                        <a:rPr sz="694">
+                          <a:solidFill>
+                            <a:srgbClr val="34495E"/>
+                          </a:solidFill>
+                        </a:rPr>
+                        <a:t>0.04元</a:t>
+                      </a:r>
+                    </a:p>
+                  </a:txBody>
+                  <a:tcPr marL="91440" marR="91440" marT="45720" marB="45720">
+                    <a:solidFill>
+                      <a:srgbClr val="F7FAFD"/>
+                    </a:solidFill>
+                  </a:tcPr>
+                </a:tc>
+                <a:tc>
+                  <a:txBody>
+                    <a:bodyPr>
+                      <a:normAutofit/>
+                    </a:bodyPr>
+                    <a:lstStyle/>
+                    <a:p>
+                      <a:pPr algn="ctr"/>
+                      <a:r>
+                        <a:rPr sz="694">
+                          <a:solidFill>
+                            <a:srgbClr val="34495E"/>
+                          </a:solidFill>
+                        </a:rPr>
+                        <a:t>每条记录</a:t>
+                      </a:r>
+                    </a:p>
+                  </a:txBody>
+                  <a:tcPr marL="91440" marR="91440" marT="45720" marB="45720">
+                    <a:solidFill>
+                      <a:srgbClr val="F7FAFD"/>
+                    </a:solidFill>
+                  </a:tcPr>
+                </a:tc>
+              </a:tr>
+              <a:tr h="263979">
+                <a:tc>
+                  <a:txBody>
+                    <a:bodyPr>
+                      <a:normAutofit/>
+                    </a:bodyPr>
+                    <a:lstStyle/>
+                    <a:p>
+                      <a:pPr algn="l"/>
+                      <a:r>
+                        <a:rPr sz="694">
+                          <a:solidFill>
+                            <a:srgbClr val="34495E"/>
+                          </a:solidFill>
+                        </a:rPr>
+                        <a:t>单条记录分析</a:t>
+                      </a:r>
+                    </a:p>
+                  </a:txBody>
+                  <a:tcPr marL="91440" marR="91440" marT="45720" marB="45720">
+                    <a:solidFill>
+                      <a:srgbClr val="FFFFFF"/>
+                    </a:solidFill>
+                  </a:tcPr>
+                </a:tc>
+                <a:tc>
+                  <a:txBody>
+                    <a:bodyPr>
+                      <a:normAutofit/>
+                    </a:bodyPr>
+                    <a:lstStyle/>
+                    <a:p>
+                      <a:pPr algn="ctr"/>
+                      <a:r>
+                        <a:rPr sz="694">
+                          <a:solidFill>
+                            <a:srgbClr val="34495E"/>
+                          </a:solidFill>
+                        </a:rPr>
+                        <a:t>—</a:t>
+                      </a:r>
+                    </a:p>
+                  </a:txBody>
+                  <a:tcPr marL="91440" marR="91440" marT="45720" marB="45720">
+                    <a:solidFill>
+                      <a:srgbClr val="FFFFFF"/>
+                    </a:solidFill>
+                  </a:tcPr>
+                </a:tc>
+                <a:tc>
+                  <a:txBody>
+                    <a:bodyPr>
+                      <a:normAutofit/>
+                    </a:bodyPr>
+                    <a:lstStyle/>
+                    <a:p>
+                      <a:pPr algn="ctr"/>
+                      <a:r>
+                        <a:rPr sz="694">
+                          <a:solidFill>
+                            <a:srgbClr val="34495E"/>
+                          </a:solidFill>
+                        </a:rPr>
+                        <a:t>—</a:t>
+                      </a:r>
+                    </a:p>
+                  </a:txBody>
+                  <a:tcPr marL="91440" marR="91440" marT="45720" marB="45720">
+                    <a:solidFill>
+                      <a:srgbClr val="FFFFFF"/>
+                    </a:solidFill>
+                  </a:tcPr>
+                </a:tc>
+                <a:tc>
+                  <a:txBody>
+                    <a:bodyPr>
+                      <a:normAutofit/>
+                    </a:bodyPr>
+                    <a:lstStyle/>
+                    <a:p>
+                      <a:pPr algn="ctr"/>
+                      <a:r>
+                        <a:rPr sz="694">
+                          <a:solidFill>
+                            <a:srgbClr val="34495E"/>
+                          </a:solidFill>
+                        </a:rPr>
+                        <a:t>0.07元</a:t>
+                      </a:r>
+                    </a:p>
+                  </a:txBody>
+                  <a:tcPr marL="91440" marR="91440" marT="45720" marB="45720">
+                    <a:solidFill>
+                      <a:srgbClr val="FFFFFF"/>
+                    </a:solidFill>
+                  </a:tcPr>
+                </a:tc>
+                <a:tc>
+                  <a:txBody>
+                    <a:bodyPr>
+                      <a:normAutofit/>
+                    </a:bodyPr>
+                    <a:lstStyle/>
+                    <a:p>
+                      <a:pPr algn="ctr"/>
+                      <a:r>
+                        <a:rPr sz="694">
+                          <a:solidFill>
+                            <a:srgbClr val="34495E"/>
+                          </a:solidFill>
+                        </a:rPr>
+                        <a:t>每条记录</a:t>
+                      </a:r>
+                    </a:p>
+                  </a:txBody>
+                  <a:tcPr marL="91440" marR="91440" marT="45720" marB="45720">
+                    <a:solidFill>
+                      <a:srgbClr val="FFFFFF"/>
+                    </a:solidFill>
+                  </a:tcPr>
+                </a:tc>
+              </a:tr>
+              <a:tr h="263979">
+                <a:tc>
+                  <a:txBody>
+                    <a:bodyPr>
+                      <a:normAutofit/>
+                    </a:bodyPr>
+                    <a:lstStyle/>
+                    <a:p>
+                      <a:pPr algn="l"/>
+                      <a:r>
+                        <a:rPr sz="694">
+                          <a:solidFill>
+                            <a:srgbClr val="34495E"/>
+                          </a:solidFill>
+                        </a:rPr>
+                        <a:t>单次自然语言查询</a:t>
+                      </a:r>
+                    </a:p>
+                  </a:txBody>
+                  <a:tcPr marL="91440" marR="91440" marT="45720" marB="45720">
+                    <a:solidFill>
+                      <a:srgbClr val="F7FAFD"/>
+                    </a:solidFill>
+                  </a:tcPr>
+                </a:tc>
+                <a:tc>
+                  <a:txBody>
+                    <a:bodyPr>
+                      <a:normAutofit/>
+                    </a:bodyPr>
+                    <a:lstStyle/>
+                    <a:p>
+                      <a:pPr algn="ctr"/>
+                      <a:r>
+                        <a:rPr sz="694">
+                          <a:solidFill>
+                            <a:srgbClr val="34495E"/>
+                          </a:solidFill>
+                        </a:rPr>
+                        <a:t>—</a:t>
+                      </a:r>
+                    </a:p>
+                  </a:txBody>
+                  <a:tcPr marL="91440" marR="91440" marT="45720" marB="45720">
+                    <a:solidFill>
+                      <a:srgbClr val="F7FAFD"/>
+                    </a:solidFill>
+                  </a:tcPr>
+                </a:tc>
+                <a:tc>
+                  <a:txBody>
+                    <a:bodyPr>
+                      <a:normAutofit/>
+                    </a:bodyPr>
+                    <a:lstStyle/>
+                    <a:p>
+                      <a:pPr algn="ctr"/>
+                      <a:r>
+                        <a:rPr sz="694">
+                          <a:solidFill>
+                            <a:srgbClr val="34495E"/>
+                          </a:solidFill>
+                        </a:rPr>
+                        <a:t>—</a:t>
+                      </a:r>
+                    </a:p>
+                  </a:txBody>
+                  <a:tcPr marL="91440" marR="91440" marT="45720" marB="45720">
+                    <a:solidFill>
+                      <a:srgbClr val="F7FAFD"/>
+                    </a:solidFill>
+                  </a:tcPr>
+                </a:tc>
+                <a:tc>
+                  <a:txBody>
+                    <a:bodyPr>
+                      <a:normAutofit/>
+                    </a:bodyPr>
+                    <a:lstStyle/>
+                    <a:p>
+                      <a:pPr algn="ctr"/>
+                      <a:r>
+                        <a:rPr sz="694">
+                          <a:solidFill>
+                            <a:srgbClr val="34495E"/>
+                          </a:solidFill>
+                        </a:rPr>
+                        <a:t>0.08元</a:t>
+                      </a:r>
+                    </a:p>
+                  </a:txBody>
+                  <a:tcPr marL="91440" marR="91440" marT="45720" marB="45720">
+                    <a:solidFill>
+                      <a:srgbClr val="F7FAFD"/>
+                    </a:solidFill>
+                  </a:tcPr>
+                </a:tc>
+                <a:tc>
+                  <a:txBody>
+                    <a:bodyPr>
+                      <a:normAutofit/>
+                    </a:bodyPr>
+                    <a:lstStyle/>
+                    <a:p>
+                      <a:pPr algn="ctr"/>
+                      <a:r>
+                        <a:rPr sz="694">
+                          <a:solidFill>
+                            <a:srgbClr val="34495E"/>
+                          </a:solidFill>
+                        </a:rPr>
+                        <a:t>每次查询</a:t>
+                      </a:r>
+                    </a:p>
+                  </a:txBody>
+                  <a:tcPr marL="91440" marR="91440" marT="45720" marB="45720">
+                    <a:solidFill>
+                      <a:srgbClr val="F7FAFD"/>
+                    </a:solidFill>
+                  </a:tcPr>
+                </a:tc>
+              </a:tr>
+            </a:tbl>
+          </a:graphicData>
+        </a:graphic>
+      </p:graphicFrame>
+      <p:sp>
+        <p:nvSpPr>
+          <p:cNvPr id="45" name="">
+            <a:extLst xmlns:a="http://schemas.openxmlformats.org/drawingml/2006/main">
+              <a:ext uri="{FF2B5EF4-FFF2-40B4-BE49-F238E27FC236}">
+                <a16:creationId xmlns:a16="http://schemas.microsoft.com/office/drawing/2014/main" id="{9317C4B1-0677-4382-A5AA-FD822565D647}"/>
+              </a:ext>
+            </a:extLst>
+          </p:cNvPr>
+          <p:cNvSpPr>
+            <a:spLocks xmlns:a="http://schemas.openxmlformats.org/drawingml/2006/main" noGrp="1"/>
+          </p:cNvSpPr>
+          <p:nvPr/>
+        </p:nvSpPr>
+        <p:spPr>
+          <a:xfrm xmlns:a="http://schemas.openxmlformats.org/drawingml/2006/main">
+            <a:off x="6191250" y="2000250"/>
+            <a:ext cx="47625" cy="190500"/>
+          </a:xfrm>
+          <a:prstGeom xmlns:a="http://schemas.openxmlformats.org/drawingml/2006/main" prst="rect">
+            <a:avLst/>
+          </a:prstGeom>
+          <a:solidFill xmlns:a="http://schemas.openxmlformats.org/drawingml/2006/main">
+            <a:srgbClr val="1479C9"/>
+          </a:solidFill>
+          <a:ln xmlns:a="http://schemas.openxmlformats.org/drawingml/2006/main" w="0">
+            <a:noFill/>
+          </a:ln>
+        </p:spPr>
+      </p:sp>
+      <p:sp>
+        <p:nvSpPr>
+          <p:cNvPr id="46" name="">
+            <a:extLst xmlns:a="http://schemas.openxmlformats.org/drawingml/2006/main">
+              <a:ext uri="{FF2B5EF4-FFF2-40B4-BE49-F238E27FC236}">
+                <a16:creationId xmlns:a16="http://schemas.microsoft.com/office/drawing/2014/main" id="{929ED57A-BF08-46F2-A6D9-5BA8496F3940}"/>
+              </a:ext>
+            </a:extLst>
+          </p:cNvPr>
+          <p:cNvSpPr>
+            <a:spLocks xmlns:a="http://schemas.openxmlformats.org/drawingml/2006/main" noGrp="1"/>
+          </p:cNvSpPr>
+          <p:nvPr/>
+        </p:nvSpPr>
+        <p:spPr>
+          <a:xfrm xmlns:a="http://schemas.openxmlformats.org/drawingml/2006/main">
+            <a:off x="6334125" y="1981200"/>
+            <a:ext cx="4762500" cy="238125"/>
+          </a:xfrm>
+          <a:prstGeom xmlns:a="http://schemas.openxmlformats.org/drawingml/2006/main" prst="rect">
+            <a:avLst/>
+          </a:prstGeom>
+          <a:noFill xmlns:a="http://schemas.openxmlformats.org/drawingml/2006/main"/>
+          <a:ln xmlns:a="http://schemas.openxmlformats.org/drawingml/2006/main" w="0">
+            <a:noFill/>
+          </a:ln>
+        </p:spPr>
+        <p:txBody>
+          <a:bodyPr xmlns:a="http://schemas.openxmlformats.org/drawingml/2006/main">
+            <a:normAutofit fontScale="53472"/>
+          </a:bodyPr>
+          <a:lstStyle xmlns:a="http://schemas.openxmlformats.org/drawingml/2006/main"/>
+          <a:p xmlns:a="http://schemas.openxmlformats.org/drawingml/2006/main">
+            <a:pPr>
+              <a:defRPr b="1">
+                <a:solidFill>
+                  <a:srgbClr val="113B68"/>
+                </a:solidFill>
+              </a:defRPr>
+            </a:pPr>
+            <a:r>
+              <a:rPr b="1">
+                <a:solidFill>
+                  <a:srgbClr val="113B68"/>
+                </a:solidFill>
+              </a:rPr>
+              <a:t>1.3. 批量处理成本</a:t>
+            </a:r>
+          </a:p>
+        </p:txBody>
+      </p:sp>
+      <p:graphicFrame>
+        <p:nvGraphicFramePr>
+          <p:cNvPr id="70" name=""/>
+          <p:cNvGraphicFramePr/>
+          <p:nvPr/>
+        </p:nvGraphicFramePr>
+        <p:xfrm>
+          <a:off xmlns:a="http://schemas.openxmlformats.org/drawingml/2006/main" x="6191250" y="2266950"/>
+          <a:ext xmlns:a="http://schemas.openxmlformats.org/drawingml/2006/main" cx="5429250" cy="1143000"/>
+        </p:xfrm>
+        <a:graphic xmlns:a="http://schemas.openxmlformats.org/drawingml/2006/main">
+          <a:graphicData uri="http://schemas.openxmlformats.org/drawingml/2006/table">
+            <a:tbl>
+              <a:tblPr firstRow="1" bandRow="1"/>
+              <a:tblGrid>
+                <a:gridCol w="1571625"/>
+                <a:gridCol w="1047750"/>
+                <a:gridCol w="1619250"/>
+                <a:gridCol w="1190625"/>
+              </a:tblGrid>
+              <a:tr h="285750">
+                <a:tc>
+                  <a:txBody>
+                    <a:bodyPr>
+                      <a:normAutofit/>
+                    </a:bodyPr>
+                    <a:lstStyle/>
+                    <a:p>
+                      <a:pPr algn="ctr"/>
+                      <a:r>
+                        <a:rPr sz="788" b="1">
+                          <a:solidFill>
+                            <a:srgbClr val="113B68"/>
+                          </a:solidFill>
+                        </a:rPr>
+                        <a:t>场景</a:t>
+                      </a:r>
+                    </a:p>
+                  </a:txBody>
+                  <a:tcPr marL="91440" marR="91440" marT="45720" marB="45720">
+                    <a:solidFill>
+                      <a:srgbClr val="E3EFFA"/>
+                    </a:solidFill>
+                  </a:tcPr>
+                </a:tc>
+                <a:tc>
+                  <a:txBody>
+                    <a:bodyPr>
+                      <a:normAutofit/>
+                    </a:bodyPr>
+                    <a:lstStyle/>
+                    <a:p>
+                      <a:pPr algn="ctr"/>
+                      <a:r>
+                        <a:rPr sz="788" b="1">
+                          <a:solidFill>
+                            <a:srgbClr val="113B68"/>
+                          </a:solidFill>
+                        </a:rPr>
+                        <a:t>记录数</a:t>
+                      </a:r>
+                    </a:p>
+                  </a:txBody>
+                  <a:tcPr marL="91440" marR="91440" marT="45720" marB="45720">
+                    <a:solidFill>
+                      <a:srgbClr val="E3EFFA"/>
+                    </a:solidFill>
+                  </a:tcPr>
+                </a:tc>
+                <a:tc>
+                  <a:txBody>
+                    <a:bodyPr>
+                      <a:normAutofit/>
+                    </a:bodyPr>
+                    <a:lstStyle/>
+                    <a:p>
+                      <a:pPr algn="ctr"/>
+                      <a:r>
+                        <a:rPr sz="788" b="1">
+                          <a:solidFill>
+                            <a:srgbClr val="113B68"/>
+                          </a:solidFill>
+                        </a:rPr>
+                        <a:t>LLM 调用次数</a:t>
+                      </a:r>
+                    </a:p>
+                  </a:txBody>
+                  <a:tcPr marL="91440" marR="91440" marT="45720" marB="45720">
+                    <a:solidFill>
+                      <a:srgbClr val="E3EFFA"/>
+                    </a:solidFill>
+                  </a:tcPr>
+                </a:tc>
+                <a:tc>
+                  <a:txBody>
+                    <a:bodyPr>
+                      <a:normAutofit/>
+                    </a:bodyPr>
+                    <a:lstStyle/>
+                    <a:p>
+                      <a:pPr algn="ctr"/>
+                      <a:r>
+                        <a:rPr sz="788" b="1">
+                          <a:solidFill>
+                            <a:srgbClr val="113B68"/>
+                          </a:solidFill>
+                        </a:rPr>
+                        <a:t>总成本</a:t>
+                      </a:r>
+                    </a:p>
+                  </a:txBody>
+                  <a:tcPr marL="91440" marR="91440" marT="45720" marB="45720">
+                    <a:solidFill>
+                      <a:srgbClr val="E3EFFA"/>
+                    </a:solidFill>
+                  </a:tcPr>
+                </a:tc>
+              </a:tr>
+              <a:tr h="285750">
+                <a:tc>
+                  <a:txBody>
+                    <a:bodyPr>
+                      <a:normAutofit/>
+                    </a:bodyPr>
+                    <a:lstStyle/>
+                    <a:p>
+                      <a:pPr algn="l"/>
+                      <a:r>
+                        <a:rPr sz="694">
+                          <a:solidFill>
+                            <a:srgbClr val="34495E"/>
+                          </a:solidFill>
+                        </a:rPr>
+                        <a:t>项目分析</a:t>
+                      </a:r>
+                    </a:p>
+                  </a:txBody>
+                  <a:tcPr marL="91440" marR="91440" marT="45720" marB="45720">
+                    <a:solidFill>
+                      <a:srgbClr val="FFFFFF"/>
+                    </a:solidFill>
+                  </a:tcPr>
+                </a:tc>
+                <a:tc>
+                  <a:txBody>
+                    <a:bodyPr>
+                      <a:normAutofit/>
+                    </a:bodyPr>
+                    <a:lstStyle/>
+                    <a:p>
+                      <a:pPr algn="ctr"/>
+                      <a:r>
+                        <a:rPr sz="694">
+                          <a:solidFill>
+                            <a:srgbClr val="34495E"/>
+                          </a:solidFill>
+                        </a:rPr>
+                        <a:t>100</a:t>
+                      </a:r>
+                    </a:p>
+                  </a:txBody>
+                  <a:tcPr marL="91440" marR="91440" marT="45720" marB="45720">
+                    <a:solidFill>
+                      <a:srgbClr val="FFFFFF"/>
+                    </a:solidFill>
+                  </a:tcPr>
+                </a:tc>
+                <a:tc>
+                  <a:txBody>
+                    <a:bodyPr>
+                      <a:normAutofit/>
+                    </a:bodyPr>
+                    <a:lstStyle/>
+                    <a:p>
+                      <a:pPr algn="ctr"/>
+                      <a:r>
+                        <a:rPr sz="694">
+                          <a:solidFill>
+                            <a:srgbClr val="34495E"/>
+                          </a:solidFill>
+                        </a:rPr>
+                        <a:t>200（映射+对比）</a:t>
+                      </a:r>
+                    </a:p>
+                  </a:txBody>
+                  <a:tcPr marL="91440" marR="91440" marT="45720" marB="45720">
+                    <a:solidFill>
+                      <a:srgbClr val="FFFFFF"/>
+                    </a:solidFill>
+                  </a:tcPr>
+                </a:tc>
+                <a:tc>
+                  <a:txBody>
+                    <a:bodyPr>
+                      <a:normAutofit/>
+                    </a:bodyPr>
+                    <a:lstStyle/>
+                    <a:p>
+                      <a:pPr algn="ctr"/>
+                      <a:r>
+                        <a:rPr sz="694">
+                          <a:solidFill>
+                            <a:srgbClr val="34495E"/>
+                          </a:solidFill>
+                        </a:rPr>
+                        <a:t>14元</a:t>
+                      </a:r>
+                    </a:p>
+                  </a:txBody>
+                  <a:tcPr marL="91440" marR="91440" marT="45720" marB="45720">
+                    <a:solidFill>
+                      <a:srgbClr val="FFFFFF"/>
+                    </a:solidFill>
+                  </a:tcPr>
+                </a:tc>
+              </a:tr>
+              <a:tr h="285750">
+                <a:tc>
+                  <a:txBody>
+                    <a:bodyPr>
+                      <a:normAutofit/>
+                    </a:bodyPr>
+                    <a:lstStyle/>
+                    <a:p>
+                      <a:pPr algn="l"/>
+                      <a:r>
+                        <a:rPr sz="694">
+                          <a:solidFill>
+                            <a:srgbClr val="34495E"/>
+                          </a:solidFill>
+                        </a:rPr>
+                        <a:t>费用计算</a:t>
+                      </a:r>
+                    </a:p>
+                  </a:txBody>
+                  <a:tcPr marL="91440" marR="91440" marT="45720" marB="45720">
+                    <a:solidFill>
+                      <a:srgbClr val="F7FAFD"/>
+                    </a:solidFill>
+                  </a:tcPr>
+                </a:tc>
+                <a:tc>
+                  <a:txBody>
+                    <a:bodyPr>
+                      <a:normAutofit/>
+                    </a:bodyPr>
+                    <a:lstStyle/>
+                    <a:p>
+                      <a:pPr algn="ctr"/>
+                      <a:r>
+                        <a:rPr sz="694">
+                          <a:solidFill>
+                            <a:srgbClr val="34495E"/>
+                          </a:solidFill>
+                        </a:rPr>
+                        <a:t>100</a:t>
+                      </a:r>
+                    </a:p>
+                  </a:txBody>
+                  <a:tcPr marL="91440" marR="91440" marT="45720" marB="45720">
+                    <a:solidFill>
+                      <a:srgbClr val="F7FAFD"/>
+                    </a:solidFill>
+                  </a:tcPr>
+                </a:tc>
+                <a:tc>
+                  <a:txBody>
+                    <a:bodyPr>
+                      <a:normAutofit/>
+                    </a:bodyPr>
+                    <a:lstStyle/>
+                    <a:p>
+                      <a:pPr algn="ctr"/>
+                      <a:r>
+                        <a:rPr sz="694">
+                          <a:solidFill>
+                            <a:srgbClr val="34495E"/>
+                          </a:solidFill>
+                        </a:rPr>
+                        <a:t>100（对比）</a:t>
+                      </a:r>
+                    </a:p>
+                  </a:txBody>
+                  <a:tcPr marL="91440" marR="91440" marT="45720" marB="45720">
+                    <a:solidFill>
+                      <a:srgbClr val="F7FAFD"/>
+                    </a:solidFill>
+                  </a:tcPr>
+                </a:tc>
+                <a:tc>
+                  <a:txBody>
+                    <a:bodyPr>
+                      <a:normAutofit/>
+                    </a:bodyPr>
+                    <a:lstStyle/>
+                    <a:p>
+                      <a:pPr algn="ctr"/>
+                      <a:r>
+                        <a:rPr sz="694">
+                          <a:solidFill>
+                            <a:srgbClr val="34495E"/>
+                          </a:solidFill>
+                        </a:rPr>
+                        <a:t>4元</a:t>
+                      </a:r>
+                    </a:p>
+                  </a:txBody>
+                  <a:tcPr marL="91440" marR="91440" marT="45720" marB="45720">
+                    <a:solidFill>
+                      <a:srgbClr val="F7FAFD"/>
+                    </a:solidFill>
+                  </a:tcPr>
+                </a:tc>
+              </a:tr>
+              <a:tr h="285750">
+                <a:tc>
+                  <a:txBody>
+                    <a:bodyPr>
+                      <a:normAutofit/>
+                    </a:bodyPr>
+                    <a:lstStyle/>
+                    <a:p>
+                      <a:pPr algn="l"/>
+                      <a:r>
+                        <a:rPr sz="694">
+                          <a:solidFill>
+                            <a:srgbClr val="34495E"/>
+                          </a:solidFill>
+                        </a:rPr>
+                        <a:t>异常检测</a:t>
+                      </a:r>
+                    </a:p>
+                  </a:txBody>
+                  <a:tcPr marL="91440" marR="91440" marT="45720" marB="45720">
+                    <a:solidFill>
+                      <a:srgbClr val="FFFFFF"/>
+                    </a:solidFill>
+                  </a:tcPr>
+                </a:tc>
+                <a:tc>
+                  <a:txBody>
+                    <a:bodyPr>
+                      <a:normAutofit/>
+                    </a:bodyPr>
+                    <a:lstStyle/>
+                    <a:p>
+                      <a:pPr algn="ctr"/>
+                      <a:r>
+                        <a:rPr sz="694">
+                          <a:solidFill>
+                            <a:srgbClr val="34495E"/>
+                          </a:solidFill>
+                        </a:rPr>
+                        <a:t>100</a:t>
+                      </a:r>
+                    </a:p>
+                  </a:txBody>
+                  <a:tcPr marL="91440" marR="91440" marT="45720" marB="45720">
+                    <a:solidFill>
+                      <a:srgbClr val="FFFFFF"/>
+                    </a:solidFill>
+                  </a:tcPr>
+                </a:tc>
+                <a:tc>
+                  <a:txBody>
+                    <a:bodyPr>
+                      <a:normAutofit/>
+                    </a:bodyPr>
+                    <a:lstStyle/>
+                    <a:p>
+                      <a:pPr algn="ctr"/>
+                      <a:r>
+                        <a:rPr sz="694">
+                          <a:solidFill>
+                            <a:srgbClr val="34495E"/>
+                          </a:solidFill>
+                        </a:rPr>
+                        <a:t>100（对比）</a:t>
+                      </a:r>
+                    </a:p>
+                  </a:txBody>
+                  <a:tcPr marL="91440" marR="91440" marT="45720" marB="45720">
+                    <a:solidFill>
+                      <a:srgbClr val="FFFFFF"/>
+                    </a:solidFill>
+                  </a:tcPr>
+                </a:tc>
+                <a:tc>
+                  <a:txBody>
+                    <a:bodyPr>
+                      <a:normAutofit/>
+                    </a:bodyPr>
+                    <a:lstStyle/>
+                    <a:p>
+                      <a:pPr algn="ctr"/>
+                      <a:r>
+                        <a:rPr sz="694">
+                          <a:solidFill>
+                            <a:srgbClr val="34495E"/>
+                          </a:solidFill>
+                        </a:rPr>
+                        <a:t>4元</a:t>
+                      </a:r>
+                    </a:p>
+                  </a:txBody>
+                  <a:tcPr marL="91440" marR="91440" marT="45720" marB="45720">
+                    <a:solidFill>
+                      <a:srgbClr val="FFFFFF"/>
+                    </a:solidFill>
+                  </a:tcPr>
+                </a:tc>
+              </a:tr>
+            </a:tbl>
+          </a:graphicData>
+        </a:graphic>
+      </p:graphicFrame>
+      <p:sp>
+        <p:nvSpPr>
+          <p:cNvPr id="48" name="">
+            <a:extLst xmlns:a="http://schemas.openxmlformats.org/drawingml/2006/main">
+              <a:ext uri="{FF2B5EF4-FFF2-40B4-BE49-F238E27FC236}">
+                <a16:creationId xmlns:a16="http://schemas.microsoft.com/office/drawing/2014/main" id="{E450820B-A485-4955-AAE0-FFFDE0D78695}"/>
+              </a:ext>
+            </a:extLst>
+          </p:cNvPr>
+          <p:cNvSpPr>
+            <a:spLocks xmlns:a="http://schemas.openxmlformats.org/drawingml/2006/main" noGrp="1"/>
+          </p:cNvSpPr>
+          <p:nvPr/>
+        </p:nvSpPr>
+        <p:spPr>
+          <a:xfrm xmlns:a="http://schemas.openxmlformats.org/drawingml/2006/main">
+            <a:off x="6191250" y="3638550"/>
+            <a:ext cx="47625" cy="190500"/>
+          </a:xfrm>
+          <a:prstGeom xmlns:a="http://schemas.openxmlformats.org/drawingml/2006/main" prst="rect">
+            <a:avLst/>
+          </a:prstGeom>
+          <a:solidFill xmlns:a="http://schemas.openxmlformats.org/drawingml/2006/main">
+            <a:srgbClr val="179B83"/>
+          </a:solidFill>
+          <a:ln xmlns:a="http://schemas.openxmlformats.org/drawingml/2006/main" w="0">
+            <a:noFill/>
+          </a:ln>
+        </p:spPr>
+      </p:sp>
+      <p:sp>
+        <p:nvSpPr>
+          <p:cNvPr id="49" name="">
+            <a:extLst xmlns:a="http://schemas.openxmlformats.org/drawingml/2006/main">
+              <a:ext uri="{FF2B5EF4-FFF2-40B4-BE49-F238E27FC236}">
+                <a16:creationId xmlns:a16="http://schemas.microsoft.com/office/drawing/2014/main" id="{CC1C820F-1293-4AFE-83D9-0995B06AF5B6}"/>
+              </a:ext>
+            </a:extLst>
+          </p:cNvPr>
+          <p:cNvSpPr>
+            <a:spLocks xmlns:a="http://schemas.openxmlformats.org/drawingml/2006/main" noGrp="1"/>
+          </p:cNvSpPr>
+          <p:nvPr/>
+        </p:nvSpPr>
+        <p:spPr>
+          <a:xfrm xmlns:a="http://schemas.openxmlformats.org/drawingml/2006/main">
+            <a:off x="6334125" y="3619500"/>
+            <a:ext cx="4762500" cy="238125"/>
+          </a:xfrm>
+          <a:prstGeom xmlns:a="http://schemas.openxmlformats.org/drawingml/2006/main" prst="rect">
+            <a:avLst/>
+          </a:prstGeom>
+          <a:noFill xmlns:a="http://schemas.openxmlformats.org/drawingml/2006/main"/>
+          <a:ln xmlns:a="http://schemas.openxmlformats.org/drawingml/2006/main" w="0">
+            <a:noFill/>
+          </a:ln>
+        </p:spPr>
+        <p:txBody>
+          <a:bodyPr xmlns:a="http://schemas.openxmlformats.org/drawingml/2006/main">
+            <a:normAutofit fontScale="53472"/>
+          </a:bodyPr>
+          <a:lstStyle xmlns:a="http://schemas.openxmlformats.org/drawingml/2006/main"/>
+          <a:p xmlns:a="http://schemas.openxmlformats.org/drawingml/2006/main">
+            <a:pPr>
+              <a:defRPr b="1">
+                <a:solidFill>
+                  <a:srgbClr val="113B68"/>
+                </a:solidFill>
+              </a:defRPr>
+            </a:pPr>
+            <a:r>
+              <a:rPr b="1">
+                <a:solidFill>
+                  <a:srgbClr val="113B68"/>
+                </a:solidFill>
+              </a:rPr>
+              <a:t>1.4. 月度 Token 成本汇总</a:t>
+            </a:r>
+          </a:p>
+        </p:txBody>
+      </p:sp>
+      <p:graphicFrame>
+        <p:nvGraphicFramePr>
+          <p:cNvPr id="73" name=""/>
+          <p:cNvGraphicFramePr/>
+          <p:nvPr/>
+        </p:nvGraphicFramePr>
+        <p:xfrm>
+          <a:off xmlns:a="http://schemas.openxmlformats.org/drawingml/2006/main" x="6191250" y="3905250"/>
+          <a:ext xmlns:a="http://schemas.openxmlformats.org/drawingml/2006/main" cx="5429250" cy="904875"/>
+        </p:xfrm>
+        <a:graphic xmlns:a="http://schemas.openxmlformats.org/drawingml/2006/main">
+          <a:graphicData uri="http://schemas.openxmlformats.org/drawingml/2006/table">
+            <a:tbl>
+              <a:tblPr firstRow="1" bandRow="1"/>
+              <a:tblGrid>
+                <a:gridCol w="1762125"/>
+                <a:gridCol w="2333625"/>
+                <a:gridCol w="1333500"/>
+              </a:tblGrid>
+              <a:tr h="226219">
+                <a:tc>
+                  <a:txBody>
+                    <a:bodyPr>
+                      <a:normAutofit/>
+                    </a:bodyPr>
+                    <a:lstStyle/>
+                    <a:p>
+                      <a:pPr algn="ctr"/>
+                      <a:r>
+                        <a:rPr sz="788" b="1">
+                          <a:solidFill>
+                            <a:srgbClr val="113B68"/>
+                          </a:solidFill>
+                        </a:rPr>
+                        <a:t>成本项</a:t>
+                      </a:r>
+                    </a:p>
+                  </a:txBody>
+                  <a:tcPr marL="91440" marR="91440" marT="45720" marB="45720">
+                    <a:solidFill>
+                      <a:srgbClr val="E3EFFA"/>
+                    </a:solidFill>
+                  </a:tcPr>
+                </a:tc>
+                <a:tc>
+                  <a:txBody>
+                    <a:bodyPr>
+                      <a:normAutofit/>
+                    </a:bodyPr>
+                    <a:lstStyle/>
+                    <a:p>
+                      <a:pPr algn="ctr"/>
+                      <a:r>
+                        <a:rPr sz="788" b="1">
+                          <a:solidFill>
+                            <a:srgbClr val="113B68"/>
+                          </a:solidFill>
+                        </a:rPr>
+                        <a:t>计算逻辑</a:t>
+                      </a:r>
+                    </a:p>
+                  </a:txBody>
+                  <a:tcPr marL="91440" marR="91440" marT="45720" marB="45720">
+                    <a:solidFill>
+                      <a:srgbClr val="E3EFFA"/>
+                    </a:solidFill>
+                  </a:tcPr>
+                </a:tc>
+                <a:tc>
+                  <a:txBody>
+                    <a:bodyPr>
+                      <a:normAutofit/>
+                    </a:bodyPr>
+                    <a:lstStyle/>
+                    <a:p>
+                      <a:pPr algn="ctr"/>
+                      <a:r>
+                        <a:rPr sz="788" b="1">
+                          <a:solidFill>
+                            <a:srgbClr val="113B68"/>
+                          </a:solidFill>
+                        </a:rPr>
+                        <a:t>月度成本</a:t>
+                      </a:r>
+                    </a:p>
+                  </a:txBody>
+                  <a:tcPr marL="91440" marR="91440" marT="45720" marB="45720">
+                    <a:solidFill>
+                      <a:srgbClr val="E3EFFA"/>
+                    </a:solidFill>
+                  </a:tcPr>
+                </a:tc>
+              </a:tr>
+              <a:tr h="226219">
+                <a:tc>
+                  <a:txBody>
+                    <a:bodyPr>
+                      <a:normAutofit/>
+                    </a:bodyPr>
+                    <a:lstStyle/>
+                    <a:p>
+                      <a:pPr algn="l"/>
+                      <a:r>
+                        <a:rPr sz="694">
+                          <a:solidFill>
+                            <a:srgbClr val="34495E"/>
+                          </a:solidFill>
+                        </a:rPr>
+                        <a:t>自然语言查询</a:t>
+                      </a:r>
+                    </a:p>
+                  </a:txBody>
+                  <a:tcPr marL="91440" marR="91440" marT="45720" marB="45720">
+                    <a:solidFill>
+                      <a:srgbClr val="FFFFFF"/>
+                    </a:solidFill>
+                  </a:tcPr>
+                </a:tc>
+                <a:tc>
+                  <a:txBody>
+                    <a:bodyPr>
+                      <a:normAutofit/>
+                    </a:bodyPr>
+                    <a:lstStyle/>
+                    <a:p>
+                      <a:pPr algn="ctr"/>
+                      <a:r>
+                        <a:rPr sz="694">
+                          <a:solidFill>
+                            <a:srgbClr val="34495E"/>
+                          </a:solidFill>
+                        </a:rPr>
+                        <a:t>500次 / 天 × 单次调用</a:t>
+                      </a:r>
+                    </a:p>
+                  </a:txBody>
+                  <a:tcPr marL="91440" marR="91440" marT="45720" marB="45720">
+                    <a:solidFill>
+                      <a:srgbClr val="FFFFFF"/>
+                    </a:solidFill>
+                  </a:tcPr>
+                </a:tc>
+                <a:tc>
+                  <a:txBody>
+                    <a:bodyPr>
+                      <a:normAutofit/>
+                    </a:bodyPr>
+                    <a:lstStyle/>
+                    <a:p>
+                      <a:pPr algn="ctr"/>
+                      <a:r>
+                        <a:rPr sz="694">
+                          <a:solidFill>
+                            <a:srgbClr val="34495E"/>
                           </a:solidFill>
                         </a:rPr>
                         <a:t>1,000元</a:t>
@@ -22621,7 +23446,7 @@
                   </a:tcPr>
                 </a:tc>
               </a:tr>
-              <a:tr h="173831">
+              <a:tr h="226219">
                 <a:tc>
                   <a:txBody>
                     <a:bodyPr>
@@ -22631,9 +23456,9 @@
                     <a:p>
                       <a:pPr algn="l"/>
                       <a:r>
-                        <a:rPr sz="540">
+                        <a:rPr sz="694">
                           <a:solidFill>
-                            <a:srgbClr val="3E4C5D"/>
+                            <a:srgbClr val="34495E"/>
                           </a:solidFill>
                         </a:rPr>
                         <a:t>批量分析任务</a:t>
@@ -22655,12 +23480,12 @@
                     <a:p>
                       <a:pPr algn="ctr"/>
                       <a:r>
-                        <a:rPr sz="540">
+                        <a:rPr sz="694">
                           <a:solidFill>
-                            <a:srgbClr val="3E4C5D"/>
+                            <a:srgbClr val="34495E"/>
                           </a:solidFill>
                         </a:rPr>
-                        <a:t>映射 / 对比</a:t>
+                        <a:t>50次 / 月 × 批量处理</a:t>
                       </a:r>
                     </a:p>
                   </a:txBody>
@@ -22679,460 +23504,12 @@
                     <a:p>
                       <a:pPr algn="ctr"/>
                       <a:r>
-                        <a:rPr sz="540">
+                        <a:rPr sz="694">
                           <a:solidFill>
-                            <a:srgbClr val="3E4C5D"/>
-                          </a:solidFill>
-                        </a:rPr>
-                        <a:t>0.04～0.07元</a:t>
-                      </a:r>
-                    </a:p>
-                  </a:txBody>
-                  <a:tcPr marL="91440" marR="91440" marT="45720" marB="45720">
-                    <a:solidFill>
-                      <a:srgbClr val="F7FAFD"/>
-                    </a:solidFill>
-                  </a:tcPr>
-                </a:tc>
-                <a:tc>
-                  <a:txBody>
-                    <a:bodyPr>
-                      <a:normAutofit/>
-                    </a:bodyPr>
-                    <a:lstStyle/>
-                    <a:p>
-                      <a:pPr algn="ctr"/>
-                      <a:r>
-                        <a:rPr sz="540">
-                          <a:solidFill>
-                            <a:srgbClr val="3E4C5D"/>
+                            <a:srgbClr val="34495E"/>
                           </a:solidFill>
                         </a:rPr>
                         <a:t>700元</a:t>
-                      </a:r>
-                    </a:p>
-                  </a:txBody>
-                  <a:tcPr marL="91440" marR="91440" marT="45720" marB="45720">
-                    <a:solidFill>
-                      <a:srgbClr val="F7FAFD"/>
-                    </a:solidFill>
-                  </a:tcPr>
-                </a:tc>
-              </a:tr>
-              <a:tr h="173831">
-                <a:tc>
-                  <a:txBody>
-                    <a:bodyPr>
-                      <a:normAutofit/>
-                    </a:bodyPr>
-                    <a:lstStyle/>
-                    <a:p>
-                      <a:pPr algn="l"/>
-                      <a:r>
-                        <a:rPr sz="540" b="1">
-                          <a:solidFill>
-                            <a:srgbClr val="187A43"/>
-                          </a:solidFill>
-                        </a:rPr>
-                        <a:t>Token 成本小计</a:t>
-                      </a:r>
-                    </a:p>
-                  </a:txBody>
-                  <a:tcPr marL="91440" marR="91440" marT="45720" marB="45720">
-                    <a:solidFill>
-                      <a:srgbClr val="EAF6EF"/>
-                    </a:solidFill>
-                  </a:tcPr>
-                </a:tc>
-                <a:tc>
-                  <a:txBody>
-                    <a:bodyPr>
-                      <a:normAutofit/>
-                    </a:bodyPr>
-                    <a:lstStyle/>
-                    <a:p>
-                      <a:pPr algn="ctr"/>
-                      <a:r>
-                        <a:rPr sz="540" b="1">
-                          <a:solidFill>
-                            <a:srgbClr val="187A43"/>
-                          </a:solidFill>
-                        </a:rPr>
-                        <a:t>—</a:t>
-                      </a:r>
-                    </a:p>
-                  </a:txBody>
-                  <a:tcPr marL="91440" marR="91440" marT="45720" marB="45720">
-                    <a:solidFill>
-                      <a:srgbClr val="EAF6EF"/>
-                    </a:solidFill>
-                  </a:tcPr>
-                </a:tc>
-                <a:tc>
-                  <a:txBody>
-                    <a:bodyPr>
-                      <a:normAutofit/>
-                    </a:bodyPr>
-                    <a:lstStyle/>
-                    <a:p>
-                      <a:pPr algn="ctr"/>
-                      <a:r>
-                        <a:rPr sz="540" b="1">
-                          <a:solidFill>
-                            <a:srgbClr val="187A43"/>
-                          </a:solidFill>
-                        </a:rPr>
-                        <a:t>—</a:t>
-                      </a:r>
-                    </a:p>
-                  </a:txBody>
-                  <a:tcPr marL="91440" marR="91440" marT="45720" marB="45720">
-                    <a:solidFill>
-                      <a:srgbClr val="EAF6EF"/>
-                    </a:solidFill>
-                  </a:tcPr>
-                </a:tc>
-                <a:tc>
-                  <a:txBody>
-                    <a:bodyPr>
-                      <a:normAutofit/>
-                    </a:bodyPr>
-                    <a:lstStyle/>
-                    <a:p>
-                      <a:pPr algn="ctr"/>
-                      <a:r>
-                        <a:rPr sz="540" b="1">
-                          <a:solidFill>
-                            <a:srgbClr val="187A43"/>
-                          </a:solidFill>
-                        </a:rPr>
-                        <a:t>1,700元</a:t>
-                      </a:r>
-                    </a:p>
-                  </a:txBody>
-                  <a:tcPr marL="91440" marR="91440" marT="45720" marB="45720">
-                    <a:solidFill>
-                      <a:srgbClr val="EAF6EF"/>
-                    </a:solidFill>
-                  </a:tcPr>
-                </a:tc>
-              </a:tr>
-            </a:tbl>
-          </a:graphicData>
-        </a:graphic>
-      </p:graphicFrame>
-      <p:sp>
-        <p:nvSpPr>
-          <p:cNvPr id="45" name="">
-            <a:extLst xmlns:a="http://schemas.openxmlformats.org/drawingml/2006/main">
-              <a:ext uri="{FF2B5EF4-FFF2-40B4-BE49-F238E27FC236}">
-                <a16:creationId xmlns:a16="http://schemas.microsoft.com/office/drawing/2014/main" id="{924A8E6E-A5EF-44C4-9D4E-2F899C5BAF7E}"/>
-              </a:ext>
-            </a:extLst>
-          </p:cNvPr>
-          <p:cNvSpPr>
-            <a:spLocks xmlns:a="http://schemas.openxmlformats.org/drawingml/2006/main" noGrp="1"/>
-          </p:cNvSpPr>
-          <p:nvPr/>
-        </p:nvSpPr>
-        <p:spPr>
-          <a:xfrm xmlns:a="http://schemas.openxmlformats.org/drawingml/2006/main">
-            <a:off x="571500" y="4572000"/>
-            <a:ext cx="47625" cy="161925"/>
-          </a:xfrm>
-          <a:prstGeom xmlns:a="http://schemas.openxmlformats.org/drawingml/2006/main" prst="rect">
-            <a:avLst/>
-          </a:prstGeom>
-          <a:solidFill xmlns:a="http://schemas.openxmlformats.org/drawingml/2006/main">
-            <a:srgbClr val="2C8B77"/>
-          </a:solidFill>
-          <a:ln xmlns:a="http://schemas.openxmlformats.org/drawingml/2006/main" w="0">
-            <a:noFill/>
-          </a:ln>
-        </p:spPr>
-      </p:sp>
-      <p:sp>
-        <p:nvSpPr>
-          <p:cNvPr id="46" name="">
-            <a:extLst xmlns:a="http://schemas.openxmlformats.org/drawingml/2006/main">
-              <a:ext uri="{FF2B5EF4-FFF2-40B4-BE49-F238E27FC236}">
-                <a16:creationId xmlns:a16="http://schemas.microsoft.com/office/drawing/2014/main" id="{957ED8FB-59E5-4844-9BBA-5D784AA1F29B}"/>
-              </a:ext>
-            </a:extLst>
-          </p:cNvPr>
-          <p:cNvSpPr>
-            <a:spLocks xmlns:a="http://schemas.openxmlformats.org/drawingml/2006/main" noGrp="1"/>
-          </p:cNvSpPr>
-          <p:nvPr/>
-        </p:nvSpPr>
-        <p:spPr>
-          <a:xfrm xmlns:a="http://schemas.openxmlformats.org/drawingml/2006/main">
-            <a:off x="695325" y="4552950"/>
-            <a:ext cx="4857750" cy="209550"/>
-          </a:xfrm>
-          <a:prstGeom xmlns:a="http://schemas.openxmlformats.org/drawingml/2006/main" prst="rect">
-            <a:avLst/>
-          </a:prstGeom>
-          <a:noFill xmlns:a="http://schemas.openxmlformats.org/drawingml/2006/main"/>
-          <a:ln xmlns:a="http://schemas.openxmlformats.org/drawingml/2006/main" w="0">
-            <a:noFill/>
-          </a:ln>
-        </p:spPr>
-        <p:txBody>
-          <a:bodyPr xmlns:a="http://schemas.openxmlformats.org/drawingml/2006/main">
-            <a:normAutofit fontScale="43056"/>
-          </a:bodyPr>
-          <a:lstStyle xmlns:a="http://schemas.openxmlformats.org/drawingml/2006/main"/>
-          <a:p xmlns:a="http://schemas.openxmlformats.org/drawingml/2006/main">
-            <a:pPr>
-              <a:defRPr b="1">
-                <a:solidFill>
-                  <a:srgbClr val="173B6B"/>
-                </a:solidFill>
-              </a:defRPr>
-            </a:pPr>
-            <a:r>
-              <a:rPr b="1">
-                <a:solidFill>
-                  <a:srgbClr val="173B6B"/>
-                </a:solidFill>
-              </a:rPr>
-              <a:t>1.3. 月度运营成本汇总</a:t>
-            </a:r>
-          </a:p>
-        </p:txBody>
-      </p:sp>
-      <p:graphicFrame>
-        <p:nvGraphicFramePr>
-          <p:cNvPr id="92" name=""/>
-          <p:cNvGraphicFramePr/>
-          <p:nvPr/>
-        </p:nvGraphicFramePr>
-        <p:xfrm>
-          <a:off xmlns:a="http://schemas.openxmlformats.org/drawingml/2006/main" x="571500" y="4800600"/>
-          <a:ext xmlns:a="http://schemas.openxmlformats.org/drawingml/2006/main" cx="5257800" cy="904875"/>
-        </p:xfrm>
-        <a:graphic xmlns:a="http://schemas.openxmlformats.org/drawingml/2006/main">
-          <a:graphicData uri="http://schemas.openxmlformats.org/drawingml/2006/table">
-            <a:tbl>
-              <a:tblPr firstRow="1" bandRow="1"/>
-              <a:tblGrid>
-                <a:gridCol w="1952625"/>
-                <a:gridCol w="1952625"/>
-                <a:gridCol w="1352550"/>
-              </a:tblGrid>
-              <a:tr h="226219">
-                <a:tc>
-                  <a:txBody>
-                    <a:bodyPr>
-                      <a:normAutofit/>
-                    </a:bodyPr>
-                    <a:lstStyle/>
-                    <a:p>
-                      <a:pPr algn="ctr"/>
-                      <a:r>
-                        <a:rPr sz="615" b="1">
-                          <a:solidFill>
-                            <a:srgbClr val="173B6B"/>
-                          </a:solidFill>
-                        </a:rPr>
-                        <a:t>成本项</a:t>
-                      </a:r>
-                    </a:p>
-                  </a:txBody>
-                  <a:tcPr marL="91440" marR="91440" marT="45720" marB="45720">
-                    <a:solidFill>
-                      <a:srgbClr val="E8F1FA"/>
-                    </a:solidFill>
-                  </a:tcPr>
-                </a:tc>
-                <a:tc>
-                  <a:txBody>
-                    <a:bodyPr>
-                      <a:normAutofit/>
-                    </a:bodyPr>
-                    <a:lstStyle/>
-                    <a:p>
-                      <a:pPr algn="ctr"/>
-                      <a:r>
-                        <a:rPr sz="615" b="1">
-                          <a:solidFill>
-                            <a:srgbClr val="173B6B"/>
-                          </a:solidFill>
-                        </a:rPr>
-                        <a:t>计算逻辑</a:t>
-                      </a:r>
-                    </a:p>
-                  </a:txBody>
-                  <a:tcPr marL="91440" marR="91440" marT="45720" marB="45720">
-                    <a:solidFill>
-                      <a:srgbClr val="E8F1FA"/>
-                    </a:solidFill>
-                  </a:tcPr>
-                </a:tc>
-                <a:tc>
-                  <a:txBody>
-                    <a:bodyPr>
-                      <a:normAutofit/>
-                    </a:bodyPr>
-                    <a:lstStyle/>
-                    <a:p>
-                      <a:pPr algn="ctr"/>
-                      <a:r>
-                        <a:rPr sz="615" b="1">
-                          <a:solidFill>
-                            <a:srgbClr val="173B6B"/>
-                          </a:solidFill>
-                        </a:rPr>
-                        <a:t>月度成本</a:t>
-                      </a:r>
-                    </a:p>
-                  </a:txBody>
-                  <a:tcPr marL="91440" marR="91440" marT="45720" marB="45720">
-                    <a:solidFill>
-                      <a:srgbClr val="E8F1FA"/>
-                    </a:solidFill>
-                  </a:tcPr>
-                </a:tc>
-              </a:tr>
-              <a:tr h="226219">
-                <a:tc>
-                  <a:txBody>
-                    <a:bodyPr>
-                      <a:normAutofit/>
-                    </a:bodyPr>
-                    <a:lstStyle/>
-                    <a:p>
-                      <a:pPr algn="l"/>
-                      <a:r>
-                        <a:rPr sz="540">
-                          <a:solidFill>
-                            <a:srgbClr val="3E4C5D"/>
-                          </a:solidFill>
-                        </a:rPr>
-                        <a:t>Token 调用</a:t>
-                      </a:r>
-                    </a:p>
-                  </a:txBody>
-                  <a:tcPr marL="91440" marR="91440" marT="45720" marB="45720">
-                    <a:solidFill>
-                      <a:srgbClr val="FFFFFF"/>
-                    </a:solidFill>
-                  </a:tcPr>
-                </a:tc>
-                <a:tc>
-                  <a:txBody>
-                    <a:bodyPr>
-                      <a:normAutofit/>
-                    </a:bodyPr>
-                    <a:lstStyle/>
-                    <a:p>
-                      <a:pPr algn="ctr"/>
-                      <a:r>
-                        <a:rPr sz="540">
-                          <a:solidFill>
-                            <a:srgbClr val="3E4C5D"/>
-                          </a:solidFill>
-                        </a:rPr>
-                        <a:t>自然语言查询 + 批量任务</a:t>
-                      </a:r>
-                    </a:p>
-                  </a:txBody>
-                  <a:tcPr marL="91440" marR="91440" marT="45720" marB="45720">
-                    <a:solidFill>
-                      <a:srgbClr val="FFFFFF"/>
-                    </a:solidFill>
-                  </a:tcPr>
-                </a:tc>
-                <a:tc>
-                  <a:txBody>
-                    <a:bodyPr>
-                      <a:normAutofit/>
-                    </a:bodyPr>
-                    <a:lstStyle/>
-                    <a:p>
-                      <a:pPr algn="ctr"/>
-                      <a:r>
-                        <a:rPr sz="540">
-                          <a:solidFill>
-                            <a:srgbClr val="3E4C5D"/>
-                          </a:solidFill>
-                        </a:rPr>
-                        <a:t>1,700元</a:t>
-                      </a:r>
-                    </a:p>
-                  </a:txBody>
-                  <a:tcPr marL="91440" marR="91440" marT="45720" marB="45720">
-                    <a:solidFill>
-                      <a:srgbClr val="FFFFFF"/>
-                    </a:solidFill>
-                  </a:tcPr>
-                </a:tc>
-              </a:tr>
-              <a:tr h="226219">
-                <a:tc>
-                  <a:txBody>
-                    <a:bodyPr>
-                      <a:normAutofit/>
-                    </a:bodyPr>
-                    <a:lstStyle/>
-                    <a:p>
-                      <a:pPr algn="l"/>
-                      <a:r>
-                        <a:rPr sz="540">
-                          <a:solidFill>
-                            <a:srgbClr val="3E4C5D"/>
-                          </a:solidFill>
-                        </a:rPr>
-                        <a:t>硬件资源</a:t>
-                      </a:r>
-                    </a:p>
-                  </a:txBody>
-                  <a:tcPr marL="91440" marR="91440" marT="45720" marB="45720">
-                    <a:solidFill>
-                      <a:srgbClr val="F7FAFD"/>
-                    </a:solidFill>
-                  </a:tcPr>
-                </a:tc>
-                <a:tc>
-                  <a:txBody>
-                    <a:bodyPr>
-                      <a:normAutofit/>
-                    </a:bodyPr>
-                    <a:lstStyle/>
-                    <a:p>
-                      <a:pPr algn="ctr"/>
-                      <a:r>
-                        <a:rPr sz="540">
-                          <a:solidFill>
-                            <a:srgbClr val="3E4C5D"/>
-                          </a:solidFill>
-                        </a:rPr>
-                        <a:t>后端 / 前端 / 网关 / PostgreSQL</a:t>
-                      </a:r>
-                    </a:p>
-                  </a:txBody>
-                  <a:tcPr marL="91440" marR="91440" marT="45720" marB="45720">
-                    <a:solidFill>
-                      <a:srgbClr val="F7FAFD"/>
-                    </a:solidFill>
-                  </a:tcPr>
-                </a:tc>
-                <a:tc>
-                  <a:txBody>
-                    <a:bodyPr>
-                      <a:normAutofit/>
-                    </a:bodyPr>
-                    <a:lstStyle/>
-                    <a:p>
-                      <a:pPr algn="ctr"/>
-                      <a:r>
-                        <a:rPr sz="540">
-                          <a:solidFill>
-                            <a:srgbClr val="3E4C5D"/>
-                          </a:solidFill>
-                        </a:rPr>
-                        <a:t>1,500元</a:t>
                       </a:r>
                     </a:p>
                   </a:txBody>
@@ -23153,18 +23530,18 @@
                     <a:p>
                       <a:pPr algn="l"/>
                       <a:r>
-                        <a:rPr sz="540" b="1">
+                        <a:rPr sz="694" b="1">
                           <a:solidFill>
-                            <a:srgbClr val="187A43"/>
+                            <a:srgbClr val="087A3F"/>
                           </a:solidFill>
                         </a:rPr>
-                        <a:t>月度运营成本</a:t>
+                        <a:t>Token 成本小计</a:t>
                       </a:r>
                     </a:p>
                   </a:txBody>
                   <a:tcPr marL="91440" marR="91440" marT="45720" marB="45720">
                     <a:solidFill>
-                      <a:srgbClr val="EAF6EF"/>
+                      <a:srgbClr val="E8F5ED"/>
                     </a:solidFill>
                   </a:tcPr>
                 </a:tc>
@@ -23177,18 +23554,18 @@
                     <a:p>
                       <a:pPr algn="ctr"/>
                       <a:r>
-                        <a:rPr sz="540" b="1">
+                        <a:rPr sz="694" b="1">
                           <a:solidFill>
-                            <a:srgbClr val="187A43"/>
+                            <a:srgbClr val="087A3F"/>
                           </a:solidFill>
                         </a:rPr>
-                        <a:t>Token + 硬件</a:t>
+                        <a:t>—</a:t>
                       </a:r>
                     </a:p>
                   </a:txBody>
                   <a:tcPr marL="91440" marR="91440" marT="45720" marB="45720">
                     <a:solidFill>
-                      <a:srgbClr val="EAF6EF"/>
+                      <a:srgbClr val="E8F5ED"/>
                     </a:solidFill>
                   </a:tcPr>
                 </a:tc>
@@ -23201,18 +23578,18 @@
                     <a:p>
                       <a:pPr algn="ctr"/>
                       <a:r>
-                        <a:rPr sz="540" b="1">
+                        <a:rPr sz="694" b="1">
                           <a:solidFill>
-                            <a:srgbClr val="187A43"/>
+                            <a:srgbClr val="087A3F"/>
                           </a:solidFill>
                         </a:rPr>
-                        <a:t>3,200元</a:t>
+                        <a:t>1,700元</a:t>
                       </a:r>
                     </a:p>
                   </a:txBody>
                   <a:tcPr marL="91440" marR="91440" marT="45720" marB="45720">
                     <a:solidFill>
-                      <a:srgbClr val="EAF6EF"/>
+                      <a:srgbClr val="E8F5ED"/>
                     </a:solidFill>
                   </a:tcPr>
                 </a:tc>
@@ -23223,28 +23600,28 @@
       </p:graphicFrame>
       <p:sp>
         <p:nvSpPr>
-          <p:cNvPr id="48" name="">
-            <a:extLst xmlns:a="http://schemas.openxmlformats.org/drawingml/2006/main">
-              <a:ext uri="{FF2B5EF4-FFF2-40B4-BE49-F238E27FC236}">
-                <a16:creationId xmlns:a16="http://schemas.microsoft.com/office/drawing/2014/main" id="{3E4340FF-E5A9-4FE0-97E6-7C23BF862D20}"/>
-              </a:ext>
-            </a:extLst>
-          </p:cNvPr>
-          <p:cNvSpPr>
-            <a:spLocks xmlns:a="http://schemas.openxmlformats.org/drawingml/2006/main" noGrp="1"/>
-          </p:cNvSpPr>
-          <p:nvPr/>
-        </p:nvSpPr>
-        <p:spPr>
-          <a:xfrm xmlns:a="http://schemas.openxmlformats.org/drawingml/2006/main">
-            <a:off x="6210300" y="2038350"/>
-            <a:ext cx="47625" cy="161925"/>
+          <p:cNvPr id="51" name="">
+            <a:extLst xmlns:a="http://schemas.openxmlformats.org/drawingml/2006/main">
+              <a:ext uri="{FF2B5EF4-FFF2-40B4-BE49-F238E27FC236}">
+                <a16:creationId xmlns:a16="http://schemas.microsoft.com/office/drawing/2014/main" id="{86BADBDE-D883-415B-A1D2-89DBECBD0C47}"/>
+              </a:ext>
+            </a:extLst>
+          </p:cNvPr>
+          <p:cNvSpPr>
+            <a:spLocks xmlns:a="http://schemas.openxmlformats.org/drawingml/2006/main" noGrp="1"/>
+          </p:cNvSpPr>
+          <p:nvPr/>
+        </p:nvSpPr>
+        <p:spPr>
+          <a:xfrm xmlns:a="http://schemas.openxmlformats.org/drawingml/2006/main">
+            <a:off x="6191250" y="5067300"/>
+            <a:ext cx="47625" cy="190500"/>
           </a:xfrm>
           <a:prstGeom xmlns:a="http://schemas.openxmlformats.org/drawingml/2006/main" prst="rect">
             <a:avLst/>
           </a:prstGeom>
           <a:solidFill xmlns:a="http://schemas.openxmlformats.org/drawingml/2006/main">
-            <a:srgbClr val="1D5B9C"/>
+            <a:srgbClr val="E79A25"/>
           </a:solidFill>
           <a:ln xmlns:a="http://schemas.openxmlformats.org/drawingml/2006/main" w="0">
             <a:noFill/>
@@ -23253,22 +23630,22 @@
       </p:sp>
       <p:sp>
         <p:nvSpPr>
-          <p:cNvPr id="49" name="">
-            <a:extLst xmlns:a="http://schemas.openxmlformats.org/drawingml/2006/main">
-              <a:ext uri="{FF2B5EF4-FFF2-40B4-BE49-F238E27FC236}">
-                <a16:creationId xmlns:a16="http://schemas.microsoft.com/office/drawing/2014/main" id="{3B589DF2-BB0E-4107-917C-E1CDD000FA65}"/>
-              </a:ext>
-            </a:extLst>
-          </p:cNvPr>
-          <p:cNvSpPr>
-            <a:spLocks xmlns:a="http://schemas.openxmlformats.org/drawingml/2006/main" noGrp="1"/>
-          </p:cNvSpPr>
-          <p:nvPr/>
-        </p:nvSpPr>
-        <p:spPr>
-          <a:xfrm xmlns:a="http://schemas.openxmlformats.org/drawingml/2006/main">
-            <a:off x="6334125" y="2019300"/>
-            <a:ext cx="5095875" cy="209550"/>
+          <p:cNvPr id="52" name="">
+            <a:extLst xmlns:a="http://schemas.openxmlformats.org/drawingml/2006/main">
+              <a:ext uri="{FF2B5EF4-FFF2-40B4-BE49-F238E27FC236}">
+                <a16:creationId xmlns:a16="http://schemas.microsoft.com/office/drawing/2014/main" id="{FBEF1463-05C4-4EFF-AA19-DF5DE5EF30EE}"/>
+              </a:ext>
+            </a:extLst>
+          </p:cNvPr>
+          <p:cNvSpPr>
+            <a:spLocks xmlns:a="http://schemas.openxmlformats.org/drawingml/2006/main" noGrp="1"/>
+          </p:cNvSpPr>
+          <p:nvPr/>
+        </p:nvSpPr>
+        <p:spPr>
+          <a:xfrm xmlns:a="http://schemas.openxmlformats.org/drawingml/2006/main">
+            <a:off x="6334125" y="5048250"/>
+            <a:ext cx="4762500" cy="238125"/>
           </a:xfrm>
           <a:prstGeom xmlns:a="http://schemas.openxmlformats.org/drawingml/2006/main" prst="rect">
             <a:avLst/>
@@ -23280,49 +23657,49 @@
         </p:spPr>
         <p:txBody>
           <a:bodyPr xmlns:a="http://schemas.openxmlformats.org/drawingml/2006/main">
-            <a:normAutofit fontScale="43056"/>
+            <a:normAutofit fontScale="53472"/>
           </a:bodyPr>
           <a:lstStyle xmlns:a="http://schemas.openxmlformats.org/drawingml/2006/main"/>
           <a:p xmlns:a="http://schemas.openxmlformats.org/drawingml/2006/main">
             <a:pPr>
               <a:defRPr b="1">
                 <a:solidFill>
-                  <a:srgbClr val="173B6B"/>
+                  <a:srgbClr val="113B68"/>
                 </a:solidFill>
               </a:defRPr>
             </a:pPr>
             <a:r>
               <a:rPr b="1">
                 <a:solidFill>
-                  <a:srgbClr val="173B6B"/>
-                </a:solidFill>
-              </a:rPr>
-              <a:t>2. 产出效益与人力节省</a:t>
+                  <a:srgbClr val="113B68"/>
+                </a:solidFill>
+              </a:rPr>
+              <a:t>1.5. 硬件资源与月度运营成本</a:t>
             </a:r>
           </a:p>
         </p:txBody>
       </p:sp>
       <p:graphicFrame>
         <p:nvGraphicFramePr>
-          <p:cNvPr id="95" name=""/>
+          <p:cNvPr id="76" name=""/>
           <p:cNvGraphicFramePr/>
           <p:nvPr/>
         </p:nvGraphicFramePr>
         <p:xfrm>
-          <a:off xmlns:a="http://schemas.openxmlformats.org/drawingml/2006/main" x="6210300" y="2266950"/>
-          <a:ext xmlns:a="http://schemas.openxmlformats.org/drawingml/2006/main" cx="5410200" cy="1314450"/>
+          <a:off xmlns:a="http://schemas.openxmlformats.org/drawingml/2006/main" x="6191250" y="5334000"/>
+          <a:ext xmlns:a="http://schemas.openxmlformats.org/drawingml/2006/main" cx="5429250" cy="790575"/>
         </p:xfrm>
         <a:graphic xmlns:a="http://schemas.openxmlformats.org/drawingml/2006/main">
           <a:graphicData uri="http://schemas.openxmlformats.org/drawingml/2006/table">
             <a:tbl>
               <a:tblPr firstRow="1" bandRow="1"/>
               <a:tblGrid>
-                <a:gridCol w="1495425"/>
-                <a:gridCol w="1381125"/>
-                <a:gridCol w="1381125"/>
-                <a:gridCol w="1152525"/>
+                <a:gridCol w="1619250"/>
+                <a:gridCol w="1762125"/>
+                <a:gridCol w="904875"/>
+                <a:gridCol w="1143000"/>
               </a:tblGrid>
-              <a:tr h="219075">
+              <a:tr h="197644">
                 <a:tc>
                   <a:txBody>
                     <a:bodyPr>
@@ -23332,18 +23709,18 @@
                     <a:p>
                       <a:pPr algn="ctr"/>
                       <a:r>
-                        <a:rPr sz="615" b="1">
+                        <a:rPr sz="788" b="1">
                           <a:solidFill>
-                            <a:srgbClr val="173B6B"/>
+                            <a:srgbClr val="113B68"/>
                           </a:solidFill>
                         </a:rPr>
-                        <a:t>指标</a:t>
+                        <a:t>组件</a:t>
                       </a:r>
                     </a:p>
                   </a:txBody>
                   <a:tcPr marL="91440" marR="91440" marT="45720" marB="45720">
                     <a:solidFill>
-                      <a:srgbClr val="E8F1FA"/>
+                      <a:srgbClr val="E3EFFA"/>
                     </a:solidFill>
                   </a:tcPr>
                 </a:tc>
@@ -23356,18 +23733,18 @@
                     <a:p>
                       <a:pPr algn="ctr"/>
                       <a:r>
-                        <a:rPr sz="615" b="1">
+                        <a:rPr sz="788" b="1">
                           <a:solidFill>
-                            <a:srgbClr val="173B6B"/>
+                            <a:srgbClr val="113B68"/>
                           </a:solidFill>
                         </a:rPr>
-                        <a:t>改进前</a:t>
+                        <a:t>配置</a:t>
                       </a:r>
                     </a:p>
                   </a:txBody>
                   <a:tcPr marL="91440" marR="91440" marT="45720" marB="45720">
                     <a:solidFill>
-                      <a:srgbClr val="E8F1FA"/>
+                      <a:srgbClr val="E3EFFA"/>
                     </a:solidFill>
                   </a:tcPr>
                 </a:tc>
@@ -23380,18 +23757,18 @@
                     <a:p>
                       <a:pPr algn="ctr"/>
                       <a:r>
-                        <a:rPr sz="615" b="1">
+                        <a:rPr sz="788" b="1">
                           <a:solidFill>
-                            <a:srgbClr val="173B6B"/>
+                            <a:srgbClr val="113B68"/>
                           </a:solidFill>
                         </a:rPr>
-                        <a:t>改进后</a:t>
+                        <a:t>数量</a:t>
                       </a:r>
                     </a:p>
                   </a:txBody>
                   <a:tcPr marL="91440" marR="91440" marT="45720" marB="45720">
                     <a:solidFill>
-                      <a:srgbClr val="E8F1FA"/>
+                      <a:srgbClr val="E3EFFA"/>
                     </a:solidFill>
                   </a:tcPr>
                 </a:tc>
@@ -23404,23 +23781,23 @@
                     <a:p>
                       <a:pPr algn="ctr"/>
                       <a:r>
-                        <a:rPr sz="615" b="1">
+                        <a:rPr sz="788" b="1">
                           <a:solidFill>
-                            <a:srgbClr val="173B6B"/>
+                            <a:srgbClr val="113B68"/>
                           </a:solidFill>
                         </a:rPr>
-                        <a:t>提升</a:t>
+                        <a:t>月成本</a:t>
                       </a:r>
                     </a:p>
                   </a:txBody>
                   <a:tcPr marL="91440" marR="91440" marT="45720" marB="45720">
                     <a:solidFill>
-                      <a:srgbClr val="E8F1FA"/>
+                      <a:srgbClr val="E3EFFA"/>
                     </a:solidFill>
                   </a:tcPr>
                 </a:tc>
               </a:tr>
-              <a:tr h="219075">
+              <a:tr h="197644">
                 <a:tc>
                   <a:txBody>
                     <a:bodyPr>
@@ -23430,12 +23807,12 @@
                     <a:p>
                       <a:pPr algn="l"/>
                       <a:r>
-                        <a:rPr sz="540">
+                        <a:rPr sz="694">
                           <a:solidFill>
-                            <a:srgbClr val="3E4C5D"/>
+                            <a:srgbClr val="34495E"/>
                           </a:solidFill>
                         </a:rPr>
-                        <a:t>单件处理时间</a:t>
+                        <a:t>后端 / 前端 / 网关</a:t>
                       </a:r>
                     </a:p>
                   </a:txBody>
@@ -23454,12 +23831,12 @@
                     <a:p>
                       <a:pPr algn="ctr"/>
                       <a:r>
-                        <a:rPr sz="540">
+                        <a:rPr sz="694">
                           <a:solidFill>
-                            <a:srgbClr val="3E4C5D"/>
+                            <a:srgbClr val="34495E"/>
                           </a:solidFill>
                         </a:rPr>
-                        <a:t>0.5～1小时</a:t>
+                        <a:t>2核4G</a:t>
                       </a:r>
                     </a:p>
                   </a:txBody>
@@ -23478,12 +23855,12 @@
                     <a:p>
                       <a:pPr algn="ctr"/>
                       <a:r>
-                        <a:rPr sz="540">
+                        <a:rPr sz="694">
                           <a:solidFill>
-                            <a:srgbClr val="3E4C5D"/>
+                            <a:srgbClr val="34495E"/>
                           </a:solidFill>
                         </a:rPr>
-                        <a:t>30秒</a:t>
+                        <a:t>3</a:t>
                       </a:r>
                     </a:p>
                   </a:txBody>
@@ -23502,12 +23879,12 @@
                     <a:p>
                       <a:pPr algn="ctr"/>
                       <a:r>
-                        <a:rPr sz="540">
+                        <a:rPr sz="694">
                           <a:solidFill>
-                            <a:srgbClr val="3E4C5D"/>
+                            <a:srgbClr val="34495E"/>
                           </a:solidFill>
                         </a:rPr>
-                        <a:t>60～120倍</a:t>
+                        <a:t>1,150元</a:t>
                       </a:r>
                     </a:p>
                   </a:txBody>
@@ -23518,7 +23895,7 @@
                   </a:tcPr>
                 </a:tc>
               </a:tr>
-              <a:tr h="219075">
+              <a:tr h="197644">
                 <a:tc>
                   <a:txBody>
                     <a:bodyPr>
@@ -23528,12 +23905,12 @@
                     <a:p>
                       <a:pPr algn="l"/>
                       <a:r>
-                        <a:rPr sz="540">
+                        <a:rPr sz="694">
                           <a:solidFill>
-                            <a:srgbClr val="3E4C5D"/>
+                            <a:srgbClr val="34495E"/>
                           </a:solidFill>
                         </a:rPr>
-                        <a:t>异常发现周期</a:t>
+                        <a:t>PostgreSQL</a:t>
                       </a:r>
                     </a:p>
                   </a:txBody>
@@ -23552,12 +23929,12 @@
                     <a:p>
                       <a:pPr algn="ctr"/>
                       <a:r>
-                        <a:rPr sz="540">
+                        <a:rPr sz="694">
                           <a:solidFill>
-                            <a:srgbClr val="3E4C5D"/>
+                            <a:srgbClr val="34495E"/>
                           </a:solidFill>
                         </a:rPr>
-                        <a:t>1～2个月</a:t>
+                        <a:t>共享主机</a:t>
                       </a:r>
                     </a:p>
                   </a:txBody>
@@ -23576,12 +23953,12 @@
                     <a:p>
                       <a:pPr algn="ctr"/>
                       <a:r>
-                        <a:rPr sz="540">
+                        <a:rPr sz="694">
                           <a:solidFill>
-                            <a:srgbClr val="3E4C5D"/>
+                            <a:srgbClr val="34495E"/>
                           </a:solidFill>
                         </a:rPr>
-                        <a:t>60秒</a:t>
+                        <a:t>1</a:t>
                       </a:r>
                     </a:p>
                   </a:txBody>
@@ -23600,12 +23977,12 @@
                     <a:p>
                       <a:pPr algn="ctr"/>
                       <a:r>
-                        <a:rPr sz="540">
+                        <a:rPr sz="694">
                           <a:solidFill>
-                            <a:srgbClr val="3E4C5D"/>
+                            <a:srgbClr val="34495E"/>
                           </a:solidFill>
                         </a:rPr>
-                        <a:t>月级→分钟级</a:t>
+                        <a:t>350元</a:t>
                       </a:r>
                     </a:p>
                   </a:txBody>
@@ -23616,7 +23993,7 @@
                   </a:tcPr>
                 </a:tc>
               </a:tr>
-              <a:tr h="219075">
+              <a:tr h="197644">
                 <a:tc>
                   <a:txBody>
                     <a:bodyPr>
@@ -23626,18 +24003,18 @@
                     <a:p>
                       <a:pPr algn="l"/>
                       <a:r>
-                        <a:rPr sz="540">
+                        <a:rPr sz="694" b="1">
                           <a:solidFill>
-                            <a:srgbClr val="3E4C5D"/>
+                            <a:srgbClr val="087A3F"/>
                           </a:solidFill>
                         </a:rPr>
-                        <a:t>日处理量</a:t>
+                        <a:t>硬件 + Token 月运营</a:t>
                       </a:r>
                     </a:p>
                   </a:txBody>
                   <a:tcPr marL="91440" marR="91440" marT="45720" marB="45720">
                     <a:solidFill>
-                      <a:srgbClr val="FFFFFF"/>
+                      <a:srgbClr val="E8F5ED"/>
                     </a:solidFill>
                   </a:tcPr>
                 </a:tc>
@@ -23650,18 +24027,18 @@
                     <a:p>
                       <a:pPr algn="ctr"/>
                       <a:r>
-                        <a:rPr sz="540">
+                        <a:rPr sz="694" b="1">
                           <a:solidFill>
-                            <a:srgbClr val="3E4C5D"/>
+                            <a:srgbClr val="087A3F"/>
                           </a:solidFill>
                         </a:rPr>
-                        <a:t>8～16件 / 日</a:t>
+                        <a:t>—</a:t>
                       </a:r>
                     </a:p>
                   </a:txBody>
                   <a:tcPr marL="91440" marR="91440" marT="45720" marB="45720">
                     <a:solidFill>
-                      <a:srgbClr val="FFFFFF"/>
+                      <a:srgbClr val="E8F5ED"/>
                     </a:solidFill>
                   </a:tcPr>
                 </a:tc>
@@ -23674,18 +24051,18 @@
                     <a:p>
                       <a:pPr algn="ctr"/>
                       <a:r>
-                        <a:rPr sz="540">
+                        <a:rPr sz="694" b="1">
                           <a:solidFill>
-                            <a:srgbClr val="3E4C5D"/>
+                            <a:srgbClr val="087A3F"/>
                           </a:solidFill>
                         </a:rPr>
-                        <a:t>1,000件 / 日</a:t>
+                        <a:t>—</a:t>
                       </a:r>
                     </a:p>
                   </a:txBody>
                   <a:tcPr marL="91440" marR="91440" marT="45720" marB="45720">
                     <a:solidFill>
-                      <a:srgbClr val="FFFFFF"/>
+                      <a:srgbClr val="E8F5ED"/>
                     </a:solidFill>
                   </a:tcPr>
                 </a:tc>
@@ -23698,507 +24075,9 @@
                     <a:p>
                       <a:pPr algn="ctr"/>
                       <a:r>
-                        <a:rPr sz="540">
+                        <a:rPr sz="694" b="1">
                           <a:solidFill>
-                            <a:srgbClr val="3E4C5D"/>
-                          </a:solidFill>
-                        </a:rPr>
-                        <a:t>6～121倍</a:t>
-                      </a:r>
-                    </a:p>
-                  </a:txBody>
-                  <a:tcPr marL="91440" marR="91440" marT="45720" marB="45720">
-                    <a:solidFill>
-                      <a:srgbClr val="FFFFFF"/>
-                    </a:solidFill>
-                  </a:tcPr>
-                </a:tc>
-              </a:tr>
-              <a:tr h="219075">
-                <a:tc>
-                  <a:txBody>
-                    <a:bodyPr>
-                      <a:normAutofit/>
-                    </a:bodyPr>
-                    <a:lstStyle/>
-                    <a:p>
-                      <a:pPr algn="l"/>
-                      <a:r>
-                        <a:rPr sz="540">
-                          <a:solidFill>
-                            <a:srgbClr val="3E4C5D"/>
-                          </a:solidFill>
-                        </a:rPr>
-                        <a:t>模型准确率</a:t>
-                      </a:r>
-                    </a:p>
-                  </a:txBody>
-                  <a:tcPr marL="91440" marR="91440" marT="45720" marB="45720">
-                    <a:solidFill>
-                      <a:srgbClr val="F7FAFD"/>
-                    </a:solidFill>
-                  </a:tcPr>
-                </a:tc>
-                <a:tc>
-                  <a:txBody>
-                    <a:bodyPr>
-                      <a:normAutofit/>
-                    </a:bodyPr>
-                    <a:lstStyle/>
-                    <a:p>
-                      <a:pPr algn="ctr"/>
-                      <a:r>
-                        <a:rPr sz="540">
-                          <a:solidFill>
-                            <a:srgbClr val="3E4C5D"/>
-                          </a:solidFill>
-                        </a:rPr>
-                        <a:t>85%</a:t>
-                      </a:r>
-                    </a:p>
-                  </a:txBody>
-                  <a:tcPr marL="91440" marR="91440" marT="45720" marB="45720">
-                    <a:solidFill>
-                      <a:srgbClr val="F7FAFD"/>
-                    </a:solidFill>
-                  </a:tcPr>
-                </a:tc>
-                <a:tc>
-                  <a:txBody>
-                    <a:bodyPr>
-                      <a:normAutofit/>
-                    </a:bodyPr>
-                    <a:lstStyle/>
-                    <a:p>
-                      <a:pPr algn="ctr"/>
-                      <a:r>
-                        <a:rPr sz="540">
-                          <a:solidFill>
-                            <a:srgbClr val="3E4C5D"/>
-                          </a:solidFill>
-                        </a:rPr>
-                        <a:t>95%</a:t>
-                      </a:r>
-                    </a:p>
-                  </a:txBody>
-                  <a:tcPr marL="91440" marR="91440" marT="45720" marB="45720">
-                    <a:solidFill>
-                      <a:srgbClr val="F7FAFD"/>
-                    </a:solidFill>
-                  </a:tcPr>
-                </a:tc>
-                <a:tc>
-                  <a:txBody>
-                    <a:bodyPr>
-                      <a:normAutofit/>
-                    </a:bodyPr>
-                    <a:lstStyle/>
-                    <a:p>
-                      <a:pPr algn="ctr"/>
-                      <a:r>
-                        <a:rPr sz="540">
-                          <a:solidFill>
-                            <a:srgbClr val="3E4C5D"/>
-                          </a:solidFill>
-                        </a:rPr>
-                        <a:t>+10个百分点</a:t>
-                      </a:r>
-                    </a:p>
-                  </a:txBody>
-                  <a:tcPr marL="91440" marR="91440" marT="45720" marB="45720">
-                    <a:solidFill>
-                      <a:srgbClr val="F7FAFD"/>
-                    </a:solidFill>
-                  </a:tcPr>
-                </a:tc>
-              </a:tr>
-              <a:tr h="219075">
-                <a:tc>
-                  <a:txBody>
-                    <a:bodyPr>
-                      <a:normAutofit/>
-                    </a:bodyPr>
-                    <a:lstStyle/>
-                    <a:p>
-                      <a:pPr algn="l"/>
-                      <a:r>
-                        <a:rPr sz="540">
-                          <a:solidFill>
-                            <a:srgbClr val="3E4C5D"/>
-                          </a:solidFill>
-                        </a:rPr>
-                        <a:t>人工成本节省</a:t>
-                      </a:r>
-                    </a:p>
-                  </a:txBody>
-                  <a:tcPr marL="91440" marR="91440" marT="45720" marB="45720">
-                    <a:solidFill>
-                      <a:srgbClr val="FFFFFF"/>
-                    </a:solidFill>
-                  </a:tcPr>
-                </a:tc>
-                <a:tc>
-                  <a:txBody>
-                    <a:bodyPr>
-                      <a:normAutofit/>
-                    </a:bodyPr>
-                    <a:lstStyle/>
-                    <a:p>
-                      <a:pPr algn="ctr"/>
-                      <a:r>
-                        <a:rPr sz="540">
-                          <a:solidFill>
-                            <a:srgbClr val="3E4C5D"/>
-                          </a:solidFill>
-                        </a:rPr>
-                        <a:t>费用核对 + 异常监测</a:t>
-                      </a:r>
-                    </a:p>
-                  </a:txBody>
-                  <a:tcPr marL="91440" marR="91440" marT="45720" marB="45720">
-                    <a:solidFill>
-                      <a:srgbClr val="FFFFFF"/>
-                    </a:solidFill>
-                  </a:tcPr>
-                </a:tc>
-                <a:tc>
-                  <a:txBody>
-                    <a:bodyPr>
-                      <a:normAutofit/>
-                    </a:bodyPr>
-                    <a:lstStyle/>
-                    <a:p>
-                      <a:pPr algn="ctr"/>
-                      <a:r>
-                        <a:rPr sz="540">
-                          <a:solidFill>
-                            <a:srgbClr val="3E4C5D"/>
-                          </a:solidFill>
-                        </a:rPr>
-                        <a:t>仅保留复核</a:t>
-                      </a:r>
-                    </a:p>
-                  </a:txBody>
-                  <a:tcPr marL="91440" marR="91440" marT="45720" marB="45720">
-                    <a:solidFill>
-                      <a:srgbClr val="FFFFFF"/>
-                    </a:solidFill>
-                  </a:tcPr>
-                </a:tc>
-                <a:tc>
-                  <a:txBody>
-                    <a:bodyPr>
-                      <a:normAutofit/>
-                    </a:bodyPr>
-                    <a:lstStyle/>
-                    <a:p>
-                      <a:pPr algn="ctr"/>
-                      <a:r>
-                        <a:rPr sz="540">
-                          <a:solidFill>
-                            <a:srgbClr val="3E4C5D"/>
-                          </a:solidFill>
-                        </a:rPr>
-                        <a:t>18,000元 / 月</a:t>
-                      </a:r>
-                    </a:p>
-                  </a:txBody>
-                  <a:tcPr marL="91440" marR="91440" marT="45720" marB="45720">
-                    <a:solidFill>
-                      <a:srgbClr val="FFFFFF"/>
-                    </a:solidFill>
-                  </a:tcPr>
-                </a:tc>
-              </a:tr>
-            </a:tbl>
-          </a:graphicData>
-        </a:graphic>
-      </p:graphicFrame>
-      <p:sp>
-        <p:nvSpPr>
-          <p:cNvPr id="51" name="">
-            <a:extLst xmlns:a="http://schemas.openxmlformats.org/drawingml/2006/main">
-              <a:ext uri="{FF2B5EF4-FFF2-40B4-BE49-F238E27FC236}">
-                <a16:creationId xmlns:a16="http://schemas.microsoft.com/office/drawing/2014/main" id="{9D9CBDCC-CB9E-4F12-A5F4-6844AB1BD01F}"/>
-              </a:ext>
-            </a:extLst>
-          </p:cNvPr>
-          <p:cNvSpPr>
-            <a:spLocks xmlns:a="http://schemas.openxmlformats.org/drawingml/2006/main" noGrp="1"/>
-          </p:cNvSpPr>
-          <p:nvPr/>
-        </p:nvSpPr>
-        <p:spPr>
-          <a:xfrm xmlns:a="http://schemas.openxmlformats.org/drawingml/2006/main">
-            <a:off x="6210300" y="3752850"/>
-            <a:ext cx="47625" cy="161925"/>
-          </a:xfrm>
-          <a:prstGeom xmlns:a="http://schemas.openxmlformats.org/drawingml/2006/main" prst="rect">
-            <a:avLst/>
-          </a:prstGeom>
-          <a:solidFill xmlns:a="http://schemas.openxmlformats.org/drawingml/2006/main">
-            <a:srgbClr val="E79A25"/>
-          </a:solidFill>
-          <a:ln xmlns:a="http://schemas.openxmlformats.org/drawingml/2006/main" w="0">
-            <a:noFill/>
-          </a:ln>
-        </p:spPr>
-      </p:sp>
-      <p:sp>
-        <p:nvSpPr>
-          <p:cNvPr id="52" name="">
-            <a:extLst xmlns:a="http://schemas.openxmlformats.org/drawingml/2006/main">
-              <a:ext uri="{FF2B5EF4-FFF2-40B4-BE49-F238E27FC236}">
-                <a16:creationId xmlns:a16="http://schemas.microsoft.com/office/drawing/2014/main" id="{26D85610-79B5-4439-BE29-D14B18DB3637}"/>
-              </a:ext>
-            </a:extLst>
-          </p:cNvPr>
-          <p:cNvSpPr>
-            <a:spLocks xmlns:a="http://schemas.openxmlformats.org/drawingml/2006/main" noGrp="1"/>
-          </p:cNvSpPr>
-          <p:nvPr/>
-        </p:nvSpPr>
-        <p:spPr>
-          <a:xfrm xmlns:a="http://schemas.openxmlformats.org/drawingml/2006/main">
-            <a:off x="6334125" y="3733800"/>
-            <a:ext cx="5095875" cy="209550"/>
-          </a:xfrm>
-          <a:prstGeom xmlns:a="http://schemas.openxmlformats.org/drawingml/2006/main" prst="rect">
-            <a:avLst/>
-          </a:prstGeom>
-          <a:noFill xmlns:a="http://schemas.openxmlformats.org/drawingml/2006/main"/>
-          <a:ln xmlns:a="http://schemas.openxmlformats.org/drawingml/2006/main" w="0">
-            <a:noFill/>
-          </a:ln>
-        </p:spPr>
-        <p:txBody>
-          <a:bodyPr xmlns:a="http://schemas.openxmlformats.org/drawingml/2006/main">
-            <a:normAutofit fontScale="43056"/>
-          </a:bodyPr>
-          <a:lstStyle xmlns:a="http://schemas.openxmlformats.org/drawingml/2006/main"/>
-          <a:p xmlns:a="http://schemas.openxmlformats.org/drawingml/2006/main">
-            <a:pPr>
-              <a:defRPr b="1">
-                <a:solidFill>
-                  <a:srgbClr val="173B6B"/>
-                </a:solidFill>
-              </a:defRPr>
-            </a:pPr>
-            <a:r>
-              <a:rPr b="1">
-                <a:solidFill>
-                  <a:srgbClr val="173B6B"/>
-                </a:solidFill>
-              </a:rPr>
-              <a:t>3. ROI 计算（按月）</a:t>
-            </a:r>
-          </a:p>
-        </p:txBody>
-      </p:sp>
-      <p:graphicFrame>
-        <p:nvGraphicFramePr>
-          <p:cNvPr id="98" name=""/>
-          <p:cNvGraphicFramePr/>
-          <p:nvPr/>
-        </p:nvGraphicFramePr>
-        <p:xfrm>
-          <a:off xmlns:a="http://schemas.openxmlformats.org/drawingml/2006/main" x="6210300" y="3981450"/>
-          <a:ext xmlns:a="http://schemas.openxmlformats.org/drawingml/2006/main" cx="5410200" cy="1076325"/>
-        </p:xfrm>
-        <a:graphic xmlns:a="http://schemas.openxmlformats.org/drawingml/2006/main">
-          <a:graphicData uri="http://schemas.openxmlformats.org/drawingml/2006/table">
-            <a:tbl>
-              <a:tblPr firstRow="1" bandRow="1"/>
-              <a:tblGrid>
-                <a:gridCol w="1828800"/>
-                <a:gridCol w="1428750"/>
-                <a:gridCol w="2152650"/>
-              </a:tblGrid>
-              <a:tr h="179388">
-                <a:tc>
-                  <a:txBody>
-                    <a:bodyPr>
-                      <a:normAutofit/>
-                    </a:bodyPr>
-                    <a:lstStyle/>
-                    <a:p>
-                      <a:pPr algn="ctr"/>
-                      <a:r>
-                        <a:rPr sz="615" b="1">
-                          <a:solidFill>
-                            <a:srgbClr val="173B6B"/>
-                          </a:solidFill>
-                        </a:rPr>
-                        <a:t>项目</a:t>
-                      </a:r>
-                    </a:p>
-                  </a:txBody>
-                  <a:tcPr marL="91440" marR="91440" marT="45720" marB="45720">
-                    <a:solidFill>
-                      <a:srgbClr val="E8F1FA"/>
-                    </a:solidFill>
-                  </a:tcPr>
-                </a:tc>
-                <a:tc>
-                  <a:txBody>
-                    <a:bodyPr>
-                      <a:normAutofit/>
-                    </a:bodyPr>
-                    <a:lstStyle/>
-                    <a:p>
-                      <a:pPr algn="ctr"/>
-                      <a:r>
-                        <a:rPr sz="615" b="1">
-                          <a:solidFill>
-                            <a:srgbClr val="173B6B"/>
-                          </a:solidFill>
-                        </a:rPr>
-                        <a:t>金额</a:t>
-                      </a:r>
-                    </a:p>
-                  </a:txBody>
-                  <a:tcPr marL="91440" marR="91440" marT="45720" marB="45720">
-                    <a:solidFill>
-                      <a:srgbClr val="E8F1FA"/>
-                    </a:solidFill>
-                  </a:tcPr>
-                </a:tc>
-                <a:tc>
-                  <a:txBody>
-                    <a:bodyPr>
-                      <a:normAutofit/>
-                    </a:bodyPr>
-                    <a:lstStyle/>
-                    <a:p>
-                      <a:pPr algn="ctr"/>
-                      <a:r>
-                        <a:rPr sz="615" b="1">
-                          <a:solidFill>
-                            <a:srgbClr val="173B6B"/>
-                          </a:solidFill>
-                        </a:rPr>
-                        <a:t>计算依据</a:t>
-                      </a:r>
-                    </a:p>
-                  </a:txBody>
-                  <a:tcPr marL="91440" marR="91440" marT="45720" marB="45720">
-                    <a:solidFill>
-                      <a:srgbClr val="E8F1FA"/>
-                    </a:solidFill>
-                  </a:tcPr>
-                </a:tc>
-              </a:tr>
-              <a:tr h="179388">
-                <a:tc>
-                  <a:txBody>
-                    <a:bodyPr>
-                      <a:normAutofit/>
-                    </a:bodyPr>
-                    <a:lstStyle/>
-                    <a:p>
-                      <a:pPr algn="l"/>
-                      <a:r>
-                        <a:rPr sz="540">
-                          <a:solidFill>
-                            <a:srgbClr val="3E4C5D"/>
-                          </a:solidFill>
-                        </a:rPr>
-                        <a:t>一次性投入</a:t>
-                      </a:r>
-                    </a:p>
-                  </a:txBody>
-                  <a:tcPr marL="91440" marR="91440" marT="45720" marB="45720">
-                    <a:solidFill>
-                      <a:srgbClr val="FFFFFF"/>
-                    </a:solidFill>
-                  </a:tcPr>
-                </a:tc>
-                <a:tc>
-                  <a:txBody>
-                    <a:bodyPr>
-                      <a:normAutofit/>
-                    </a:bodyPr>
-                    <a:lstStyle/>
-                    <a:p>
-                      <a:pPr algn="ctr"/>
-                      <a:r>
-                        <a:rPr sz="540">
-                          <a:solidFill>
-                            <a:srgbClr val="3E4C5D"/>
-                          </a:solidFill>
-                        </a:rPr>
-                        <a:t>3,600元</a:t>
-                      </a:r>
-                    </a:p>
-                  </a:txBody>
-                  <a:tcPr marL="91440" marR="91440" marT="45720" marB="45720">
-                    <a:solidFill>
-                      <a:srgbClr val="FFFFFF"/>
-                    </a:solidFill>
-                  </a:tcPr>
-                </a:tc>
-                <a:tc>
-                  <a:txBody>
-                    <a:bodyPr>
-                      <a:normAutofit/>
-                    </a:bodyPr>
-                    <a:lstStyle/>
-                    <a:p>
-                      <a:pPr algn="ctr"/>
-                      <a:r>
-                        <a:rPr sz="540">
-                          <a:solidFill>
-                            <a:srgbClr val="3E4C5D"/>
-                          </a:solidFill>
-                        </a:rPr>
-                        <a:t>开发人力成本</a:t>
-                      </a:r>
-                    </a:p>
-                  </a:txBody>
-                  <a:tcPr marL="91440" marR="91440" marT="45720" marB="45720">
-                    <a:solidFill>
-                      <a:srgbClr val="FFFFFF"/>
-                    </a:solidFill>
-                  </a:tcPr>
-                </a:tc>
-              </a:tr>
-              <a:tr h="179388">
-                <a:tc>
-                  <a:txBody>
-                    <a:bodyPr>
-                      <a:normAutofit/>
-                    </a:bodyPr>
-                    <a:lstStyle/>
-                    <a:p>
-                      <a:pPr algn="l"/>
-                      <a:r>
-                        <a:rPr sz="540">
-                          <a:solidFill>
-                            <a:srgbClr val="3E4C5D"/>
-                          </a:solidFill>
-                        </a:rPr>
-                        <a:t>月度运营成本</a:t>
-                      </a:r>
-                    </a:p>
-                  </a:txBody>
-                  <a:tcPr marL="91440" marR="91440" marT="45720" marB="45720">
-                    <a:solidFill>
-                      <a:srgbClr val="F7FAFD"/>
-                    </a:solidFill>
-                  </a:tcPr>
-                </a:tc>
-                <a:tc>
-                  <a:txBody>
-                    <a:bodyPr>
-                      <a:normAutofit/>
-                    </a:bodyPr>
-                    <a:lstStyle/>
-                    <a:p>
-                      <a:pPr algn="ctr"/>
-                      <a:r>
-                        <a:rPr sz="540">
-                          <a:solidFill>
-                            <a:srgbClr val="3E4C5D"/>
+                            <a:srgbClr val="087A3F"/>
                           </a:solidFill>
                         </a:rPr>
                         <a:t>3,200元</a:t>
@@ -24207,652 +24086,7 @@
                   </a:txBody>
                   <a:tcPr marL="91440" marR="91440" marT="45720" marB="45720">
                     <a:solidFill>
-                      <a:srgbClr val="F7FAFD"/>
-                    </a:solidFill>
-                  </a:tcPr>
-                </a:tc>
-                <a:tc>
-                  <a:txBody>
-                    <a:bodyPr>
-                      <a:normAutofit/>
-                    </a:bodyPr>
-                    <a:lstStyle/>
-                    <a:p>
-                      <a:pPr algn="ctr"/>
-                      <a:r>
-                        <a:rPr sz="540">
-                          <a:solidFill>
-                            <a:srgbClr val="3E4C5D"/>
-                          </a:solidFill>
-                        </a:rPr>
-                        <a:t>1,500元硬件 + 1,700元Token</a:t>
-                      </a:r>
-                    </a:p>
-                  </a:txBody>
-                  <a:tcPr marL="91440" marR="91440" marT="45720" marB="45720">
-                    <a:solidFill>
-                      <a:srgbClr val="F7FAFD"/>
-                    </a:solidFill>
-                  </a:tcPr>
-                </a:tc>
-              </a:tr>
-              <a:tr h="179388">
-                <a:tc>
-                  <a:txBody>
-                    <a:bodyPr>
-                      <a:normAutofit/>
-                    </a:bodyPr>
-                    <a:lstStyle/>
-                    <a:p>
-                      <a:pPr algn="l"/>
-                      <a:r>
-                        <a:rPr sz="540">
-                          <a:solidFill>
-                            <a:srgbClr val="3E4C5D"/>
-                          </a:solidFill>
-                        </a:rPr>
-                        <a:t>月度收益</a:t>
-                      </a:r>
-                    </a:p>
-                  </a:txBody>
-                  <a:tcPr marL="91440" marR="91440" marT="45720" marB="45720">
-                    <a:solidFill>
-                      <a:srgbClr val="FFFFFF"/>
-                    </a:solidFill>
-                  </a:tcPr>
-                </a:tc>
-                <a:tc>
-                  <a:txBody>
-                    <a:bodyPr>
-                      <a:normAutofit/>
-                    </a:bodyPr>
-                    <a:lstStyle/>
-                    <a:p>
-                      <a:pPr algn="ctr"/>
-                      <a:r>
-                        <a:rPr sz="540">
-                          <a:solidFill>
-                            <a:srgbClr val="3E4C5D"/>
-                          </a:solidFill>
-                        </a:rPr>
-                        <a:t>21,000元</a:t>
-                      </a:r>
-                    </a:p>
-                  </a:txBody>
-                  <a:tcPr marL="91440" marR="91440" marT="45720" marB="45720">
-                    <a:solidFill>
-                      <a:srgbClr val="FFFFFF"/>
-                    </a:solidFill>
-                  </a:tcPr>
-                </a:tc>
-                <a:tc>
-                  <a:txBody>
-                    <a:bodyPr>
-                      <a:normAutofit/>
-                    </a:bodyPr>
-                    <a:lstStyle/>
-                    <a:p>
-                      <a:pPr algn="ctr"/>
-                      <a:r>
-                        <a:rPr sz="540">
-                          <a:solidFill>
-                            <a:srgbClr val="3E4C5D"/>
-                          </a:solidFill>
-                        </a:rPr>
-                        <a:t>18,000元人力 + 3,000元质量收益</a:t>
-                      </a:r>
-                    </a:p>
-                  </a:txBody>
-                  <a:tcPr marL="91440" marR="91440" marT="45720" marB="45720">
-                    <a:solidFill>
-                      <a:srgbClr val="FFFFFF"/>
-                    </a:solidFill>
-                  </a:tcPr>
-                </a:tc>
-              </a:tr>
-              <a:tr h="179388">
-                <a:tc>
-                  <a:txBody>
-                    <a:bodyPr>
-                      <a:normAutofit/>
-                    </a:bodyPr>
-                    <a:lstStyle/>
-                    <a:p>
-                      <a:pPr algn="l"/>
-                      <a:r>
-                        <a:rPr sz="540">
-                          <a:solidFill>
-                            <a:srgbClr val="3E4C5D"/>
-                          </a:solidFill>
-                        </a:rPr>
-                        <a:t>月度净收益</a:t>
-                      </a:r>
-                    </a:p>
-                  </a:txBody>
-                  <a:tcPr marL="91440" marR="91440" marT="45720" marB="45720">
-                    <a:solidFill>
-                      <a:srgbClr val="F7FAFD"/>
-                    </a:solidFill>
-                  </a:tcPr>
-                </a:tc>
-                <a:tc>
-                  <a:txBody>
-                    <a:bodyPr>
-                      <a:normAutofit/>
-                    </a:bodyPr>
-                    <a:lstStyle/>
-                    <a:p>
-                      <a:pPr algn="ctr"/>
-                      <a:r>
-                        <a:rPr sz="540">
-                          <a:solidFill>
-                            <a:srgbClr val="3E4C5D"/>
-                          </a:solidFill>
-                        </a:rPr>
-                        <a:t>17,800元</a:t>
-                      </a:r>
-                    </a:p>
-                  </a:txBody>
-                  <a:tcPr marL="91440" marR="91440" marT="45720" marB="45720">
-                    <a:solidFill>
-                      <a:srgbClr val="F7FAFD"/>
-                    </a:solidFill>
-                  </a:tcPr>
-                </a:tc>
-                <a:tc>
-                  <a:txBody>
-                    <a:bodyPr>
-                      <a:normAutofit/>
-                    </a:bodyPr>
-                    <a:lstStyle/>
-                    <a:p>
-                      <a:pPr algn="ctr"/>
-                      <a:r>
-                        <a:rPr sz="540">
-                          <a:solidFill>
-                            <a:srgbClr val="3E4C5D"/>
-                          </a:solidFill>
-                        </a:rPr>
-                        <a:t>收益 − 运营成本</a:t>
-                      </a:r>
-                    </a:p>
-                  </a:txBody>
-                  <a:tcPr marL="91440" marR="91440" marT="45720" marB="45720">
-                    <a:solidFill>
-                      <a:srgbClr val="F7FAFD"/>
-                    </a:solidFill>
-                  </a:tcPr>
-                </a:tc>
-              </a:tr>
-              <a:tr h="179388">
-                <a:tc>
-                  <a:txBody>
-                    <a:bodyPr>
-                      <a:normAutofit/>
-                    </a:bodyPr>
-                    <a:lstStyle/>
-                    <a:p>
-                      <a:pPr algn="l"/>
-                      <a:r>
-                        <a:rPr sz="540" b="1">
-                          <a:solidFill>
-                            <a:srgbClr val="187A43"/>
-                          </a:solidFill>
-                        </a:rPr>
-                        <a:t>运营 ROI</a:t>
-                      </a:r>
-                    </a:p>
-                  </a:txBody>
-                  <a:tcPr marL="91440" marR="91440" marT="45720" marB="45720">
-                    <a:solidFill>
-                      <a:srgbClr val="EAF6EF"/>
-                    </a:solidFill>
-                  </a:tcPr>
-                </a:tc>
-                <a:tc>
-                  <a:txBody>
-                    <a:bodyPr>
-                      <a:normAutofit/>
-                    </a:bodyPr>
-                    <a:lstStyle/>
-                    <a:p>
-                      <a:pPr algn="ctr"/>
-                      <a:r>
-                        <a:rPr sz="540" b="1">
-                          <a:solidFill>
-                            <a:srgbClr val="187A43"/>
-                          </a:solidFill>
-                        </a:rPr>
-                        <a:t>556%</a:t>
-                      </a:r>
-                    </a:p>
-                  </a:txBody>
-                  <a:tcPr marL="91440" marR="91440" marT="45720" marB="45720">
-                    <a:solidFill>
-                      <a:srgbClr val="EAF6EF"/>
-                    </a:solidFill>
-                  </a:tcPr>
-                </a:tc>
-                <a:tc>
-                  <a:txBody>
-                    <a:bodyPr>
-                      <a:normAutofit/>
-                    </a:bodyPr>
-                    <a:lstStyle/>
-                    <a:p>
-                      <a:pPr algn="ctr"/>
-                      <a:r>
-                        <a:rPr sz="540" b="1">
-                          <a:solidFill>
-                            <a:srgbClr val="187A43"/>
-                          </a:solidFill>
-                        </a:rPr>
-                        <a:t>月度净收益 ÷ 运营成本</a:t>
-                      </a:r>
-                    </a:p>
-                  </a:txBody>
-                  <a:tcPr marL="91440" marR="91440" marT="45720" marB="45720">
-                    <a:solidFill>
-                      <a:srgbClr val="EAF6EF"/>
-                    </a:solidFill>
-                  </a:tcPr>
-                </a:tc>
-              </a:tr>
-            </a:tbl>
-          </a:graphicData>
-        </a:graphic>
-      </p:graphicFrame>
-      <p:sp>
-        <p:nvSpPr>
-          <p:cNvPr id="54" name="">
-            <a:extLst xmlns:a="http://schemas.openxmlformats.org/drawingml/2006/main">
-              <a:ext uri="{FF2B5EF4-FFF2-40B4-BE49-F238E27FC236}">
-                <a16:creationId xmlns:a16="http://schemas.microsoft.com/office/drawing/2014/main" id="{61A52A9B-4D16-4C83-B455-D971C1C8B6E2}"/>
-              </a:ext>
-            </a:extLst>
-          </p:cNvPr>
-          <p:cNvSpPr>
-            <a:spLocks xmlns:a="http://schemas.openxmlformats.org/drawingml/2006/main" noGrp="1"/>
-          </p:cNvSpPr>
-          <p:nvPr/>
-        </p:nvSpPr>
-        <p:spPr>
-          <a:xfrm xmlns:a="http://schemas.openxmlformats.org/drawingml/2006/main">
-            <a:off x="6210300" y="5200650"/>
-            <a:ext cx="47625" cy="161925"/>
-          </a:xfrm>
-          <a:prstGeom xmlns:a="http://schemas.openxmlformats.org/drawingml/2006/main" prst="rect">
-            <a:avLst/>
-          </a:prstGeom>
-          <a:solidFill xmlns:a="http://schemas.openxmlformats.org/drawingml/2006/main">
-            <a:srgbClr val="E79A25"/>
-          </a:solidFill>
-          <a:ln xmlns:a="http://schemas.openxmlformats.org/drawingml/2006/main" w="0">
-            <a:noFill/>
-          </a:ln>
-        </p:spPr>
-      </p:sp>
-      <p:sp>
-        <p:nvSpPr>
-          <p:cNvPr id="55" name="">
-            <a:extLst xmlns:a="http://schemas.openxmlformats.org/drawingml/2006/main">
-              <a:ext uri="{FF2B5EF4-FFF2-40B4-BE49-F238E27FC236}">
-                <a16:creationId xmlns:a16="http://schemas.microsoft.com/office/drawing/2014/main" id="{8650CA83-B215-4452-8498-0E15C2C0BAB8}"/>
-              </a:ext>
-            </a:extLst>
-          </p:cNvPr>
-          <p:cNvSpPr>
-            <a:spLocks xmlns:a="http://schemas.openxmlformats.org/drawingml/2006/main" noGrp="1"/>
-          </p:cNvSpPr>
-          <p:nvPr/>
-        </p:nvSpPr>
-        <p:spPr>
-          <a:xfrm xmlns:a="http://schemas.openxmlformats.org/drawingml/2006/main">
-            <a:off x="6334125" y="5181600"/>
-            <a:ext cx="5095875" cy="209550"/>
-          </a:xfrm>
-          <a:prstGeom xmlns:a="http://schemas.openxmlformats.org/drawingml/2006/main" prst="rect">
-            <a:avLst/>
-          </a:prstGeom>
-          <a:noFill xmlns:a="http://schemas.openxmlformats.org/drawingml/2006/main"/>
-          <a:ln xmlns:a="http://schemas.openxmlformats.org/drawingml/2006/main" w="0">
-            <a:noFill/>
-          </a:ln>
-        </p:spPr>
-        <p:txBody>
-          <a:bodyPr xmlns:a="http://schemas.openxmlformats.org/drawingml/2006/main">
-            <a:normAutofit fontScale="43056"/>
-          </a:bodyPr>
-          <a:lstStyle xmlns:a="http://schemas.openxmlformats.org/drawingml/2006/main"/>
-          <a:p xmlns:a="http://schemas.openxmlformats.org/drawingml/2006/main">
-            <a:pPr>
-              <a:defRPr b="1">
-                <a:solidFill>
-                  <a:srgbClr val="173B6B"/>
-                </a:solidFill>
-              </a:defRPr>
-            </a:pPr>
-            <a:r>
-              <a:rPr b="1">
-                <a:solidFill>
-                  <a:srgbClr val="173B6B"/>
-                </a:solidFill>
-              </a:rPr>
-              <a:t>3.2. 年度收益预测</a:t>
-            </a:r>
-          </a:p>
-        </p:txBody>
-      </p:sp>
-      <p:graphicFrame>
-        <p:nvGraphicFramePr>
-          <p:cNvPr id="101" name=""/>
-          <p:cNvGraphicFramePr/>
-          <p:nvPr/>
-        </p:nvGraphicFramePr>
-        <p:xfrm>
-          <a:off xmlns:a="http://schemas.openxmlformats.org/drawingml/2006/main" x="6210300" y="5429250"/>
-          <a:ext xmlns:a="http://schemas.openxmlformats.org/drawingml/2006/main" cx="5410200" cy="590550"/>
-        </p:xfrm>
-        <a:graphic xmlns:a="http://schemas.openxmlformats.org/drawingml/2006/main">
-          <a:graphicData uri="http://schemas.openxmlformats.org/drawingml/2006/table">
-            <a:tbl>
-              <a:tblPr firstRow="1" bandRow="1"/>
-              <a:tblGrid>
-                <a:gridCol w="1028700"/>
-                <a:gridCol w="1333500"/>
-                <a:gridCol w="1524000"/>
-                <a:gridCol w="1524000"/>
-              </a:tblGrid>
-              <a:tr h="196850">
-                <a:tc>
-                  <a:txBody>
-                    <a:bodyPr>
-                      <a:normAutofit/>
-                    </a:bodyPr>
-                    <a:lstStyle/>
-                    <a:p>
-                      <a:pPr algn="ctr"/>
-                      <a:r>
-                        <a:rPr sz="615" b="1">
-                          <a:solidFill>
-                            <a:srgbClr val="173B6B"/>
-                          </a:solidFill>
-                        </a:rPr>
-                        <a:t>年度</a:t>
-                      </a:r>
-                    </a:p>
-                  </a:txBody>
-                  <a:tcPr marL="91440" marR="91440" marT="45720" marB="45720">
-                    <a:solidFill>
-                      <a:srgbClr val="E8F1FA"/>
-                    </a:solidFill>
-                  </a:tcPr>
-                </a:tc>
-                <a:tc>
-                  <a:txBody>
-                    <a:bodyPr>
-                      <a:normAutofit/>
-                    </a:bodyPr>
-                    <a:lstStyle/>
-                    <a:p>
-                      <a:pPr algn="ctr"/>
-                      <a:r>
-                        <a:rPr sz="615" b="1">
-                          <a:solidFill>
-                            <a:srgbClr val="173B6B"/>
-                          </a:solidFill>
-                        </a:rPr>
-                        <a:t>累计投入</a:t>
-                      </a:r>
-                    </a:p>
-                  </a:txBody>
-                  <a:tcPr marL="91440" marR="91440" marT="45720" marB="45720">
-                    <a:solidFill>
-                      <a:srgbClr val="E8F1FA"/>
-                    </a:solidFill>
-                  </a:tcPr>
-                </a:tc>
-                <a:tc>
-                  <a:txBody>
-                    <a:bodyPr>
-                      <a:normAutofit/>
-                    </a:bodyPr>
-                    <a:lstStyle/>
-                    <a:p>
-                      <a:pPr algn="ctr"/>
-                      <a:r>
-                        <a:rPr sz="615" b="1">
-                          <a:solidFill>
-                            <a:srgbClr val="173B6B"/>
-                          </a:solidFill>
-                        </a:rPr>
-                        <a:t>累计收益</a:t>
-                      </a:r>
-                    </a:p>
-                  </a:txBody>
-                  <a:tcPr marL="91440" marR="91440" marT="45720" marB="45720">
-                    <a:solidFill>
-                      <a:srgbClr val="E8F1FA"/>
-                    </a:solidFill>
-                  </a:tcPr>
-                </a:tc>
-                <a:tc>
-                  <a:txBody>
-                    <a:bodyPr>
-                      <a:normAutofit/>
-                    </a:bodyPr>
-                    <a:lstStyle/>
-                    <a:p>
-                      <a:pPr algn="ctr"/>
-                      <a:r>
-                        <a:rPr sz="615" b="1">
-                          <a:solidFill>
-                            <a:srgbClr val="173B6B"/>
-                          </a:solidFill>
-                        </a:rPr>
-                        <a:t>累计净收益</a:t>
-                      </a:r>
-                    </a:p>
-                  </a:txBody>
-                  <a:tcPr marL="91440" marR="91440" marT="45720" marB="45720">
-                    <a:solidFill>
-                      <a:srgbClr val="E8F1FA"/>
-                    </a:solidFill>
-                  </a:tcPr>
-                </a:tc>
-              </a:tr>
-              <a:tr h="196850">
-                <a:tc>
-                  <a:txBody>
-                    <a:bodyPr>
-                      <a:normAutofit/>
-                    </a:bodyPr>
-                    <a:lstStyle/>
-                    <a:p>
-                      <a:pPr algn="l"/>
-                      <a:r>
-                        <a:rPr sz="540">
-                          <a:solidFill>
-                            <a:srgbClr val="3E4C5D"/>
-                          </a:solidFill>
-                        </a:rPr>
-                        <a:t>第1年</a:t>
-                      </a:r>
-                    </a:p>
-                  </a:txBody>
-                  <a:tcPr marL="91440" marR="91440" marT="45720" marB="45720">
-                    <a:solidFill>
-                      <a:srgbClr val="FFFFFF"/>
-                    </a:solidFill>
-                  </a:tcPr>
-                </a:tc>
-                <a:tc>
-                  <a:txBody>
-                    <a:bodyPr>
-                      <a:normAutofit/>
-                    </a:bodyPr>
-                    <a:lstStyle/>
-                    <a:p>
-                      <a:pPr algn="ctr"/>
-                      <a:r>
-                        <a:rPr sz="540">
-                          <a:solidFill>
-                            <a:srgbClr val="3E4C5D"/>
-                          </a:solidFill>
-                        </a:rPr>
-                        <a:t>42,000元</a:t>
-                      </a:r>
-                    </a:p>
-                  </a:txBody>
-                  <a:tcPr marL="91440" marR="91440" marT="45720" marB="45720">
-                    <a:solidFill>
-                      <a:srgbClr val="FFFFFF"/>
-                    </a:solidFill>
-                  </a:tcPr>
-                </a:tc>
-                <a:tc>
-                  <a:txBody>
-                    <a:bodyPr>
-                      <a:normAutofit/>
-                    </a:bodyPr>
-                    <a:lstStyle/>
-                    <a:p>
-                      <a:pPr algn="ctr"/>
-                      <a:r>
-                        <a:rPr sz="540">
-                          <a:solidFill>
-                            <a:srgbClr val="3E4C5D"/>
-                          </a:solidFill>
-                        </a:rPr>
-                        <a:t>252,000元</a:t>
-                      </a:r>
-                    </a:p>
-                  </a:txBody>
-                  <a:tcPr marL="91440" marR="91440" marT="45720" marB="45720">
-                    <a:solidFill>
-                      <a:srgbClr val="FFFFFF"/>
-                    </a:solidFill>
-                  </a:tcPr>
-                </a:tc>
-                <a:tc>
-                  <a:txBody>
-                    <a:bodyPr>
-                      <a:normAutofit/>
-                    </a:bodyPr>
-                    <a:lstStyle/>
-                    <a:p>
-                      <a:pPr algn="ctr"/>
-                      <a:r>
-                        <a:rPr sz="540">
-                          <a:solidFill>
-                            <a:srgbClr val="3E4C5D"/>
-                          </a:solidFill>
-                        </a:rPr>
-                        <a:t>210,000元</a:t>
-                      </a:r>
-                    </a:p>
-                  </a:txBody>
-                  <a:tcPr marL="91440" marR="91440" marT="45720" marB="45720">
-                    <a:solidFill>
-                      <a:srgbClr val="FFFFFF"/>
-                    </a:solidFill>
-                  </a:tcPr>
-                </a:tc>
-              </a:tr>
-              <a:tr h="196850">
-                <a:tc>
-                  <a:txBody>
-                    <a:bodyPr>
-                      <a:normAutofit/>
-                    </a:bodyPr>
-                    <a:lstStyle/>
-                    <a:p>
-                      <a:pPr algn="l"/>
-                      <a:r>
-                        <a:rPr sz="540">
-                          <a:solidFill>
-                            <a:srgbClr val="3E4C5D"/>
-                          </a:solidFill>
-                        </a:rPr>
-                        <a:t>第2年</a:t>
-                      </a:r>
-                    </a:p>
-                  </a:txBody>
-                  <a:tcPr marL="91440" marR="91440" marT="45720" marB="45720">
-                    <a:solidFill>
-                      <a:srgbClr val="F7FAFD"/>
-                    </a:solidFill>
-                  </a:tcPr>
-                </a:tc>
-                <a:tc>
-                  <a:txBody>
-                    <a:bodyPr>
-                      <a:normAutofit/>
-                    </a:bodyPr>
-                    <a:lstStyle/>
-                    <a:p>
-                      <a:pPr algn="ctr"/>
-                      <a:r>
-                        <a:rPr sz="540">
-                          <a:solidFill>
-                            <a:srgbClr val="3E4C5D"/>
-                          </a:solidFill>
-                        </a:rPr>
-                        <a:t>38,400元</a:t>
-                      </a:r>
-                    </a:p>
-                  </a:txBody>
-                  <a:tcPr marL="91440" marR="91440" marT="45720" marB="45720">
-                    <a:solidFill>
-                      <a:srgbClr val="F7FAFD"/>
-                    </a:solidFill>
-                  </a:tcPr>
-                </a:tc>
-                <a:tc>
-                  <a:txBody>
-                    <a:bodyPr>
-                      <a:normAutofit/>
-                    </a:bodyPr>
-                    <a:lstStyle/>
-                    <a:p>
-                      <a:pPr algn="ctr"/>
-                      <a:r>
-                        <a:rPr sz="540">
-                          <a:solidFill>
-                            <a:srgbClr val="3E4C5D"/>
-                          </a:solidFill>
-                        </a:rPr>
-                        <a:t>252,000元</a:t>
-                      </a:r>
-                    </a:p>
-                  </a:txBody>
-                  <a:tcPr marL="91440" marR="91440" marT="45720" marB="45720">
-                    <a:solidFill>
-                      <a:srgbClr val="F7FAFD"/>
-                    </a:solidFill>
-                  </a:tcPr>
-                </a:tc>
-                <a:tc>
-                  <a:txBody>
-                    <a:bodyPr>
-                      <a:normAutofit/>
-                    </a:bodyPr>
-                    <a:lstStyle/>
-                    <a:p>
-                      <a:pPr algn="ctr"/>
-                      <a:r>
-                        <a:rPr sz="540">
-                          <a:solidFill>
-                            <a:srgbClr val="3E4C5D"/>
-                          </a:solidFill>
-                        </a:rPr>
-                        <a:t>213,600元</a:t>
-                      </a:r>
-                    </a:p>
-                  </a:txBody>
-                  <a:tcPr marL="91440" marR="91440" marT="45720" marB="45720">
-                    <a:solidFill>
-                      <a:srgbClr val="F7FAFD"/>
+                      <a:srgbClr val="E8F5ED"/>
                     </a:solidFill>
                   </a:tcPr>
                 </a:tc>
@@ -24877,6 +24111,2786 @@
     <p:bg>
       <p:bgPr>
         <a:solidFill xmlns:a="http://schemas.openxmlformats.org/drawingml/2006/main">
+          <a:srgbClr val="FFFFFF"/>
+        </a:solidFill>
+      </p:bgPr>
+    </p:bg>
+    <p:spTree>
+      <p:nvGrpSpPr>
+        <p:cNvPr id="1" name=""/>
+        <p:cNvGrpSpPr/>
+        <p:nvPr/>
+      </p:nvGrpSpPr>
+      <p:grpSpPr>
+        <a:xfrm xmlns:a="http://schemas.openxmlformats.org/drawingml/2006/main"/>
+      </p:grpSpPr>
+      <p:sp>
+        <p:nvSpPr>
+          <p:cNvPr id="2" name="Shape 0">
+            <a:extLst xmlns:a="http://schemas.openxmlformats.org/drawingml/2006/main">
+              <a:ext uri="{FF2B5EF4-FFF2-40B4-BE49-F238E27FC236}">
+                <a16:creationId xmlns:a16="http://schemas.microsoft.com/office/drawing/2014/main" id="{EA65C9D7-8167-4E47-9CBC-5F96A8A712CB}"/>
+              </a:ext>
+            </a:extLst>
+          </p:cNvPr>
+          <p:cNvSpPr>
+            <a:spLocks xmlns:a="http://schemas.openxmlformats.org/drawingml/2006/main" noGrp="1"/>
+          </p:cNvSpPr>
+          <p:nvPr/>
+        </p:nvSpPr>
+        <p:spPr>
+          <a:xfrm xmlns:a="http://schemas.openxmlformats.org/drawingml/2006/main">
+            <a:off x="566928" y="457200"/>
+            <a:ext cx="182880" cy="182880"/>
+          </a:xfrm>
+          <a:prstGeom xmlns:a="http://schemas.openxmlformats.org/drawingml/2006/main" prst="roundRect">
+            <a:avLst>
+              <a:gd name="adj" fmla="val 25000"/>
+            </a:avLst>
+          </a:prstGeom>
+          <a:solidFill xmlns:a="http://schemas.openxmlformats.org/drawingml/2006/main">
+            <a:srgbClr val="1C6DD0"/>
+          </a:solidFill>
+        </p:spPr>
+      </p:sp>
+      <p:sp>
+        <p:nvSpPr>
+          <p:cNvPr id="3" name="Shape 1">
+            <a:extLst xmlns:a="http://schemas.openxmlformats.org/drawingml/2006/main">
+              <a:ext uri="{FF2B5EF4-FFF2-40B4-BE49-F238E27FC236}">
+                <a16:creationId xmlns:a16="http://schemas.microsoft.com/office/drawing/2014/main" id="{E05F5463-64FA-47C2-95A5-0856FE317EBB}"/>
+              </a:ext>
+            </a:extLst>
+          </p:cNvPr>
+          <p:cNvSpPr>
+            <a:spLocks xmlns:a="http://schemas.openxmlformats.org/drawingml/2006/main" noGrp="1"/>
+          </p:cNvSpPr>
+          <p:nvPr/>
+        </p:nvSpPr>
+        <p:spPr>
+          <a:xfrm xmlns:a="http://schemas.openxmlformats.org/drawingml/2006/main">
+            <a:off x="804672" y="484632"/>
+            <a:ext cx="128016" cy="128016"/>
+          </a:xfrm>
+          <a:prstGeom xmlns:a="http://schemas.openxmlformats.org/drawingml/2006/main" prst="roundRect">
+            <a:avLst>
+              <a:gd name="adj" fmla="val 28571"/>
+            </a:avLst>
+          </a:prstGeom>
+          <a:solidFill xmlns:a="http://schemas.openxmlformats.org/drawingml/2006/main">
+            <a:srgbClr val="E8A33D"/>
+          </a:solidFill>
+        </p:spPr>
+      </p:sp>
+      <p:sp>
+        <p:nvSpPr>
+          <p:cNvPr id="4" name="Text 2">
+            <a:extLst xmlns:a="http://schemas.openxmlformats.org/drawingml/2006/main">
+              <a:ext uri="{FF2B5EF4-FFF2-40B4-BE49-F238E27FC236}">
+                <a16:creationId xmlns:a16="http://schemas.microsoft.com/office/drawing/2014/main" id="{2C21DD38-C152-4B78-8572-EFDEFDC03B7A}"/>
+              </a:ext>
+            </a:extLst>
+          </p:cNvPr>
+          <p:cNvSpPr>
+            <a:spLocks xmlns:a="http://schemas.openxmlformats.org/drawingml/2006/main" noGrp="1"/>
+          </p:cNvSpPr>
+          <p:nvPr/>
+        </p:nvSpPr>
+        <p:spPr>
+          <a:xfrm xmlns:a="http://schemas.openxmlformats.org/drawingml/2006/main">
+            <a:off x="566928" y="786384"/>
+            <a:ext cx="7315200" cy="274320"/>
+          </a:xfrm>
+          <a:prstGeom xmlns:a="http://schemas.openxmlformats.org/drawingml/2006/main" prst="rect">
+            <a:avLst/>
+          </a:prstGeom>
+          <a:noFill xmlns:a="http://schemas.openxmlformats.org/drawingml/2006/main"/>
+        </p:spPr>
+        <p:txBody>
+          <a:bodyPr xmlns:a="http://schemas.openxmlformats.org/drawingml/2006/main" wrap="square" lIns="0" tIns="0" rIns="0" bIns="0" anchor="ctr"/>
+          <a:lstStyle xmlns:a="http://schemas.openxmlformats.org/drawingml/2006/main"/>
+          <a:p xmlns:a="http://schemas.openxmlformats.org/drawingml/2006/main">
+            <a:pPr marL="0" indent="0">
+              <a:buNone/>
+            </a:pPr>
+            <a:r>
+              <a:rPr sz="1200" b="1" spc="200">
+                <a:solidFill>
+                  <a:srgbClr val="1C6DD0"/>
+                </a:solidFill>
+                <a:latin typeface="微软雅黑"/>
+                <a:ea typeface="微软雅黑"/>
+                <a:cs typeface="微软雅黑"/>
+              </a:rPr>
+              <a:t>PART 04</a:t>
+            </a:r>
+            <a:endParaRPr sz="1200"/>
+          </a:p>
+        </p:txBody>
+      </p:sp>
+      <p:sp>
+        <p:nvSpPr>
+          <p:cNvPr id="5" name="Text 3">
+            <a:extLst xmlns:a="http://schemas.openxmlformats.org/drawingml/2006/main">
+              <a:ext uri="{FF2B5EF4-FFF2-40B4-BE49-F238E27FC236}">
+                <a16:creationId xmlns:a16="http://schemas.microsoft.com/office/drawing/2014/main" id="{2F5F083E-44E1-4B05-AED3-7A729B93A9CB}"/>
+              </a:ext>
+            </a:extLst>
+          </p:cNvPr>
+          <p:cNvSpPr>
+            <a:spLocks xmlns:a="http://schemas.openxmlformats.org/drawingml/2006/main" noGrp="1"/>
+          </p:cNvSpPr>
+          <p:nvPr/>
+        </p:nvSpPr>
+        <p:spPr>
+          <a:xfrm xmlns:a="http://schemas.openxmlformats.org/drawingml/2006/main">
+            <a:off x="566928" y="1024128"/>
+            <a:ext cx="11055096" cy="566928"/>
+          </a:xfrm>
+          <a:prstGeom xmlns:a="http://schemas.openxmlformats.org/drawingml/2006/main" prst="rect">
+            <a:avLst/>
+          </a:prstGeom>
+          <a:noFill xmlns:a="http://schemas.openxmlformats.org/drawingml/2006/main"/>
+        </p:spPr>
+        <p:txBody>
+          <a:bodyPr xmlns:a="http://schemas.openxmlformats.org/drawingml/2006/main" wrap="square" lIns="0" tIns="0" rIns="0" bIns="0" anchor="ctr"/>
+          <a:lstStyle xmlns:a="http://schemas.openxmlformats.org/drawingml/2006/main"/>
+          <a:p xmlns:a="http://schemas.openxmlformats.org/drawingml/2006/main">
+            <a:pPr marL="0" indent="0">
+              <a:buNone/>
+            </a:pPr>
+            <a:r>
+              <a:rPr sz="3000" b="1">
+                <a:solidFill>
+                  <a:srgbClr val="1F2733"/>
+                </a:solidFill>
+                <a:latin typeface="微软雅黑"/>
+                <a:ea typeface="微软雅黑"/>
+                <a:cs typeface="微软雅黑"/>
+              </a:rPr>
+              <a:t>投产比分析：产出效益与 ROI</a:t>
+            </a:r>
+            <a:endParaRPr sz="3000"/>
+          </a:p>
+        </p:txBody>
+      </p:sp>
+      <p:sp>
+        <p:nvSpPr>
+          <p:cNvPr id="6" name="Text 4">
+            <a:extLst xmlns:a="http://schemas.openxmlformats.org/drawingml/2006/main">
+              <a:ext uri="{FF2B5EF4-FFF2-40B4-BE49-F238E27FC236}">
+                <a16:creationId xmlns:a16="http://schemas.microsoft.com/office/drawing/2014/main" id="{CC75E183-D42B-4013-8EC1-810C83DDB80A}"/>
+              </a:ext>
+            </a:extLst>
+          </p:cNvPr>
+          <p:cNvSpPr>
+            <a:spLocks xmlns:a="http://schemas.openxmlformats.org/drawingml/2006/main" noGrp="1"/>
+          </p:cNvSpPr>
+          <p:nvPr/>
+        </p:nvSpPr>
+        <p:spPr>
+          <a:xfrm xmlns:a="http://schemas.openxmlformats.org/drawingml/2006/main">
+            <a:off x="566928" y="1627632"/>
+            <a:ext cx="11055096" cy="310896"/>
+          </a:xfrm>
+          <a:prstGeom xmlns:a="http://schemas.openxmlformats.org/drawingml/2006/main" prst="rect">
+            <a:avLst/>
+          </a:prstGeom>
+          <a:noFill xmlns:a="http://schemas.openxmlformats.org/drawingml/2006/main"/>
+        </p:spPr>
+        <p:txBody>
+          <a:bodyPr xmlns:a="http://schemas.openxmlformats.org/drawingml/2006/main" wrap="square" lIns="0" tIns="0" rIns="0" bIns="0" anchor="ctr"/>
+          <a:lstStyle xmlns:a="http://schemas.openxmlformats.org/drawingml/2006/main"/>
+          <a:p xmlns:a="http://schemas.openxmlformats.org/drawingml/2006/main">
+            <a:pPr marL="0" indent="0">
+              <a:buNone/>
+            </a:pPr>
+            <a:r>
+              <a:rPr sz="1200">
+                <a:solidFill>
+                  <a:srgbClr val="E8A33D"/>
+                </a:solidFill>
+                <a:latin typeface="微软雅黑"/>
+                <a:ea typeface="微软雅黑"/>
+                <a:cs typeface="微软雅黑"/>
+              </a:rPr>
+              <a:t>聚焦效率、人工成本、质量价值与年度收益，金额单位为人民币。【预估】</a:t>
+            </a:r>
+            <a:endParaRPr sz="1200"/>
+          </a:p>
+        </p:txBody>
+      </p:sp>
+      <p:graphicFrame>
+        <p:nvGraphicFramePr>
+          <p:cNvPr id="59" name="Chart 0"/>
+          <p:cNvGraphicFramePr/>
+          <p:nvPr/>
+        </p:nvGraphicFramePr>
+        <p:xfrm>
+          <a:off xmlns:a="http://schemas.openxmlformats.org/drawingml/2006/main" x="6967728" y="2697480"/>
+          <a:ext xmlns:a="http://schemas.openxmlformats.org/drawingml/2006/main" cx="4425696" cy="1691640"/>
+        </p:xfrm>
+        <a:graphic xmlns:a="http://schemas.openxmlformats.org/drawingml/2006/main">
+          <a:graphicData uri="http://schemas.openxmlformats.org/drawingml/2006/chart">
+            <c:chart xmlns:r="http://schemas.openxmlformats.org/officeDocument/2006/relationships" xmlns:c="http://schemas.openxmlformats.org/drawingml/2006/chart" r:id="Red25b8f3f9894f6a"/>
+          </a:graphicData>
+        </a:graphic>
+      </p:graphicFrame>
+      <p:sp>
+        <p:nvSpPr>
+          <p:cNvPr id="36" name="Text 33">
+            <a:extLst xmlns:a="http://schemas.openxmlformats.org/drawingml/2006/main">
+              <a:ext uri="{FF2B5EF4-FFF2-40B4-BE49-F238E27FC236}">
+                <a16:creationId xmlns:a16="http://schemas.microsoft.com/office/drawing/2014/main" id="{7E6C8A3B-44FF-4D2E-9D87-E98F47353FA0}"/>
+              </a:ext>
+            </a:extLst>
+          </p:cNvPr>
+          <p:cNvSpPr>
+            <a:spLocks xmlns:a="http://schemas.openxmlformats.org/drawingml/2006/main" noGrp="1"/>
+          </p:cNvSpPr>
+          <p:nvPr/>
+        </p:nvSpPr>
+        <p:spPr>
+          <a:xfrm xmlns:a="http://schemas.openxmlformats.org/drawingml/2006/main">
+            <a:off x="11274552" y="6473952"/>
+            <a:ext cx="365760" cy="274320"/>
+          </a:xfrm>
+          <a:prstGeom xmlns:a="http://schemas.openxmlformats.org/drawingml/2006/main" prst="rect">
+            <a:avLst/>
+          </a:prstGeom>
+          <a:noFill xmlns:a="http://schemas.openxmlformats.org/drawingml/2006/main"/>
+        </p:spPr>
+        <p:txBody>
+          <a:bodyPr xmlns:a="http://schemas.openxmlformats.org/drawingml/2006/main" wrap="square" lIns="0" tIns="0" rIns="0" bIns="0" anchor="ctr"/>
+          <a:lstStyle xmlns:a="http://schemas.openxmlformats.org/drawingml/2006/main"/>
+          <a:p xmlns:a="http://schemas.openxmlformats.org/drawingml/2006/main">
+            <a:pPr marL="0" indent="0" algn="r">
+              <a:buNone/>
+            </a:pPr>
+            <a:r>
+              <a:rPr sz="900">
+                <a:solidFill>
+                  <a:srgbClr val="AAB4C2"/>
+                </a:solidFill>
+                <a:latin typeface="微软雅黑"/>
+                <a:ea typeface="微软雅黑"/>
+                <a:cs typeface="微软雅黑"/>
+              </a:rPr>
+              <a:t>22</a:t>
+            </a:r>
+            <a:endParaRPr sz="900"/>
+          </a:p>
+        </p:txBody>
+      </p:sp>
+      <p:sp>
+        <p:nvSpPr>
+          <p:cNvPr id="38" name="">
+            <a:extLst xmlns:a="http://schemas.openxmlformats.org/drawingml/2006/main">
+              <a:ext uri="{FF2B5EF4-FFF2-40B4-BE49-F238E27FC236}">
+                <a16:creationId xmlns:a16="http://schemas.microsoft.com/office/drawing/2014/main" id="{4A5EED0A-69B3-4F59-9187-D29D57F6F9AF}"/>
+              </a:ext>
+            </a:extLst>
+          </p:cNvPr>
+          <p:cNvSpPr>
+            <a:spLocks xmlns:a="http://schemas.openxmlformats.org/drawingml/2006/main" noGrp="1"/>
+          </p:cNvSpPr>
+          <p:nvPr/>
+        </p:nvSpPr>
+        <p:spPr>
+          <a:xfrm xmlns:a="http://schemas.openxmlformats.org/drawingml/2006/main">
+            <a:off x="457200" y="1885950"/>
+            <a:ext cx="11277600" cy="4267200"/>
+          </a:xfrm>
+          <a:prstGeom xmlns:a="http://schemas.openxmlformats.org/drawingml/2006/main" prst="rect">
+            <a:avLst/>
+          </a:prstGeom>
+          <a:solidFill xmlns:a="http://schemas.openxmlformats.org/drawingml/2006/main">
+            <a:srgbClr val="FFFFFF"/>
+          </a:solidFill>
+          <a:ln xmlns:a="http://schemas.openxmlformats.org/drawingml/2006/main" w="0">
+            <a:noFill/>
+          </a:ln>
+        </p:spPr>
+      </p:sp>
+      <p:sp>
+        <p:nvSpPr>
+          <p:cNvPr id="39" name="">
+            <a:extLst xmlns:a="http://schemas.openxmlformats.org/drawingml/2006/main">
+              <a:ext uri="{FF2B5EF4-FFF2-40B4-BE49-F238E27FC236}">
+                <a16:creationId xmlns:a16="http://schemas.microsoft.com/office/drawing/2014/main" id="{630F3A74-5E3E-4061-A025-C7528AF81F4B}"/>
+              </a:ext>
+            </a:extLst>
+          </p:cNvPr>
+          <p:cNvSpPr>
+            <a:spLocks xmlns:a="http://schemas.openxmlformats.org/drawingml/2006/main" noGrp="1"/>
+          </p:cNvSpPr>
+          <p:nvPr/>
+        </p:nvSpPr>
+        <p:spPr>
+          <a:xfrm xmlns:a="http://schemas.openxmlformats.org/drawingml/2006/main">
+            <a:off x="571500" y="2000250"/>
+            <a:ext cx="47625" cy="190500"/>
+          </a:xfrm>
+          <a:prstGeom xmlns:a="http://schemas.openxmlformats.org/drawingml/2006/main" prst="rect">
+            <a:avLst/>
+          </a:prstGeom>
+          <a:solidFill xmlns:a="http://schemas.openxmlformats.org/drawingml/2006/main">
+            <a:srgbClr val="1479C9"/>
+          </a:solidFill>
+          <a:ln xmlns:a="http://schemas.openxmlformats.org/drawingml/2006/main" w="0">
+            <a:noFill/>
+          </a:ln>
+        </p:spPr>
+      </p:sp>
+      <p:sp>
+        <p:nvSpPr>
+          <p:cNvPr id="40" name="">
+            <a:extLst xmlns:a="http://schemas.openxmlformats.org/drawingml/2006/main">
+              <a:ext uri="{FF2B5EF4-FFF2-40B4-BE49-F238E27FC236}">
+                <a16:creationId xmlns:a16="http://schemas.microsoft.com/office/drawing/2014/main" id="{19BD325E-7A95-4D1B-BC3A-49BE63796C5A}"/>
+              </a:ext>
+            </a:extLst>
+          </p:cNvPr>
+          <p:cNvSpPr>
+            <a:spLocks xmlns:a="http://schemas.openxmlformats.org/drawingml/2006/main" noGrp="1"/>
+          </p:cNvSpPr>
+          <p:nvPr/>
+        </p:nvSpPr>
+        <p:spPr>
+          <a:xfrm xmlns:a="http://schemas.openxmlformats.org/drawingml/2006/main">
+            <a:off x="714375" y="1981200"/>
+            <a:ext cx="4762500" cy="238125"/>
+          </a:xfrm>
+          <a:prstGeom xmlns:a="http://schemas.openxmlformats.org/drawingml/2006/main" prst="rect">
+            <a:avLst/>
+          </a:prstGeom>
+          <a:noFill xmlns:a="http://schemas.openxmlformats.org/drawingml/2006/main"/>
+          <a:ln xmlns:a="http://schemas.openxmlformats.org/drawingml/2006/main" w="0">
+            <a:noFill/>
+          </a:ln>
+        </p:spPr>
+        <p:txBody>
+          <a:bodyPr xmlns:a="http://schemas.openxmlformats.org/drawingml/2006/main">
+            <a:normAutofit fontScale="53472"/>
+          </a:bodyPr>
+          <a:lstStyle xmlns:a="http://schemas.openxmlformats.org/drawingml/2006/main"/>
+          <a:p xmlns:a="http://schemas.openxmlformats.org/drawingml/2006/main">
+            <a:pPr>
+              <a:defRPr b="1">
+                <a:solidFill>
+                  <a:srgbClr val="113B68"/>
+                </a:solidFill>
+              </a:defRPr>
+            </a:pPr>
+            <a:r>
+              <a:rPr b="1">
+                <a:solidFill>
+                  <a:srgbClr val="113B68"/>
+                </a:solidFill>
+              </a:rPr>
+              <a:t>2.1. 效率提升对比</a:t>
+            </a:r>
+          </a:p>
+        </p:txBody>
+      </p:sp>
+      <p:graphicFrame>
+        <p:nvGraphicFramePr>
+          <p:cNvPr id="64" name=""/>
+          <p:cNvGraphicFramePr/>
+          <p:nvPr/>
+        </p:nvGraphicFramePr>
+        <p:xfrm>
+          <a:off xmlns:a="http://schemas.openxmlformats.org/drawingml/2006/main" x="571500" y="2266950"/>
+          <a:ext xmlns:a="http://schemas.openxmlformats.org/drawingml/2006/main" cx="11049000" cy="1447800"/>
+        </p:xfrm>
+        <a:graphic xmlns:a="http://schemas.openxmlformats.org/drawingml/2006/main">
+          <a:graphicData uri="http://schemas.openxmlformats.org/drawingml/2006/table">
+            <a:tbl>
+              <a:tblPr firstRow="1" bandRow="1"/>
+              <a:tblGrid>
+                <a:gridCol w="2476500"/>
+                <a:gridCol w="2571750"/>
+                <a:gridCol w="2571750"/>
+                <a:gridCol w="3429000"/>
+              </a:tblGrid>
+              <a:tr h="289560">
+                <a:tc>
+                  <a:txBody>
+                    <a:bodyPr>
+                      <a:normAutofit/>
+                    </a:bodyPr>
+                    <a:lstStyle/>
+                    <a:p>
+                      <a:pPr algn="ctr"/>
+                      <a:r>
+                        <a:rPr sz="788" b="1">
+                          <a:solidFill>
+                            <a:srgbClr val="113B68"/>
+                          </a:solidFill>
+                        </a:rPr>
+                        <a:t>指标</a:t>
+                      </a:r>
+                    </a:p>
+                  </a:txBody>
+                  <a:tcPr marL="91440" marR="91440" marT="45720" marB="45720">
+                    <a:solidFill>
+                      <a:srgbClr val="E3EFFA"/>
+                    </a:solidFill>
+                  </a:tcPr>
+                </a:tc>
+                <a:tc>
+                  <a:txBody>
+                    <a:bodyPr>
+                      <a:normAutofit/>
+                    </a:bodyPr>
+                    <a:lstStyle/>
+                    <a:p>
+                      <a:pPr algn="ctr"/>
+                      <a:r>
+                        <a:rPr sz="788" b="1">
+                          <a:solidFill>
+                            <a:srgbClr val="113B68"/>
+                          </a:solidFill>
+                        </a:rPr>
+                        <a:t>改进前（人工）</a:t>
+                      </a:r>
+                    </a:p>
+                  </a:txBody>
+                  <a:tcPr marL="91440" marR="91440" marT="45720" marB="45720">
+                    <a:solidFill>
+                      <a:srgbClr val="E3EFFA"/>
+                    </a:solidFill>
+                  </a:tcPr>
+                </a:tc>
+                <a:tc>
+                  <a:txBody>
+                    <a:bodyPr>
+                      <a:normAutofit/>
+                    </a:bodyPr>
+                    <a:lstStyle/>
+                    <a:p>
+                      <a:pPr algn="ctr"/>
+                      <a:r>
+                        <a:rPr sz="788" b="1">
+                          <a:solidFill>
+                            <a:srgbClr val="113B68"/>
+                          </a:solidFill>
+                        </a:rPr>
+                        <a:t>改进后（AI系统）</a:t>
+                      </a:r>
+                    </a:p>
+                  </a:txBody>
+                  <a:tcPr marL="91440" marR="91440" marT="45720" marB="45720">
+                    <a:solidFill>
+                      <a:srgbClr val="E3EFFA"/>
+                    </a:solidFill>
+                  </a:tcPr>
+                </a:tc>
+                <a:tc>
+                  <a:txBody>
+                    <a:bodyPr>
+                      <a:normAutofit/>
+                    </a:bodyPr>
+                    <a:lstStyle/>
+                    <a:p>
+                      <a:pPr algn="ctr"/>
+                      <a:r>
+                        <a:rPr sz="788" b="1">
+                          <a:solidFill>
+                            <a:srgbClr val="113B68"/>
+                          </a:solidFill>
+                        </a:rPr>
+                        <a:t>提升</a:t>
+                      </a:r>
+                    </a:p>
+                  </a:txBody>
+                  <a:tcPr marL="91440" marR="91440" marT="45720" marB="45720">
+                    <a:solidFill>
+                      <a:srgbClr val="E3EFFA"/>
+                    </a:solidFill>
+                  </a:tcPr>
+                </a:tc>
+              </a:tr>
+              <a:tr h="289560">
+                <a:tc>
+                  <a:txBody>
+                    <a:bodyPr>
+                      <a:normAutofit/>
+                    </a:bodyPr>
+                    <a:lstStyle/>
+                    <a:p>
+                      <a:pPr algn="l"/>
+                      <a:r>
+                        <a:rPr sz="694">
+                          <a:solidFill>
+                            <a:srgbClr val="34495E"/>
+                          </a:solidFill>
+                        </a:rPr>
+                        <a:t>单件处理时间</a:t>
+                      </a:r>
+                    </a:p>
+                  </a:txBody>
+                  <a:tcPr marL="91440" marR="91440" marT="45720" marB="45720">
+                    <a:solidFill>
+                      <a:srgbClr val="FFFFFF"/>
+                    </a:solidFill>
+                  </a:tcPr>
+                </a:tc>
+                <a:tc>
+                  <a:txBody>
+                    <a:bodyPr>
+                      <a:normAutofit/>
+                    </a:bodyPr>
+                    <a:lstStyle/>
+                    <a:p>
+                      <a:pPr algn="ctr"/>
+                      <a:r>
+                        <a:rPr sz="694">
+                          <a:solidFill>
+                            <a:srgbClr val="34495E"/>
+                          </a:solidFill>
+                        </a:rPr>
+                        <a:t>0.5～1小时（1,800～3,600秒）</a:t>
+                      </a:r>
+                    </a:p>
+                  </a:txBody>
+                  <a:tcPr marL="91440" marR="91440" marT="45720" marB="45720">
+                    <a:solidFill>
+                      <a:srgbClr val="FFFFFF"/>
+                    </a:solidFill>
+                  </a:tcPr>
+                </a:tc>
+                <a:tc>
+                  <a:txBody>
+                    <a:bodyPr>
+                      <a:normAutofit/>
+                    </a:bodyPr>
+                    <a:lstStyle/>
+                    <a:p>
+                      <a:pPr algn="ctr"/>
+                      <a:r>
+                        <a:rPr sz="694">
+                          <a:solidFill>
+                            <a:srgbClr val="34495E"/>
+                          </a:solidFill>
+                        </a:rPr>
+                        <a:t>30秒</a:t>
+                      </a:r>
+                    </a:p>
+                  </a:txBody>
+                  <a:tcPr marL="91440" marR="91440" marT="45720" marB="45720">
+                    <a:solidFill>
+                      <a:srgbClr val="FFFFFF"/>
+                    </a:solidFill>
+                  </a:tcPr>
+                </a:tc>
+                <a:tc>
+                  <a:txBody>
+                    <a:bodyPr>
+                      <a:normAutofit/>
+                    </a:bodyPr>
+                    <a:lstStyle/>
+                    <a:p>
+                      <a:pPr algn="ctr"/>
+                      <a:r>
+                        <a:rPr sz="694">
+                          <a:solidFill>
+                            <a:srgbClr val="34495E"/>
+                          </a:solidFill>
+                        </a:rPr>
+                        <a:t>60～120倍</a:t>
+                      </a:r>
+                    </a:p>
+                  </a:txBody>
+                  <a:tcPr marL="91440" marR="91440" marT="45720" marB="45720">
+                    <a:solidFill>
+                      <a:srgbClr val="FFFFFF"/>
+                    </a:solidFill>
+                  </a:tcPr>
+                </a:tc>
+              </a:tr>
+              <a:tr h="289560">
+                <a:tc>
+                  <a:txBody>
+                    <a:bodyPr>
+                      <a:normAutofit/>
+                    </a:bodyPr>
+                    <a:lstStyle/>
+                    <a:p>
+                      <a:pPr algn="l"/>
+                      <a:r>
+                        <a:rPr sz="694">
+                          <a:solidFill>
+                            <a:srgbClr val="34495E"/>
+                          </a:solidFill>
+                        </a:rPr>
+                        <a:t>异常发现周期</a:t>
+                      </a:r>
+                    </a:p>
+                  </a:txBody>
+                  <a:tcPr marL="91440" marR="91440" marT="45720" marB="45720">
+                    <a:solidFill>
+                      <a:srgbClr val="F7FAFD"/>
+                    </a:solidFill>
+                  </a:tcPr>
+                </a:tc>
+                <a:tc>
+                  <a:txBody>
+                    <a:bodyPr>
+                      <a:normAutofit/>
+                    </a:bodyPr>
+                    <a:lstStyle/>
+                    <a:p>
+                      <a:pPr algn="ctr"/>
+                      <a:r>
+                        <a:rPr sz="694">
+                          <a:solidFill>
+                            <a:srgbClr val="34495E"/>
+                          </a:solidFill>
+                        </a:rPr>
+                        <a:t>1～2个月</a:t>
+                      </a:r>
+                    </a:p>
+                  </a:txBody>
+                  <a:tcPr marL="91440" marR="91440" marT="45720" marB="45720">
+                    <a:solidFill>
+                      <a:srgbClr val="F7FAFD"/>
+                    </a:solidFill>
+                  </a:tcPr>
+                </a:tc>
+                <a:tc>
+                  <a:txBody>
+                    <a:bodyPr>
+                      <a:normAutofit/>
+                    </a:bodyPr>
+                    <a:lstStyle/>
+                    <a:p>
+                      <a:pPr algn="ctr"/>
+                      <a:r>
+                        <a:rPr sz="694">
+                          <a:solidFill>
+                            <a:srgbClr val="34495E"/>
+                          </a:solidFill>
+                        </a:rPr>
+                        <a:t>60秒（实时）</a:t>
+                      </a:r>
+                    </a:p>
+                  </a:txBody>
+                  <a:tcPr marL="91440" marR="91440" marT="45720" marB="45720">
+                    <a:solidFill>
+                      <a:srgbClr val="F7FAFD"/>
+                    </a:solidFill>
+                  </a:tcPr>
+                </a:tc>
+                <a:tc>
+                  <a:txBody>
+                    <a:bodyPr>
+                      <a:normAutofit/>
+                    </a:bodyPr>
+                    <a:lstStyle/>
+                    <a:p>
+                      <a:pPr algn="ctr"/>
+                      <a:r>
+                        <a:rPr sz="694">
+                          <a:solidFill>
+                            <a:srgbClr val="34495E"/>
+                          </a:solidFill>
+                        </a:rPr>
+                        <a:t>月级→分钟级</a:t>
+                      </a:r>
+                    </a:p>
+                  </a:txBody>
+                  <a:tcPr marL="91440" marR="91440" marT="45720" marB="45720">
+                    <a:solidFill>
+                      <a:srgbClr val="F7FAFD"/>
+                    </a:solidFill>
+                  </a:tcPr>
+                </a:tc>
+              </a:tr>
+              <a:tr h="289560">
+                <a:tc>
+                  <a:txBody>
+                    <a:bodyPr>
+                      <a:normAutofit/>
+                    </a:bodyPr>
+                    <a:lstStyle/>
+                    <a:p>
+                      <a:pPr algn="l"/>
+                      <a:r>
+                        <a:rPr sz="694">
+                          <a:solidFill>
+                            <a:srgbClr val="34495E"/>
+                          </a:solidFill>
+                        </a:rPr>
+                        <a:t>日处理量</a:t>
+                      </a:r>
+                    </a:p>
+                  </a:txBody>
+                  <a:tcPr marL="91440" marR="91440" marT="45720" marB="45720">
+                    <a:solidFill>
+                      <a:srgbClr val="FFFFFF"/>
+                    </a:solidFill>
+                  </a:tcPr>
+                </a:tc>
+                <a:tc>
+                  <a:txBody>
+                    <a:bodyPr>
+                      <a:normAutofit/>
+                    </a:bodyPr>
+                    <a:lstStyle/>
+                    <a:p>
+                      <a:pPr algn="ctr"/>
+                      <a:r>
+                        <a:rPr sz="694">
+                          <a:solidFill>
+                            <a:srgbClr val="34495E"/>
+                          </a:solidFill>
+                        </a:rPr>
+                        <a:t>8～16件 / 日</a:t>
+                      </a:r>
+                    </a:p>
+                  </a:txBody>
+                  <a:tcPr marL="91440" marR="91440" marT="45720" marB="45720">
+                    <a:solidFill>
+                      <a:srgbClr val="FFFFFF"/>
+                    </a:solidFill>
+                  </a:tcPr>
+                </a:tc>
+                <a:tc>
+                  <a:txBody>
+                    <a:bodyPr>
+                      <a:normAutofit/>
+                    </a:bodyPr>
+                    <a:lstStyle/>
+                    <a:p>
+                      <a:pPr algn="ctr"/>
+                      <a:r>
+                        <a:rPr sz="694">
+                          <a:solidFill>
+                            <a:srgbClr val="34495E"/>
+                          </a:solidFill>
+                        </a:rPr>
+                        <a:t>1,000件 / 日</a:t>
+                      </a:r>
+                    </a:p>
+                  </a:txBody>
+                  <a:tcPr marL="91440" marR="91440" marT="45720" marB="45720">
+                    <a:solidFill>
+                      <a:srgbClr val="FFFFFF"/>
+                    </a:solidFill>
+                  </a:tcPr>
+                </a:tc>
+                <a:tc>
+                  <a:txBody>
+                    <a:bodyPr>
+                      <a:normAutofit/>
+                    </a:bodyPr>
+                    <a:lstStyle/>
+                    <a:p>
+                      <a:pPr algn="ctr"/>
+                      <a:r>
+                        <a:rPr sz="694">
+                          <a:solidFill>
+                            <a:srgbClr val="34495E"/>
+                          </a:solidFill>
+                        </a:rPr>
+                        <a:t>6～121倍</a:t>
+                      </a:r>
+                    </a:p>
+                  </a:txBody>
+                  <a:tcPr marL="91440" marR="91440" marT="45720" marB="45720">
+                    <a:solidFill>
+                      <a:srgbClr val="FFFFFF"/>
+                    </a:solidFill>
+                  </a:tcPr>
+                </a:tc>
+              </a:tr>
+              <a:tr h="289560">
+                <a:tc>
+                  <a:txBody>
+                    <a:bodyPr>
+                      <a:normAutofit/>
+                    </a:bodyPr>
+                    <a:lstStyle/>
+                    <a:p>
+                      <a:pPr algn="l"/>
+                      <a:r>
+                        <a:rPr sz="694">
+                          <a:solidFill>
+                            <a:srgbClr val="34495E"/>
+                          </a:solidFill>
+                        </a:rPr>
+                        <a:t>模型准确率</a:t>
+                      </a:r>
+                    </a:p>
+                  </a:txBody>
+                  <a:tcPr marL="91440" marR="91440" marT="45720" marB="45720">
+                    <a:solidFill>
+                      <a:srgbClr val="F7FAFD"/>
+                    </a:solidFill>
+                  </a:tcPr>
+                </a:tc>
+                <a:tc>
+                  <a:txBody>
+                    <a:bodyPr>
+                      <a:normAutofit/>
+                    </a:bodyPr>
+                    <a:lstStyle/>
+                    <a:p>
+                      <a:pPr algn="ctr"/>
+                      <a:r>
+                        <a:rPr sz="694">
+                          <a:solidFill>
+                            <a:srgbClr val="34495E"/>
+                          </a:solidFill>
+                        </a:rPr>
+                        <a:t>80%</a:t>
+                      </a:r>
+                    </a:p>
+                  </a:txBody>
+                  <a:tcPr marL="91440" marR="91440" marT="45720" marB="45720">
+                    <a:solidFill>
+                      <a:srgbClr val="F7FAFD"/>
+                    </a:solidFill>
+                  </a:tcPr>
+                </a:tc>
+                <a:tc>
+                  <a:txBody>
+                    <a:bodyPr>
+                      <a:normAutofit/>
+                    </a:bodyPr>
+                    <a:lstStyle/>
+                    <a:p>
+                      <a:pPr algn="ctr"/>
+                      <a:r>
+                        <a:rPr sz="694">
+                          <a:solidFill>
+                            <a:srgbClr val="34495E"/>
+                          </a:solidFill>
+                        </a:rPr>
+                        <a:t>95%</a:t>
+                      </a:r>
+                    </a:p>
+                  </a:txBody>
+                  <a:tcPr marL="91440" marR="91440" marT="45720" marB="45720">
+                    <a:solidFill>
+                      <a:srgbClr val="F7FAFD"/>
+                    </a:solidFill>
+                  </a:tcPr>
+                </a:tc>
+                <a:tc>
+                  <a:txBody>
+                    <a:bodyPr>
+                      <a:normAutofit/>
+                    </a:bodyPr>
+                    <a:lstStyle/>
+                    <a:p>
+                      <a:pPr algn="ctr"/>
+                      <a:r>
+                        <a:rPr sz="694">
+                          <a:solidFill>
+                            <a:srgbClr val="34495E"/>
+                          </a:solidFill>
+                        </a:rPr>
+                        <a:t>提升15个百分点</a:t>
+                      </a:r>
+                    </a:p>
+                  </a:txBody>
+                  <a:tcPr marL="91440" marR="91440" marT="45720" marB="45720">
+                    <a:solidFill>
+                      <a:srgbClr val="F7FAFD"/>
+                    </a:solidFill>
+                  </a:tcPr>
+                </a:tc>
+              </a:tr>
+            </a:tbl>
+          </a:graphicData>
+        </a:graphic>
+      </p:graphicFrame>
+      <p:sp>
+        <p:nvSpPr>
+          <p:cNvPr id="42" name="">
+            <a:extLst xmlns:a="http://schemas.openxmlformats.org/drawingml/2006/main">
+              <a:ext uri="{FF2B5EF4-FFF2-40B4-BE49-F238E27FC236}">
+                <a16:creationId xmlns:a16="http://schemas.microsoft.com/office/drawing/2014/main" id="{DA91E517-1C80-49CB-8442-B936CA334A84}"/>
+              </a:ext>
+            </a:extLst>
+          </p:cNvPr>
+          <p:cNvSpPr>
+            <a:spLocks xmlns:a="http://schemas.openxmlformats.org/drawingml/2006/main" noGrp="1"/>
+          </p:cNvSpPr>
+          <p:nvPr/>
+        </p:nvSpPr>
+        <p:spPr>
+          <a:xfrm xmlns:a="http://schemas.openxmlformats.org/drawingml/2006/main">
+            <a:off x="571500" y="4067175"/>
+            <a:ext cx="47625" cy="190500"/>
+          </a:xfrm>
+          <a:prstGeom xmlns:a="http://schemas.openxmlformats.org/drawingml/2006/main" prst="rect">
+            <a:avLst/>
+          </a:prstGeom>
+          <a:solidFill xmlns:a="http://schemas.openxmlformats.org/drawingml/2006/main">
+            <a:srgbClr val="179B83"/>
+          </a:solidFill>
+          <a:ln xmlns:a="http://schemas.openxmlformats.org/drawingml/2006/main" w="0">
+            <a:noFill/>
+          </a:ln>
+        </p:spPr>
+      </p:sp>
+      <p:sp>
+        <p:nvSpPr>
+          <p:cNvPr id="43" name="">
+            <a:extLst xmlns:a="http://schemas.openxmlformats.org/drawingml/2006/main">
+              <a:ext uri="{FF2B5EF4-FFF2-40B4-BE49-F238E27FC236}">
+                <a16:creationId xmlns:a16="http://schemas.microsoft.com/office/drawing/2014/main" id="{2C18C150-C114-40D4-A41A-6EE152876395}"/>
+              </a:ext>
+            </a:extLst>
+          </p:cNvPr>
+          <p:cNvSpPr>
+            <a:spLocks xmlns:a="http://schemas.openxmlformats.org/drawingml/2006/main" noGrp="1"/>
+          </p:cNvSpPr>
+          <p:nvPr/>
+        </p:nvSpPr>
+        <p:spPr>
+          <a:xfrm xmlns:a="http://schemas.openxmlformats.org/drawingml/2006/main">
+            <a:off x="714375" y="4048125"/>
+            <a:ext cx="4762500" cy="238125"/>
+          </a:xfrm>
+          <a:prstGeom xmlns:a="http://schemas.openxmlformats.org/drawingml/2006/main" prst="rect">
+            <a:avLst/>
+          </a:prstGeom>
+          <a:noFill xmlns:a="http://schemas.openxmlformats.org/drawingml/2006/main"/>
+          <a:ln xmlns:a="http://schemas.openxmlformats.org/drawingml/2006/main" w="0">
+            <a:noFill/>
+          </a:ln>
+        </p:spPr>
+        <p:txBody>
+          <a:bodyPr xmlns:a="http://schemas.openxmlformats.org/drawingml/2006/main">
+            <a:normAutofit fontScale="53472"/>
+          </a:bodyPr>
+          <a:lstStyle xmlns:a="http://schemas.openxmlformats.org/drawingml/2006/main"/>
+          <a:p xmlns:a="http://schemas.openxmlformats.org/drawingml/2006/main">
+            <a:pPr>
+              <a:defRPr b="1">
+                <a:solidFill>
+                  <a:srgbClr val="113B68"/>
+                </a:solidFill>
+              </a:defRPr>
+            </a:pPr>
+            <a:r>
+              <a:rPr b="1">
+                <a:solidFill>
+                  <a:srgbClr val="113B68"/>
+                </a:solidFill>
+              </a:rPr>
+              <a:t>2.2. 人力成本节省</a:t>
+            </a:r>
+          </a:p>
+        </p:txBody>
+      </p:sp>
+      <p:graphicFrame>
+        <p:nvGraphicFramePr>
+          <p:cNvPr id="67" name=""/>
+          <p:cNvGraphicFramePr/>
+          <p:nvPr/>
+        </p:nvGraphicFramePr>
+        <p:xfrm>
+          <a:off xmlns:a="http://schemas.openxmlformats.org/drawingml/2006/main" x="571500" y="4333875"/>
+          <a:ext xmlns:a="http://schemas.openxmlformats.org/drawingml/2006/main" cx="5238750" cy="952500"/>
+        </p:xfrm>
+        <a:graphic xmlns:a="http://schemas.openxmlformats.org/drawingml/2006/main">
+          <a:graphicData uri="http://schemas.openxmlformats.org/drawingml/2006/table">
+            <a:tbl>
+              <a:tblPr firstRow="1" bandRow="1"/>
+              <a:tblGrid>
+                <a:gridCol w="1571625"/>
+                <a:gridCol w="1238250"/>
+                <a:gridCol w="1285875"/>
+                <a:gridCol w="1143000"/>
+              </a:tblGrid>
+              <a:tr h="238125">
+                <a:tc>
+                  <a:txBody>
+                    <a:bodyPr>
+                      <a:normAutofit/>
+                    </a:bodyPr>
+                    <a:lstStyle/>
+                    <a:p>
+                      <a:pPr algn="ctr"/>
+                      <a:r>
+                        <a:rPr sz="788" b="1">
+                          <a:solidFill>
+                            <a:srgbClr val="113B68"/>
+                          </a:solidFill>
+                        </a:rPr>
+                        <a:t>核保场景</a:t>
+                      </a:r>
+                    </a:p>
+                  </a:txBody>
+                  <a:tcPr marL="91440" marR="91440" marT="45720" marB="45720">
+                    <a:solidFill>
+                      <a:srgbClr val="E3EFFA"/>
+                    </a:solidFill>
+                  </a:tcPr>
+                </a:tc>
+                <a:tc>
+                  <a:txBody>
+                    <a:bodyPr>
+                      <a:normAutofit/>
+                    </a:bodyPr>
+                    <a:lstStyle/>
+                    <a:p>
+                      <a:pPr algn="ctr"/>
+                      <a:r>
+                        <a:rPr sz="788" b="1">
+                          <a:solidFill>
+                            <a:srgbClr val="113B68"/>
+                          </a:solidFill>
+                        </a:rPr>
+                        <a:t>原需人力</a:t>
+                      </a:r>
+                    </a:p>
+                  </a:txBody>
+                  <a:tcPr marL="91440" marR="91440" marT="45720" marB="45720">
+                    <a:solidFill>
+                      <a:srgbClr val="E3EFFA"/>
+                    </a:solidFill>
+                  </a:tcPr>
+                </a:tc>
+                <a:tc>
+                  <a:txBody>
+                    <a:bodyPr>
+                      <a:normAutofit/>
+                    </a:bodyPr>
+                    <a:lstStyle/>
+                    <a:p>
+                      <a:pPr algn="ctr"/>
+                      <a:r>
+                        <a:rPr sz="788" b="1">
+                          <a:solidFill>
+                            <a:srgbClr val="113B68"/>
+                          </a:solidFill>
+                        </a:rPr>
+                        <a:t>现需人力</a:t>
+                      </a:r>
+                    </a:p>
+                  </a:txBody>
+                  <a:tcPr marL="91440" marR="91440" marT="45720" marB="45720">
+                    <a:solidFill>
+                      <a:srgbClr val="E3EFFA"/>
+                    </a:solidFill>
+                  </a:tcPr>
+                </a:tc>
+                <a:tc>
+                  <a:txBody>
+                    <a:bodyPr>
+                      <a:normAutofit/>
+                    </a:bodyPr>
+                    <a:lstStyle/>
+                    <a:p>
+                      <a:pPr algn="ctr"/>
+                      <a:r>
+                        <a:rPr sz="788" b="1">
+                          <a:solidFill>
+                            <a:srgbClr val="113B68"/>
+                          </a:solidFill>
+                        </a:rPr>
+                        <a:t>月节约金额</a:t>
+                      </a:r>
+                    </a:p>
+                  </a:txBody>
+                  <a:tcPr marL="91440" marR="91440" marT="45720" marB="45720">
+                    <a:solidFill>
+                      <a:srgbClr val="E3EFFA"/>
+                    </a:solidFill>
+                  </a:tcPr>
+                </a:tc>
+              </a:tr>
+              <a:tr h="238125">
+                <a:tc>
+                  <a:txBody>
+                    <a:bodyPr>
+                      <a:normAutofit/>
+                    </a:bodyPr>
+                    <a:lstStyle/>
+                    <a:p>
+                      <a:pPr algn="l"/>
+                      <a:r>
+                        <a:rPr sz="694">
+                          <a:solidFill>
+                            <a:srgbClr val="34495E"/>
+                          </a:solidFill>
+                        </a:rPr>
+                        <a:t>费用核对</a:t>
+                      </a:r>
+                    </a:p>
+                  </a:txBody>
+                  <a:tcPr marL="91440" marR="91440" marT="45720" marB="45720">
+                    <a:solidFill>
+                      <a:srgbClr val="FFFFFF"/>
+                    </a:solidFill>
+                  </a:tcPr>
+                </a:tc>
+                <a:tc>
+                  <a:txBody>
+                    <a:bodyPr>
+                      <a:normAutofit/>
+                    </a:bodyPr>
+                    <a:lstStyle/>
+                    <a:p>
+                      <a:pPr algn="ctr"/>
+                      <a:r>
+                        <a:rPr sz="694">
+                          <a:solidFill>
+                            <a:srgbClr val="34495E"/>
+                          </a:solidFill>
+                        </a:rPr>
+                        <a:t>3～5人</a:t>
+                      </a:r>
+                    </a:p>
+                  </a:txBody>
+                  <a:tcPr marL="91440" marR="91440" marT="45720" marB="45720">
+                    <a:solidFill>
+                      <a:srgbClr val="FFFFFF"/>
+                    </a:solidFill>
+                  </a:tcPr>
+                </a:tc>
+                <a:tc>
+                  <a:txBody>
+                    <a:bodyPr>
+                      <a:normAutofit/>
+                    </a:bodyPr>
+                    <a:lstStyle/>
+                    <a:p>
+                      <a:pPr algn="ctr"/>
+                      <a:r>
+                        <a:rPr sz="694">
+                          <a:solidFill>
+                            <a:srgbClr val="34495E"/>
+                          </a:solidFill>
+                        </a:rPr>
+                        <a:t>1人（仅复核）</a:t>
+                      </a:r>
+                    </a:p>
+                  </a:txBody>
+                  <a:tcPr marL="91440" marR="91440" marT="45720" marB="45720">
+                    <a:solidFill>
+                      <a:srgbClr val="FFFFFF"/>
+                    </a:solidFill>
+                  </a:tcPr>
+                </a:tc>
+                <a:tc>
+                  <a:txBody>
+                    <a:bodyPr>
+                      <a:normAutofit/>
+                    </a:bodyPr>
+                    <a:lstStyle/>
+                    <a:p>
+                      <a:pPr algn="ctr"/>
+                      <a:r>
+                        <a:rPr sz="694">
+                          <a:solidFill>
+                            <a:srgbClr val="34495E"/>
+                          </a:solidFill>
+                        </a:rPr>
+                        <a:t>14,000元</a:t>
+                      </a:r>
+                    </a:p>
+                  </a:txBody>
+                  <a:tcPr marL="91440" marR="91440" marT="45720" marB="45720">
+                    <a:solidFill>
+                      <a:srgbClr val="FFFFFF"/>
+                    </a:solidFill>
+                  </a:tcPr>
+                </a:tc>
+              </a:tr>
+              <a:tr h="238125">
+                <a:tc>
+                  <a:txBody>
+                    <a:bodyPr>
+                      <a:normAutofit/>
+                    </a:bodyPr>
+                    <a:lstStyle/>
+                    <a:p>
+                      <a:pPr algn="l"/>
+                      <a:r>
+                        <a:rPr sz="694">
+                          <a:solidFill>
+                            <a:srgbClr val="34495E"/>
+                          </a:solidFill>
+                        </a:rPr>
+                        <a:t>异常监测</a:t>
+                      </a:r>
+                    </a:p>
+                  </a:txBody>
+                  <a:tcPr marL="91440" marR="91440" marT="45720" marB="45720">
+                    <a:solidFill>
+                      <a:srgbClr val="F7FAFD"/>
+                    </a:solidFill>
+                  </a:tcPr>
+                </a:tc>
+                <a:tc>
+                  <a:txBody>
+                    <a:bodyPr>
+                      <a:normAutofit/>
+                    </a:bodyPr>
+                    <a:lstStyle/>
+                    <a:p>
+                      <a:pPr algn="ctr"/>
+                      <a:r>
+                        <a:rPr sz="694">
+                          <a:solidFill>
+                            <a:srgbClr val="34495E"/>
+                          </a:solidFill>
+                        </a:rPr>
+                        <a:t>1人</a:t>
+                      </a:r>
+                    </a:p>
+                  </a:txBody>
+                  <a:tcPr marL="91440" marR="91440" marT="45720" marB="45720">
+                    <a:solidFill>
+                      <a:srgbClr val="F7FAFD"/>
+                    </a:solidFill>
+                  </a:tcPr>
+                </a:tc>
+                <a:tc>
+                  <a:txBody>
+                    <a:bodyPr>
+                      <a:normAutofit/>
+                    </a:bodyPr>
+                    <a:lstStyle/>
+                    <a:p>
+                      <a:pPr algn="ctr"/>
+                      <a:r>
+                        <a:rPr sz="694">
+                          <a:solidFill>
+                            <a:srgbClr val="34495E"/>
+                          </a:solidFill>
+                        </a:rPr>
+                        <a:t>0人（自动）</a:t>
+                      </a:r>
+                    </a:p>
+                  </a:txBody>
+                  <a:tcPr marL="91440" marR="91440" marT="45720" marB="45720">
+                    <a:solidFill>
+                      <a:srgbClr val="F7FAFD"/>
+                    </a:solidFill>
+                  </a:tcPr>
+                </a:tc>
+                <a:tc>
+                  <a:txBody>
+                    <a:bodyPr>
+                      <a:normAutofit/>
+                    </a:bodyPr>
+                    <a:lstStyle/>
+                    <a:p>
+                      <a:pPr algn="ctr"/>
+                      <a:r>
+                        <a:rPr sz="694">
+                          <a:solidFill>
+                            <a:srgbClr val="34495E"/>
+                          </a:solidFill>
+                        </a:rPr>
+                        <a:t>4,000元</a:t>
+                      </a:r>
+                    </a:p>
+                  </a:txBody>
+                  <a:tcPr marL="91440" marR="91440" marT="45720" marB="45720">
+                    <a:solidFill>
+                      <a:srgbClr val="F7FAFD"/>
+                    </a:solidFill>
+                  </a:tcPr>
+                </a:tc>
+              </a:tr>
+              <a:tr h="238125">
+                <a:tc>
+                  <a:txBody>
+                    <a:bodyPr>
+                      <a:normAutofit/>
+                    </a:bodyPr>
+                    <a:lstStyle/>
+                    <a:p>
+                      <a:pPr algn="l"/>
+                      <a:r>
+                        <a:rPr sz="694" b="1">
+                          <a:solidFill>
+                            <a:srgbClr val="087A3F"/>
+                          </a:solidFill>
+                        </a:rPr>
+                        <a:t>合计月节省</a:t>
+                      </a:r>
+                    </a:p>
+                  </a:txBody>
+                  <a:tcPr marL="91440" marR="91440" marT="45720" marB="45720">
+                    <a:solidFill>
+                      <a:srgbClr val="E8F5ED"/>
+                    </a:solidFill>
+                  </a:tcPr>
+                </a:tc>
+                <a:tc>
+                  <a:txBody>
+                    <a:bodyPr>
+                      <a:normAutofit/>
+                    </a:bodyPr>
+                    <a:lstStyle/>
+                    <a:p>
+                      <a:pPr algn="ctr"/>
+                      <a:r>
+                        <a:rPr sz="694" b="1">
+                          <a:solidFill>
+                            <a:srgbClr val="087A3F"/>
+                          </a:solidFill>
+                        </a:rPr>
+                        <a:t>—</a:t>
+                      </a:r>
+                    </a:p>
+                  </a:txBody>
+                  <a:tcPr marL="91440" marR="91440" marT="45720" marB="45720">
+                    <a:solidFill>
+                      <a:srgbClr val="E8F5ED"/>
+                    </a:solidFill>
+                  </a:tcPr>
+                </a:tc>
+                <a:tc>
+                  <a:txBody>
+                    <a:bodyPr>
+                      <a:normAutofit/>
+                    </a:bodyPr>
+                    <a:lstStyle/>
+                    <a:p>
+                      <a:pPr algn="ctr"/>
+                      <a:r>
+                        <a:rPr sz="694" b="1">
+                          <a:solidFill>
+                            <a:srgbClr val="087A3F"/>
+                          </a:solidFill>
+                        </a:rPr>
+                        <a:t>—</a:t>
+                      </a:r>
+                    </a:p>
+                  </a:txBody>
+                  <a:tcPr marL="91440" marR="91440" marT="45720" marB="45720">
+                    <a:solidFill>
+                      <a:srgbClr val="E8F5ED"/>
+                    </a:solidFill>
+                  </a:tcPr>
+                </a:tc>
+                <a:tc>
+                  <a:txBody>
+                    <a:bodyPr>
+                      <a:normAutofit/>
+                    </a:bodyPr>
+                    <a:lstStyle/>
+                    <a:p>
+                      <a:pPr algn="ctr"/>
+                      <a:r>
+                        <a:rPr sz="694" b="1">
+                          <a:solidFill>
+                            <a:srgbClr val="087A3F"/>
+                          </a:solidFill>
+                        </a:rPr>
+                        <a:t>18,000元</a:t>
+                      </a:r>
+                    </a:p>
+                  </a:txBody>
+                  <a:tcPr marL="91440" marR="91440" marT="45720" marB="45720">
+                    <a:solidFill>
+                      <a:srgbClr val="E8F5ED"/>
+                    </a:solidFill>
+                  </a:tcPr>
+                </a:tc>
+              </a:tr>
+            </a:tbl>
+          </a:graphicData>
+        </a:graphic>
+      </p:graphicFrame>
+      <p:sp>
+        <p:nvSpPr>
+          <p:cNvPr id="45" name="">
+            <a:extLst xmlns:a="http://schemas.openxmlformats.org/drawingml/2006/main">
+              <a:ext uri="{FF2B5EF4-FFF2-40B4-BE49-F238E27FC236}">
+                <a16:creationId xmlns:a16="http://schemas.microsoft.com/office/drawing/2014/main" id="{F7544DE3-54E7-4FE0-A8BE-7393BB933FDC}"/>
+              </a:ext>
+            </a:extLst>
+          </p:cNvPr>
+          <p:cNvSpPr>
+            <a:spLocks xmlns:a="http://schemas.openxmlformats.org/drawingml/2006/main" noGrp="1"/>
+          </p:cNvSpPr>
+          <p:nvPr/>
+        </p:nvSpPr>
+        <p:spPr>
+          <a:xfrm xmlns:a="http://schemas.openxmlformats.org/drawingml/2006/main">
+            <a:off x="571500" y="5591175"/>
+            <a:ext cx="47625" cy="190500"/>
+          </a:xfrm>
+          <a:prstGeom xmlns:a="http://schemas.openxmlformats.org/drawingml/2006/main" prst="rect">
+            <a:avLst/>
+          </a:prstGeom>
+          <a:solidFill xmlns:a="http://schemas.openxmlformats.org/drawingml/2006/main">
+            <a:srgbClr val="179B83"/>
+          </a:solidFill>
+          <a:ln xmlns:a="http://schemas.openxmlformats.org/drawingml/2006/main" w="0">
+            <a:noFill/>
+          </a:ln>
+        </p:spPr>
+      </p:sp>
+      <p:sp>
+        <p:nvSpPr>
+          <p:cNvPr id="46" name="">
+            <a:extLst xmlns:a="http://schemas.openxmlformats.org/drawingml/2006/main">
+              <a:ext uri="{FF2B5EF4-FFF2-40B4-BE49-F238E27FC236}">
+                <a16:creationId xmlns:a16="http://schemas.microsoft.com/office/drawing/2014/main" id="{D95E41C4-509A-4B5D-81EF-C5ECF81559B0}"/>
+              </a:ext>
+            </a:extLst>
+          </p:cNvPr>
+          <p:cNvSpPr>
+            <a:spLocks xmlns:a="http://schemas.openxmlformats.org/drawingml/2006/main" noGrp="1"/>
+          </p:cNvSpPr>
+          <p:nvPr/>
+        </p:nvSpPr>
+        <p:spPr>
+          <a:xfrm xmlns:a="http://schemas.openxmlformats.org/drawingml/2006/main">
+            <a:off x="714375" y="5572125"/>
+            <a:ext cx="4762500" cy="238125"/>
+          </a:xfrm>
+          <a:prstGeom xmlns:a="http://schemas.openxmlformats.org/drawingml/2006/main" prst="rect">
+            <a:avLst/>
+          </a:prstGeom>
+          <a:noFill xmlns:a="http://schemas.openxmlformats.org/drawingml/2006/main"/>
+          <a:ln xmlns:a="http://schemas.openxmlformats.org/drawingml/2006/main" w="0">
+            <a:noFill/>
+          </a:ln>
+        </p:spPr>
+        <p:txBody>
+          <a:bodyPr xmlns:a="http://schemas.openxmlformats.org/drawingml/2006/main">
+            <a:normAutofit fontScale="53472"/>
+          </a:bodyPr>
+          <a:lstStyle xmlns:a="http://schemas.openxmlformats.org/drawingml/2006/main"/>
+          <a:p xmlns:a="http://schemas.openxmlformats.org/drawingml/2006/main">
+            <a:pPr>
+              <a:defRPr b="1">
+                <a:solidFill>
+                  <a:srgbClr val="113B68"/>
+                </a:solidFill>
+              </a:defRPr>
+            </a:pPr>
+            <a:r>
+              <a:rPr b="1">
+                <a:solidFill>
+                  <a:srgbClr val="113B68"/>
+                </a:solidFill>
+              </a:rPr>
+              <a:t>2.3. 质量收益评估</a:t>
+            </a:r>
+          </a:p>
+        </p:txBody>
+      </p:sp>
+      <p:graphicFrame>
+        <p:nvGraphicFramePr>
+          <p:cNvPr id="70" name=""/>
+          <p:cNvGraphicFramePr/>
+          <p:nvPr/>
+        </p:nvGraphicFramePr>
+        <p:xfrm>
+          <a:off xmlns:a="http://schemas.openxmlformats.org/drawingml/2006/main" x="571500" y="5857875"/>
+          <a:ext xmlns:a="http://schemas.openxmlformats.org/drawingml/2006/main" cx="5238750" cy="590550"/>
+        </p:xfrm>
+        <a:graphic xmlns:a="http://schemas.openxmlformats.org/drawingml/2006/main">
+          <a:graphicData uri="http://schemas.openxmlformats.org/drawingml/2006/table">
+            <a:tbl>
+              <a:tblPr firstRow="1" bandRow="1"/>
+              <a:tblGrid>
+                <a:gridCol w="1476375"/>
+                <a:gridCol w="2047875"/>
+                <a:gridCol w="1714500"/>
+              </a:tblGrid>
+              <a:tr h="196850">
+                <a:tc>
+                  <a:txBody>
+                    <a:bodyPr>
+                      <a:normAutofit/>
+                    </a:bodyPr>
+                    <a:lstStyle/>
+                    <a:p>
+                      <a:pPr algn="ctr"/>
+                      <a:r>
+                        <a:rPr sz="788" b="1">
+                          <a:solidFill>
+                            <a:srgbClr val="113B68"/>
+                          </a:solidFill>
+                        </a:rPr>
+                        <a:t>效益项</a:t>
+                      </a:r>
+                    </a:p>
+                  </a:txBody>
+                  <a:tcPr marL="91440" marR="91440" marT="45720" marB="45720">
+                    <a:solidFill>
+                      <a:srgbClr val="E3EFFA"/>
+                    </a:solidFill>
+                  </a:tcPr>
+                </a:tc>
+                <a:tc>
+                  <a:txBody>
+                    <a:bodyPr>
+                      <a:normAutofit/>
+                    </a:bodyPr>
+                    <a:lstStyle/>
+                    <a:p>
+                      <a:pPr algn="ctr"/>
+                      <a:r>
+                        <a:rPr sz="788" b="1">
+                          <a:solidFill>
+                            <a:srgbClr val="113B68"/>
+                          </a:solidFill>
+                        </a:rPr>
+                        <a:t>说明</a:t>
+                      </a:r>
+                    </a:p>
+                  </a:txBody>
+                  <a:tcPr marL="91440" marR="91440" marT="45720" marB="45720">
+                    <a:solidFill>
+                      <a:srgbClr val="E3EFFA"/>
+                    </a:solidFill>
+                  </a:tcPr>
+                </a:tc>
+                <a:tc>
+                  <a:txBody>
+                    <a:bodyPr>
+                      <a:normAutofit/>
+                    </a:bodyPr>
+                    <a:lstStyle/>
+                    <a:p>
+                      <a:pPr algn="ctr"/>
+                      <a:r>
+                        <a:rPr sz="788" b="1">
+                          <a:solidFill>
+                            <a:srgbClr val="113B68"/>
+                          </a:solidFill>
+                        </a:rPr>
+                        <a:t>价值评估</a:t>
+                      </a:r>
+                    </a:p>
+                  </a:txBody>
+                  <a:tcPr marL="91440" marR="91440" marT="45720" marB="45720">
+                    <a:solidFill>
+                      <a:srgbClr val="E3EFFA"/>
+                    </a:solidFill>
+                  </a:tcPr>
+                </a:tc>
+              </a:tr>
+              <a:tr h="196850">
+                <a:tc>
+                  <a:txBody>
+                    <a:bodyPr>
+                      <a:normAutofit/>
+                    </a:bodyPr>
+                    <a:lstStyle/>
+                    <a:p>
+                      <a:pPr algn="l"/>
+                      <a:r>
+                        <a:rPr sz="694">
+                          <a:solidFill>
+                            <a:srgbClr val="34495E"/>
+                          </a:solidFill>
+                        </a:rPr>
+                        <a:t>费率计算准确率</a:t>
+                      </a:r>
+                    </a:p>
+                  </a:txBody>
+                  <a:tcPr marL="91440" marR="91440" marT="45720" marB="45720">
+                    <a:solidFill>
+                      <a:srgbClr val="FFFFFF"/>
+                    </a:solidFill>
+                  </a:tcPr>
+                </a:tc>
+                <a:tc>
+                  <a:txBody>
+                    <a:bodyPr>
+                      <a:normAutofit/>
+                    </a:bodyPr>
+                    <a:lstStyle/>
+                    <a:p>
+                      <a:pPr algn="ctr"/>
+                      <a:r>
+                        <a:rPr sz="694">
+                          <a:solidFill>
+                            <a:srgbClr val="34495E"/>
+                          </a:solidFill>
+                        </a:rPr>
+                        <a:t>80%提升至95%</a:t>
+                      </a:r>
+                    </a:p>
+                  </a:txBody>
+                  <a:tcPr marL="91440" marR="91440" marT="45720" marB="45720">
+                    <a:solidFill>
+                      <a:srgbClr val="FFFFFF"/>
+                    </a:solidFill>
+                  </a:tcPr>
+                </a:tc>
+                <a:tc>
+                  <a:txBody>
+                    <a:bodyPr>
+                      <a:normAutofit/>
+                    </a:bodyPr>
+                    <a:lstStyle/>
+                    <a:p>
+                      <a:pPr algn="ctr"/>
+                      <a:r>
+                        <a:rPr sz="694">
+                          <a:solidFill>
+                            <a:srgbClr val="34495E"/>
+                          </a:solidFill>
+                        </a:rPr>
+                        <a:t>提升15个百分点</a:t>
+                      </a:r>
+                    </a:p>
+                  </a:txBody>
+                  <a:tcPr marL="91440" marR="91440" marT="45720" marB="45720">
+                    <a:solidFill>
+                      <a:srgbClr val="FFFFFF"/>
+                    </a:solidFill>
+                  </a:tcPr>
+                </a:tc>
+              </a:tr>
+              <a:tr h="196850">
+                <a:tc>
+                  <a:txBody>
+                    <a:bodyPr>
+                      <a:normAutofit/>
+                    </a:bodyPr>
+                    <a:lstStyle/>
+                    <a:p>
+                      <a:pPr algn="l"/>
+                      <a:r>
+                        <a:rPr sz="694">
+                          <a:solidFill>
+                            <a:srgbClr val="34495E"/>
+                          </a:solidFill>
+                        </a:rPr>
+                        <a:t>异常实时发现</a:t>
+                      </a:r>
+                    </a:p>
+                  </a:txBody>
+                  <a:tcPr marL="91440" marR="91440" marT="45720" marB="45720">
+                    <a:solidFill>
+                      <a:srgbClr val="F7FAFD"/>
+                    </a:solidFill>
+                  </a:tcPr>
+                </a:tc>
+                <a:tc>
+                  <a:txBody>
+                    <a:bodyPr>
+                      <a:normAutofit/>
+                    </a:bodyPr>
+                    <a:lstStyle/>
+                    <a:p>
+                      <a:pPr algn="ctr"/>
+                      <a:r>
+                        <a:rPr sz="694">
+                          <a:solidFill>
+                            <a:srgbClr val="34495E"/>
+                          </a:solidFill>
+                        </a:rPr>
+                        <a:t>月级缩短至分钟级</a:t>
+                      </a:r>
+                    </a:p>
+                  </a:txBody>
+                  <a:tcPr marL="91440" marR="91440" marT="45720" marB="45720">
+                    <a:solidFill>
+                      <a:srgbClr val="F7FAFD"/>
+                    </a:solidFill>
+                  </a:tcPr>
+                </a:tc>
+                <a:tc>
+                  <a:txBody>
+                    <a:bodyPr>
+                      <a:normAutofit/>
+                    </a:bodyPr>
+                    <a:lstStyle/>
+                    <a:p>
+                      <a:pPr algn="ctr"/>
+                      <a:r>
+                        <a:rPr sz="694">
+                          <a:solidFill>
+                            <a:srgbClr val="34495E"/>
+                          </a:solidFill>
+                        </a:rPr>
+                        <a:t>降低漏判风险</a:t>
+                      </a:r>
+                    </a:p>
+                  </a:txBody>
+                  <a:tcPr marL="91440" marR="91440" marT="45720" marB="45720">
+                    <a:solidFill>
+                      <a:srgbClr val="F7FAFD"/>
+                    </a:solidFill>
+                  </a:tcPr>
+                </a:tc>
+              </a:tr>
+            </a:tbl>
+          </a:graphicData>
+        </a:graphic>
+      </p:graphicFrame>
+      <p:sp>
+        <p:nvSpPr>
+          <p:cNvPr id="48" name="">
+            <a:extLst xmlns:a="http://schemas.openxmlformats.org/drawingml/2006/main">
+              <a:ext uri="{FF2B5EF4-FFF2-40B4-BE49-F238E27FC236}">
+                <a16:creationId xmlns:a16="http://schemas.microsoft.com/office/drawing/2014/main" id="{2BBD67B8-951A-447C-B3F7-5E6FCD4C8BAF}"/>
+              </a:ext>
+            </a:extLst>
+          </p:cNvPr>
+          <p:cNvSpPr>
+            <a:spLocks xmlns:a="http://schemas.openxmlformats.org/drawingml/2006/main" noGrp="1"/>
+          </p:cNvSpPr>
+          <p:nvPr/>
+        </p:nvSpPr>
+        <p:spPr>
+          <a:xfrm xmlns:a="http://schemas.openxmlformats.org/drawingml/2006/main">
+            <a:off x="6191250" y="4067175"/>
+            <a:ext cx="47625" cy="190500"/>
+          </a:xfrm>
+          <a:prstGeom xmlns:a="http://schemas.openxmlformats.org/drawingml/2006/main" prst="rect">
+            <a:avLst/>
+          </a:prstGeom>
+          <a:solidFill xmlns:a="http://schemas.openxmlformats.org/drawingml/2006/main">
+            <a:srgbClr val="E79A25"/>
+          </a:solidFill>
+          <a:ln xmlns:a="http://schemas.openxmlformats.org/drawingml/2006/main" w="0">
+            <a:noFill/>
+          </a:ln>
+        </p:spPr>
+      </p:sp>
+      <p:sp>
+        <p:nvSpPr>
+          <p:cNvPr id="49" name="">
+            <a:extLst xmlns:a="http://schemas.openxmlformats.org/drawingml/2006/main">
+              <a:ext uri="{FF2B5EF4-FFF2-40B4-BE49-F238E27FC236}">
+                <a16:creationId xmlns:a16="http://schemas.microsoft.com/office/drawing/2014/main" id="{24D08D44-E36D-4F7F-B5D5-BC24160E4355}"/>
+              </a:ext>
+            </a:extLst>
+          </p:cNvPr>
+          <p:cNvSpPr>
+            <a:spLocks xmlns:a="http://schemas.openxmlformats.org/drawingml/2006/main" noGrp="1"/>
+          </p:cNvSpPr>
+          <p:nvPr/>
+        </p:nvSpPr>
+        <p:spPr>
+          <a:xfrm xmlns:a="http://schemas.openxmlformats.org/drawingml/2006/main">
+            <a:off x="6334125" y="4048125"/>
+            <a:ext cx="4762500" cy="238125"/>
+          </a:xfrm>
+          <a:prstGeom xmlns:a="http://schemas.openxmlformats.org/drawingml/2006/main" prst="rect">
+            <a:avLst/>
+          </a:prstGeom>
+          <a:noFill xmlns:a="http://schemas.openxmlformats.org/drawingml/2006/main"/>
+          <a:ln xmlns:a="http://schemas.openxmlformats.org/drawingml/2006/main" w="0">
+            <a:noFill/>
+          </a:ln>
+        </p:spPr>
+        <p:txBody>
+          <a:bodyPr xmlns:a="http://schemas.openxmlformats.org/drawingml/2006/main">
+            <a:normAutofit fontScale="53472"/>
+          </a:bodyPr>
+          <a:lstStyle xmlns:a="http://schemas.openxmlformats.org/drawingml/2006/main"/>
+          <a:p xmlns:a="http://schemas.openxmlformats.org/drawingml/2006/main">
+            <a:pPr>
+              <a:defRPr b="1">
+                <a:solidFill>
+                  <a:srgbClr val="113B68"/>
+                </a:solidFill>
+              </a:defRPr>
+            </a:pPr>
+            <a:r>
+              <a:rPr b="1">
+                <a:solidFill>
+                  <a:srgbClr val="113B68"/>
+                </a:solidFill>
+              </a:rPr>
+              <a:t>3.1. ROI 计算（按月）</a:t>
+            </a:r>
+          </a:p>
+        </p:txBody>
+      </p:sp>
+      <p:graphicFrame>
+        <p:nvGraphicFramePr>
+          <p:cNvPr id="73" name=""/>
+          <p:cNvGraphicFramePr/>
+          <p:nvPr/>
+        </p:nvGraphicFramePr>
+        <p:xfrm>
+          <a:off xmlns:a="http://schemas.openxmlformats.org/drawingml/2006/main" x="6191250" y="4333875"/>
+          <a:ext xmlns:a="http://schemas.openxmlformats.org/drawingml/2006/main" cx="5429250" cy="1200150"/>
+        </p:xfrm>
+        <a:graphic xmlns:a="http://schemas.openxmlformats.org/drawingml/2006/main">
+          <a:graphicData uri="http://schemas.openxmlformats.org/drawingml/2006/table">
+            <a:tbl>
+              <a:tblPr firstRow="1" bandRow="1"/>
+              <a:tblGrid>
+                <a:gridCol w="1762125"/>
+                <a:gridCol w="1476375"/>
+                <a:gridCol w="2190750"/>
+              </a:tblGrid>
+              <a:tr h="200025">
+                <a:tc>
+                  <a:txBody>
+                    <a:bodyPr>
+                      <a:normAutofit/>
+                    </a:bodyPr>
+                    <a:lstStyle/>
+                    <a:p>
+                      <a:pPr algn="ctr"/>
+                      <a:r>
+                        <a:rPr sz="788" b="1">
+                          <a:solidFill>
+                            <a:srgbClr val="113B68"/>
+                          </a:solidFill>
+                        </a:rPr>
+                        <a:t>项目</a:t>
+                      </a:r>
+                    </a:p>
+                  </a:txBody>
+                  <a:tcPr marL="91440" marR="91440" marT="45720" marB="45720">
+                    <a:solidFill>
+                      <a:srgbClr val="E3EFFA"/>
+                    </a:solidFill>
+                  </a:tcPr>
+                </a:tc>
+                <a:tc>
+                  <a:txBody>
+                    <a:bodyPr>
+                      <a:normAutofit/>
+                    </a:bodyPr>
+                    <a:lstStyle/>
+                    <a:p>
+                      <a:pPr algn="ctr"/>
+                      <a:r>
+                        <a:rPr sz="788" b="1">
+                          <a:solidFill>
+                            <a:srgbClr val="113B68"/>
+                          </a:solidFill>
+                        </a:rPr>
+                        <a:t>金额</a:t>
+                      </a:r>
+                    </a:p>
+                  </a:txBody>
+                  <a:tcPr marL="91440" marR="91440" marT="45720" marB="45720">
+                    <a:solidFill>
+                      <a:srgbClr val="E3EFFA"/>
+                    </a:solidFill>
+                  </a:tcPr>
+                </a:tc>
+                <a:tc>
+                  <a:txBody>
+                    <a:bodyPr>
+                      <a:normAutofit/>
+                    </a:bodyPr>
+                    <a:lstStyle/>
+                    <a:p>
+                      <a:pPr algn="ctr"/>
+                      <a:r>
+                        <a:rPr sz="788" b="1">
+                          <a:solidFill>
+                            <a:srgbClr val="113B68"/>
+                          </a:solidFill>
+                        </a:rPr>
+                        <a:t>计算依据</a:t>
+                      </a:r>
+                    </a:p>
+                  </a:txBody>
+                  <a:tcPr marL="91440" marR="91440" marT="45720" marB="45720">
+                    <a:solidFill>
+                      <a:srgbClr val="E3EFFA"/>
+                    </a:solidFill>
+                  </a:tcPr>
+                </a:tc>
+              </a:tr>
+              <a:tr h="200025">
+                <a:tc>
+                  <a:txBody>
+                    <a:bodyPr>
+                      <a:normAutofit/>
+                    </a:bodyPr>
+                    <a:lstStyle/>
+                    <a:p>
+                      <a:pPr algn="l"/>
+                      <a:r>
+                        <a:rPr sz="694">
+                          <a:solidFill>
+                            <a:srgbClr val="34495E"/>
+                          </a:solidFill>
+                        </a:rPr>
+                        <a:t>一次性投入</a:t>
+                      </a:r>
+                    </a:p>
+                  </a:txBody>
+                  <a:tcPr marL="91440" marR="91440" marT="45720" marB="45720">
+                    <a:solidFill>
+                      <a:srgbClr val="FFFFFF"/>
+                    </a:solidFill>
+                  </a:tcPr>
+                </a:tc>
+                <a:tc>
+                  <a:txBody>
+                    <a:bodyPr>
+                      <a:normAutofit/>
+                    </a:bodyPr>
+                    <a:lstStyle/>
+                    <a:p>
+                      <a:pPr algn="ctr"/>
+                      <a:r>
+                        <a:rPr sz="694">
+                          <a:solidFill>
+                            <a:srgbClr val="34495E"/>
+                          </a:solidFill>
+                        </a:rPr>
+                        <a:t>3,600元</a:t>
+                      </a:r>
+                    </a:p>
+                  </a:txBody>
+                  <a:tcPr marL="91440" marR="91440" marT="45720" marB="45720">
+                    <a:solidFill>
+                      <a:srgbClr val="FFFFFF"/>
+                    </a:solidFill>
+                  </a:tcPr>
+                </a:tc>
+                <a:tc>
+                  <a:txBody>
+                    <a:bodyPr>
+                      <a:normAutofit/>
+                    </a:bodyPr>
+                    <a:lstStyle/>
+                    <a:p>
+                      <a:pPr algn="ctr"/>
+                      <a:r>
+                        <a:rPr sz="694">
+                          <a:solidFill>
+                            <a:srgbClr val="34495E"/>
+                          </a:solidFill>
+                        </a:rPr>
+                        <a:t>开发人力成本</a:t>
+                      </a:r>
+                    </a:p>
+                  </a:txBody>
+                  <a:tcPr marL="91440" marR="91440" marT="45720" marB="45720">
+                    <a:solidFill>
+                      <a:srgbClr val="FFFFFF"/>
+                    </a:solidFill>
+                  </a:tcPr>
+                </a:tc>
+              </a:tr>
+              <a:tr h="200025">
+                <a:tc>
+                  <a:txBody>
+                    <a:bodyPr>
+                      <a:normAutofit/>
+                    </a:bodyPr>
+                    <a:lstStyle/>
+                    <a:p>
+                      <a:pPr algn="l"/>
+                      <a:r>
+                        <a:rPr sz="694">
+                          <a:solidFill>
+                            <a:srgbClr val="34495E"/>
+                          </a:solidFill>
+                        </a:rPr>
+                        <a:t>月度运营成本</a:t>
+                      </a:r>
+                    </a:p>
+                  </a:txBody>
+                  <a:tcPr marL="91440" marR="91440" marT="45720" marB="45720">
+                    <a:solidFill>
+                      <a:srgbClr val="F7FAFD"/>
+                    </a:solidFill>
+                  </a:tcPr>
+                </a:tc>
+                <a:tc>
+                  <a:txBody>
+                    <a:bodyPr>
+                      <a:normAutofit/>
+                    </a:bodyPr>
+                    <a:lstStyle/>
+                    <a:p>
+                      <a:pPr algn="ctr"/>
+                      <a:r>
+                        <a:rPr sz="694">
+                          <a:solidFill>
+                            <a:srgbClr val="34495E"/>
+                          </a:solidFill>
+                        </a:rPr>
+                        <a:t>3,200元</a:t>
+                      </a:r>
+                    </a:p>
+                  </a:txBody>
+                  <a:tcPr marL="91440" marR="91440" marT="45720" marB="45720">
+                    <a:solidFill>
+                      <a:srgbClr val="F7FAFD"/>
+                    </a:solidFill>
+                  </a:tcPr>
+                </a:tc>
+                <a:tc>
+                  <a:txBody>
+                    <a:bodyPr>
+                      <a:normAutofit/>
+                    </a:bodyPr>
+                    <a:lstStyle/>
+                    <a:p>
+                      <a:pPr algn="ctr"/>
+                      <a:r>
+                        <a:rPr sz="694">
+                          <a:solidFill>
+                            <a:srgbClr val="34495E"/>
+                          </a:solidFill>
+                        </a:rPr>
+                        <a:t>1,500元硬件 + 1,700元Token</a:t>
+                      </a:r>
+                    </a:p>
+                  </a:txBody>
+                  <a:tcPr marL="91440" marR="91440" marT="45720" marB="45720">
+                    <a:solidFill>
+                      <a:srgbClr val="F7FAFD"/>
+                    </a:solidFill>
+                  </a:tcPr>
+                </a:tc>
+              </a:tr>
+              <a:tr h="200025">
+                <a:tc>
+                  <a:txBody>
+                    <a:bodyPr>
+                      <a:normAutofit/>
+                    </a:bodyPr>
+                    <a:lstStyle/>
+                    <a:p>
+                      <a:pPr algn="l"/>
+                      <a:r>
+                        <a:rPr sz="694">
+                          <a:solidFill>
+                            <a:srgbClr val="34495E"/>
+                          </a:solidFill>
+                        </a:rPr>
+                        <a:t>月度收益</a:t>
+                      </a:r>
+                    </a:p>
+                  </a:txBody>
+                  <a:tcPr marL="91440" marR="91440" marT="45720" marB="45720">
+                    <a:solidFill>
+                      <a:srgbClr val="FFFFFF"/>
+                    </a:solidFill>
+                  </a:tcPr>
+                </a:tc>
+                <a:tc>
+                  <a:txBody>
+                    <a:bodyPr>
+                      <a:normAutofit/>
+                    </a:bodyPr>
+                    <a:lstStyle/>
+                    <a:p>
+                      <a:pPr algn="ctr"/>
+                      <a:r>
+                        <a:rPr sz="694">
+                          <a:solidFill>
+                            <a:srgbClr val="34495E"/>
+                          </a:solidFill>
+                        </a:rPr>
+                        <a:t>21,000元</a:t>
+                      </a:r>
+                    </a:p>
+                  </a:txBody>
+                  <a:tcPr marL="91440" marR="91440" marT="45720" marB="45720">
+                    <a:solidFill>
+                      <a:srgbClr val="FFFFFF"/>
+                    </a:solidFill>
+                  </a:tcPr>
+                </a:tc>
+                <a:tc>
+                  <a:txBody>
+                    <a:bodyPr>
+                      <a:normAutofit/>
+                    </a:bodyPr>
+                    <a:lstStyle/>
+                    <a:p>
+                      <a:pPr algn="ctr"/>
+                      <a:r>
+                        <a:rPr sz="694">
+                          <a:solidFill>
+                            <a:srgbClr val="34495E"/>
+                          </a:solidFill>
+                        </a:rPr>
+                        <a:t>18,000元人力 + 3,000元质量收益</a:t>
+                      </a:r>
+                    </a:p>
+                  </a:txBody>
+                  <a:tcPr marL="91440" marR="91440" marT="45720" marB="45720">
+                    <a:solidFill>
+                      <a:srgbClr val="FFFFFF"/>
+                    </a:solidFill>
+                  </a:tcPr>
+                </a:tc>
+              </a:tr>
+              <a:tr h="200025">
+                <a:tc>
+                  <a:txBody>
+                    <a:bodyPr>
+                      <a:normAutofit/>
+                    </a:bodyPr>
+                    <a:lstStyle/>
+                    <a:p>
+                      <a:pPr algn="l"/>
+                      <a:r>
+                        <a:rPr sz="694">
+                          <a:solidFill>
+                            <a:srgbClr val="34495E"/>
+                          </a:solidFill>
+                        </a:rPr>
+                        <a:t>月度净收益</a:t>
+                      </a:r>
+                    </a:p>
+                  </a:txBody>
+                  <a:tcPr marL="91440" marR="91440" marT="45720" marB="45720">
+                    <a:solidFill>
+                      <a:srgbClr val="F7FAFD"/>
+                    </a:solidFill>
+                  </a:tcPr>
+                </a:tc>
+                <a:tc>
+                  <a:txBody>
+                    <a:bodyPr>
+                      <a:normAutofit/>
+                    </a:bodyPr>
+                    <a:lstStyle/>
+                    <a:p>
+                      <a:pPr algn="ctr"/>
+                      <a:r>
+                        <a:rPr sz="694">
+                          <a:solidFill>
+                            <a:srgbClr val="34495E"/>
+                          </a:solidFill>
+                        </a:rPr>
+                        <a:t>17,800元</a:t>
+                      </a:r>
+                    </a:p>
+                  </a:txBody>
+                  <a:tcPr marL="91440" marR="91440" marT="45720" marB="45720">
+                    <a:solidFill>
+                      <a:srgbClr val="F7FAFD"/>
+                    </a:solidFill>
+                  </a:tcPr>
+                </a:tc>
+                <a:tc>
+                  <a:txBody>
+                    <a:bodyPr>
+                      <a:normAutofit/>
+                    </a:bodyPr>
+                    <a:lstStyle/>
+                    <a:p>
+                      <a:pPr algn="ctr"/>
+                      <a:r>
+                        <a:rPr sz="694">
+                          <a:solidFill>
+                            <a:srgbClr val="34495E"/>
+                          </a:solidFill>
+                        </a:rPr>
+                        <a:t>收益 − 运营成本</a:t>
+                      </a:r>
+                    </a:p>
+                  </a:txBody>
+                  <a:tcPr marL="91440" marR="91440" marT="45720" marB="45720">
+                    <a:solidFill>
+                      <a:srgbClr val="F7FAFD"/>
+                    </a:solidFill>
+                  </a:tcPr>
+                </a:tc>
+              </a:tr>
+              <a:tr h="200025">
+                <a:tc>
+                  <a:txBody>
+                    <a:bodyPr>
+                      <a:normAutofit/>
+                    </a:bodyPr>
+                    <a:lstStyle/>
+                    <a:p>
+                      <a:pPr algn="l"/>
+                      <a:r>
+                        <a:rPr sz="694" b="1">
+                          <a:solidFill>
+                            <a:srgbClr val="087A3F"/>
+                          </a:solidFill>
+                        </a:rPr>
+                        <a:t>运营 ROI</a:t>
+                      </a:r>
+                    </a:p>
+                  </a:txBody>
+                  <a:tcPr marL="91440" marR="91440" marT="45720" marB="45720">
+                    <a:solidFill>
+                      <a:srgbClr val="E8F5ED"/>
+                    </a:solidFill>
+                  </a:tcPr>
+                </a:tc>
+                <a:tc>
+                  <a:txBody>
+                    <a:bodyPr>
+                      <a:normAutofit/>
+                    </a:bodyPr>
+                    <a:lstStyle/>
+                    <a:p>
+                      <a:pPr algn="ctr"/>
+                      <a:r>
+                        <a:rPr sz="694" b="1">
+                          <a:solidFill>
+                            <a:srgbClr val="087A3F"/>
+                          </a:solidFill>
+                        </a:rPr>
+                        <a:t>556%</a:t>
+                      </a:r>
+                    </a:p>
+                  </a:txBody>
+                  <a:tcPr marL="91440" marR="91440" marT="45720" marB="45720">
+                    <a:solidFill>
+                      <a:srgbClr val="E8F5ED"/>
+                    </a:solidFill>
+                  </a:tcPr>
+                </a:tc>
+                <a:tc>
+                  <a:txBody>
+                    <a:bodyPr>
+                      <a:normAutofit/>
+                    </a:bodyPr>
+                    <a:lstStyle/>
+                    <a:p>
+                      <a:pPr algn="ctr"/>
+                      <a:r>
+                        <a:rPr sz="694" b="1">
+                          <a:solidFill>
+                            <a:srgbClr val="087A3F"/>
+                          </a:solidFill>
+                        </a:rPr>
+                        <a:t>月度净收益 ÷ 运营成本</a:t>
+                      </a:r>
+                    </a:p>
+                  </a:txBody>
+                  <a:tcPr marL="91440" marR="91440" marT="45720" marB="45720">
+                    <a:solidFill>
+                      <a:srgbClr val="E8F5ED"/>
+                    </a:solidFill>
+                  </a:tcPr>
+                </a:tc>
+              </a:tr>
+            </a:tbl>
+          </a:graphicData>
+        </a:graphic>
+      </p:graphicFrame>
+      <p:sp>
+        <p:nvSpPr>
+          <p:cNvPr id="51" name="">
+            <a:extLst xmlns:a="http://schemas.openxmlformats.org/drawingml/2006/main">
+              <a:ext uri="{FF2B5EF4-FFF2-40B4-BE49-F238E27FC236}">
+                <a16:creationId xmlns:a16="http://schemas.microsoft.com/office/drawing/2014/main" id="{4FE4D987-7900-4550-A5CE-7697B093C9A2}"/>
+              </a:ext>
+            </a:extLst>
+          </p:cNvPr>
+          <p:cNvSpPr>
+            <a:spLocks xmlns:a="http://schemas.openxmlformats.org/drawingml/2006/main" noGrp="1"/>
+          </p:cNvSpPr>
+          <p:nvPr/>
+        </p:nvSpPr>
+        <p:spPr>
+          <a:xfrm xmlns:a="http://schemas.openxmlformats.org/drawingml/2006/main">
+            <a:off x="6191250" y="5591175"/>
+            <a:ext cx="47625" cy="190500"/>
+          </a:xfrm>
+          <a:prstGeom xmlns:a="http://schemas.openxmlformats.org/drawingml/2006/main" prst="rect">
+            <a:avLst/>
+          </a:prstGeom>
+          <a:solidFill xmlns:a="http://schemas.openxmlformats.org/drawingml/2006/main">
+            <a:srgbClr val="E79A25"/>
+          </a:solidFill>
+          <a:ln xmlns:a="http://schemas.openxmlformats.org/drawingml/2006/main" w="0">
+            <a:noFill/>
+          </a:ln>
+        </p:spPr>
+      </p:sp>
+      <p:sp>
+        <p:nvSpPr>
+          <p:cNvPr id="52" name="">
+            <a:extLst xmlns:a="http://schemas.openxmlformats.org/drawingml/2006/main">
+              <a:ext uri="{FF2B5EF4-FFF2-40B4-BE49-F238E27FC236}">
+                <a16:creationId xmlns:a16="http://schemas.microsoft.com/office/drawing/2014/main" id="{CBF83C40-A84B-4CAF-AE94-B10289B4B95E}"/>
+              </a:ext>
+            </a:extLst>
+          </p:cNvPr>
+          <p:cNvSpPr>
+            <a:spLocks xmlns:a="http://schemas.openxmlformats.org/drawingml/2006/main" noGrp="1"/>
+          </p:cNvSpPr>
+          <p:nvPr/>
+        </p:nvSpPr>
+        <p:spPr>
+          <a:xfrm xmlns:a="http://schemas.openxmlformats.org/drawingml/2006/main">
+            <a:off x="6334125" y="5572125"/>
+            <a:ext cx="4762500" cy="238125"/>
+          </a:xfrm>
+          <a:prstGeom xmlns:a="http://schemas.openxmlformats.org/drawingml/2006/main" prst="rect">
+            <a:avLst/>
+          </a:prstGeom>
+          <a:noFill xmlns:a="http://schemas.openxmlformats.org/drawingml/2006/main"/>
+          <a:ln xmlns:a="http://schemas.openxmlformats.org/drawingml/2006/main" w="0">
+            <a:noFill/>
+          </a:ln>
+        </p:spPr>
+        <p:txBody>
+          <a:bodyPr xmlns:a="http://schemas.openxmlformats.org/drawingml/2006/main">
+            <a:normAutofit fontScale="53472"/>
+          </a:bodyPr>
+          <a:lstStyle xmlns:a="http://schemas.openxmlformats.org/drawingml/2006/main"/>
+          <a:p xmlns:a="http://schemas.openxmlformats.org/drawingml/2006/main">
+            <a:pPr>
+              <a:defRPr b="1">
+                <a:solidFill>
+                  <a:srgbClr val="113B68"/>
+                </a:solidFill>
+              </a:defRPr>
+            </a:pPr>
+            <a:r>
+              <a:rPr b="1">
+                <a:solidFill>
+                  <a:srgbClr val="113B68"/>
+                </a:solidFill>
+              </a:rPr>
+              <a:t>3.2. 年度收益预测</a:t>
+            </a:r>
+          </a:p>
+        </p:txBody>
+      </p:sp>
+      <p:graphicFrame>
+        <p:nvGraphicFramePr>
+          <p:cNvPr id="76" name=""/>
+          <p:cNvGraphicFramePr/>
+          <p:nvPr/>
+        </p:nvGraphicFramePr>
+        <p:xfrm>
+          <a:off xmlns:a="http://schemas.openxmlformats.org/drawingml/2006/main" x="6191250" y="5857875"/>
+          <a:ext xmlns:a="http://schemas.openxmlformats.org/drawingml/2006/main" cx="5429250" cy="666750"/>
+        </p:xfrm>
+        <a:graphic xmlns:a="http://schemas.openxmlformats.org/drawingml/2006/main">
+          <a:graphicData uri="http://schemas.openxmlformats.org/drawingml/2006/table">
+            <a:tbl>
+              <a:tblPr firstRow="1" bandRow="1"/>
+              <a:tblGrid>
+                <a:gridCol w="952500"/>
+                <a:gridCol w="1238250"/>
+                <a:gridCol w="1619250"/>
+                <a:gridCol w="1619250"/>
+              </a:tblGrid>
+              <a:tr h="166688">
+                <a:tc>
+                  <a:txBody>
+                    <a:bodyPr>
+                      <a:normAutofit/>
+                    </a:bodyPr>
+                    <a:lstStyle/>
+                    <a:p>
+                      <a:pPr algn="ctr"/>
+                      <a:r>
+                        <a:rPr sz="788" b="1">
+                          <a:solidFill>
+                            <a:srgbClr val="113B68"/>
+                          </a:solidFill>
+                        </a:rPr>
+                        <a:t>年度</a:t>
+                      </a:r>
+                    </a:p>
+                  </a:txBody>
+                  <a:tcPr marL="91440" marR="91440" marT="45720" marB="45720">
+                    <a:solidFill>
+                      <a:srgbClr val="E3EFFA"/>
+                    </a:solidFill>
+                  </a:tcPr>
+                </a:tc>
+                <a:tc>
+                  <a:txBody>
+                    <a:bodyPr>
+                      <a:normAutofit/>
+                    </a:bodyPr>
+                    <a:lstStyle/>
+                    <a:p>
+                      <a:pPr algn="ctr"/>
+                      <a:r>
+                        <a:rPr sz="788" b="1">
+                          <a:solidFill>
+                            <a:srgbClr val="113B68"/>
+                          </a:solidFill>
+                        </a:rPr>
+                        <a:t>累计投入</a:t>
+                      </a:r>
+                    </a:p>
+                  </a:txBody>
+                  <a:tcPr marL="91440" marR="91440" marT="45720" marB="45720">
+                    <a:solidFill>
+                      <a:srgbClr val="E3EFFA"/>
+                    </a:solidFill>
+                  </a:tcPr>
+                </a:tc>
+                <a:tc>
+                  <a:txBody>
+                    <a:bodyPr>
+                      <a:normAutofit/>
+                    </a:bodyPr>
+                    <a:lstStyle/>
+                    <a:p>
+                      <a:pPr algn="ctr"/>
+                      <a:r>
+                        <a:rPr sz="788" b="1">
+                          <a:solidFill>
+                            <a:srgbClr val="113B68"/>
+                          </a:solidFill>
+                        </a:rPr>
+                        <a:t>累计收益</a:t>
+                      </a:r>
+                    </a:p>
+                  </a:txBody>
+                  <a:tcPr marL="91440" marR="91440" marT="45720" marB="45720">
+                    <a:solidFill>
+                      <a:srgbClr val="E3EFFA"/>
+                    </a:solidFill>
+                  </a:tcPr>
+                </a:tc>
+                <a:tc>
+                  <a:txBody>
+                    <a:bodyPr>
+                      <a:normAutofit/>
+                    </a:bodyPr>
+                    <a:lstStyle/>
+                    <a:p>
+                      <a:pPr algn="ctr"/>
+                      <a:r>
+                        <a:rPr sz="788" b="1">
+                          <a:solidFill>
+                            <a:srgbClr val="113B68"/>
+                          </a:solidFill>
+                        </a:rPr>
+                        <a:t>累计净收益</a:t>
+                      </a:r>
+                    </a:p>
+                  </a:txBody>
+                  <a:tcPr marL="91440" marR="91440" marT="45720" marB="45720">
+                    <a:solidFill>
+                      <a:srgbClr val="E3EFFA"/>
+                    </a:solidFill>
+                  </a:tcPr>
+                </a:tc>
+              </a:tr>
+              <a:tr h="166688">
+                <a:tc>
+                  <a:txBody>
+                    <a:bodyPr>
+                      <a:normAutofit/>
+                    </a:bodyPr>
+                    <a:lstStyle/>
+                    <a:p>
+                      <a:pPr algn="l"/>
+                      <a:r>
+                        <a:rPr sz="694">
+                          <a:solidFill>
+                            <a:srgbClr val="34495E"/>
+                          </a:solidFill>
+                        </a:rPr>
+                        <a:t>第1年</a:t>
+                      </a:r>
+                    </a:p>
+                  </a:txBody>
+                  <a:tcPr marL="91440" marR="91440" marT="45720" marB="45720">
+                    <a:solidFill>
+                      <a:srgbClr val="FFFFFF"/>
+                    </a:solidFill>
+                  </a:tcPr>
+                </a:tc>
+                <a:tc>
+                  <a:txBody>
+                    <a:bodyPr>
+                      <a:normAutofit/>
+                    </a:bodyPr>
+                    <a:lstStyle/>
+                    <a:p>
+                      <a:pPr algn="ctr"/>
+                      <a:r>
+                        <a:rPr sz="694">
+                          <a:solidFill>
+                            <a:srgbClr val="34495E"/>
+                          </a:solidFill>
+                        </a:rPr>
+                        <a:t>42,000元</a:t>
+                      </a:r>
+                    </a:p>
+                  </a:txBody>
+                  <a:tcPr marL="91440" marR="91440" marT="45720" marB="45720">
+                    <a:solidFill>
+                      <a:srgbClr val="FFFFFF"/>
+                    </a:solidFill>
+                  </a:tcPr>
+                </a:tc>
+                <a:tc>
+                  <a:txBody>
+                    <a:bodyPr>
+                      <a:normAutofit/>
+                    </a:bodyPr>
+                    <a:lstStyle/>
+                    <a:p>
+                      <a:pPr algn="ctr"/>
+                      <a:r>
+                        <a:rPr sz="694">
+                          <a:solidFill>
+                            <a:srgbClr val="34495E"/>
+                          </a:solidFill>
+                        </a:rPr>
+                        <a:t>252,000元</a:t>
+                      </a:r>
+                    </a:p>
+                  </a:txBody>
+                  <a:tcPr marL="91440" marR="91440" marT="45720" marB="45720">
+                    <a:solidFill>
+                      <a:srgbClr val="FFFFFF"/>
+                    </a:solidFill>
+                  </a:tcPr>
+                </a:tc>
+                <a:tc>
+                  <a:txBody>
+                    <a:bodyPr>
+                      <a:normAutofit/>
+                    </a:bodyPr>
+                    <a:lstStyle/>
+                    <a:p>
+                      <a:pPr algn="ctr"/>
+                      <a:r>
+                        <a:rPr sz="694">
+                          <a:solidFill>
+                            <a:srgbClr val="34495E"/>
+                          </a:solidFill>
+                        </a:rPr>
+                        <a:t>210,000元</a:t>
+                      </a:r>
+                    </a:p>
+                  </a:txBody>
+                  <a:tcPr marL="91440" marR="91440" marT="45720" marB="45720">
+                    <a:solidFill>
+                      <a:srgbClr val="FFFFFF"/>
+                    </a:solidFill>
+                  </a:tcPr>
+                </a:tc>
+              </a:tr>
+              <a:tr h="166688">
+                <a:tc>
+                  <a:txBody>
+                    <a:bodyPr>
+                      <a:normAutofit/>
+                    </a:bodyPr>
+                    <a:lstStyle/>
+                    <a:p>
+                      <a:pPr algn="l"/>
+                      <a:r>
+                        <a:rPr sz="694">
+                          <a:solidFill>
+                            <a:srgbClr val="34495E"/>
+                          </a:solidFill>
+                        </a:rPr>
+                        <a:t>第2年</a:t>
+                      </a:r>
+                    </a:p>
+                  </a:txBody>
+                  <a:tcPr marL="91440" marR="91440" marT="45720" marB="45720">
+                    <a:solidFill>
+                      <a:srgbClr val="F7FAFD"/>
+                    </a:solidFill>
+                  </a:tcPr>
+                </a:tc>
+                <a:tc>
+                  <a:txBody>
+                    <a:bodyPr>
+                      <a:normAutofit/>
+                    </a:bodyPr>
+                    <a:lstStyle/>
+                    <a:p>
+                      <a:pPr algn="ctr"/>
+                      <a:r>
+                        <a:rPr sz="694">
+                          <a:solidFill>
+                            <a:srgbClr val="34495E"/>
+                          </a:solidFill>
+                        </a:rPr>
+                        <a:t>38,400元</a:t>
+                      </a:r>
+                    </a:p>
+                  </a:txBody>
+                  <a:tcPr marL="91440" marR="91440" marT="45720" marB="45720">
+                    <a:solidFill>
+                      <a:srgbClr val="F7FAFD"/>
+                    </a:solidFill>
+                  </a:tcPr>
+                </a:tc>
+                <a:tc>
+                  <a:txBody>
+                    <a:bodyPr>
+                      <a:normAutofit/>
+                    </a:bodyPr>
+                    <a:lstStyle/>
+                    <a:p>
+                      <a:pPr algn="ctr"/>
+                      <a:r>
+                        <a:rPr sz="694">
+                          <a:solidFill>
+                            <a:srgbClr val="34495E"/>
+                          </a:solidFill>
+                        </a:rPr>
+                        <a:t>252,000元</a:t>
+                      </a:r>
+                    </a:p>
+                  </a:txBody>
+                  <a:tcPr marL="91440" marR="91440" marT="45720" marB="45720">
+                    <a:solidFill>
+                      <a:srgbClr val="F7FAFD"/>
+                    </a:solidFill>
+                  </a:tcPr>
+                </a:tc>
+                <a:tc>
+                  <a:txBody>
+                    <a:bodyPr>
+                      <a:normAutofit/>
+                    </a:bodyPr>
+                    <a:lstStyle/>
+                    <a:p>
+                      <a:pPr algn="ctr"/>
+                      <a:r>
+                        <a:rPr sz="694">
+                          <a:solidFill>
+                            <a:srgbClr val="34495E"/>
+                          </a:solidFill>
+                        </a:rPr>
+                        <a:t>213,600元</a:t>
+                      </a:r>
+                    </a:p>
+                  </a:txBody>
+                  <a:tcPr marL="91440" marR="91440" marT="45720" marB="45720">
+                    <a:solidFill>
+                      <a:srgbClr val="F7FAFD"/>
+                    </a:solidFill>
+                  </a:tcPr>
+                </a:tc>
+              </a:tr>
+              <a:tr h="166688">
+                <a:tc>
+                  <a:txBody>
+                    <a:bodyPr>
+                      <a:normAutofit/>
+                    </a:bodyPr>
+                    <a:lstStyle/>
+                    <a:p>
+                      <a:pPr algn="l"/>
+                      <a:r>
+                        <a:rPr sz="694" b="1">
+                          <a:solidFill>
+                            <a:srgbClr val="087A3F"/>
+                          </a:solidFill>
+                        </a:rPr>
+                        <a:t>2年合计</a:t>
+                      </a:r>
+                    </a:p>
+                  </a:txBody>
+                  <a:tcPr marL="91440" marR="91440" marT="45720" marB="45720">
+                    <a:solidFill>
+                      <a:srgbClr val="E8F5ED"/>
+                    </a:solidFill>
+                  </a:tcPr>
+                </a:tc>
+                <a:tc>
+                  <a:txBody>
+                    <a:bodyPr>
+                      <a:normAutofit/>
+                    </a:bodyPr>
+                    <a:lstStyle/>
+                    <a:p>
+                      <a:pPr algn="ctr"/>
+                      <a:r>
+                        <a:rPr sz="694" b="1">
+                          <a:solidFill>
+                            <a:srgbClr val="087A3F"/>
+                          </a:solidFill>
+                        </a:rPr>
+                        <a:t>80,400元</a:t>
+                      </a:r>
+                    </a:p>
+                  </a:txBody>
+                  <a:tcPr marL="91440" marR="91440" marT="45720" marB="45720">
+                    <a:solidFill>
+                      <a:srgbClr val="E8F5ED"/>
+                    </a:solidFill>
+                  </a:tcPr>
+                </a:tc>
+                <a:tc>
+                  <a:txBody>
+                    <a:bodyPr>
+                      <a:normAutofit/>
+                    </a:bodyPr>
+                    <a:lstStyle/>
+                    <a:p>
+                      <a:pPr algn="ctr"/>
+                      <a:r>
+                        <a:rPr sz="694" b="1">
+                          <a:solidFill>
+                            <a:srgbClr val="087A3F"/>
+                          </a:solidFill>
+                        </a:rPr>
+                        <a:t>504,000元</a:t>
+                      </a:r>
+                    </a:p>
+                  </a:txBody>
+                  <a:tcPr marL="91440" marR="91440" marT="45720" marB="45720">
+                    <a:solidFill>
+                      <a:srgbClr val="E8F5ED"/>
+                    </a:solidFill>
+                  </a:tcPr>
+                </a:tc>
+                <a:tc>
+                  <a:txBody>
+                    <a:bodyPr>
+                      <a:normAutofit/>
+                    </a:bodyPr>
+                    <a:lstStyle/>
+                    <a:p>
+                      <a:pPr algn="ctr"/>
+                      <a:r>
+                        <a:rPr sz="694" b="1">
+                          <a:solidFill>
+                            <a:srgbClr val="087A3F"/>
+                          </a:solidFill>
+                        </a:rPr>
+                        <a:t>423,600元</a:t>
+                      </a:r>
+                    </a:p>
+                  </a:txBody>
+                  <a:tcPr marL="91440" marR="91440" marT="45720" marB="45720">
+                    <a:solidFill>
+                      <a:srgbClr val="E8F5ED"/>
+                    </a:solidFill>
+                  </a:tcPr>
+                </a:tc>
+              </a:tr>
+            </a:tbl>
+          </a:graphicData>
+        </a:graphic>
+      </p:graphicFrame>
+    </p:spTree>
+    <p:extLst>
+      <p:ext uri="{BB962C8B-B14F-4D97-AF65-F5344CB8AC3E}">
+        <p14:creationId xmlns:p14="http://schemas.microsoft.com/office/powerpoint/2010/main" val="216713374"/>
+      </p:ext>
+    </p:extLst>
+  </p:cSld>
+</p:sld>
+</file>
+
+<file path=ppt/slides/slide24.xml><?xml version="1.0" encoding="utf-8"?>
+<p:sld xmlns:p="http://schemas.openxmlformats.org/presentationml/2006/main">
+  <p:cSld>
+    <p:bg>
+      <p:bgPr>
+        <a:solidFill xmlns:a="http://schemas.openxmlformats.org/drawingml/2006/main">
           <a:srgbClr val="13315C"/>
         </a:solidFill>
       </p:bgPr>
@@ -25172,7 +27186,7 @@
                 <a:ea typeface="微软雅黑"/>
                 <a:cs typeface="微软雅黑"/>
               </a:rPr>
-              <a:t>22</a:t>
+              <a:t>23</a:t>
             </a:r>
             <a:endParaRPr sz="900"/>
           </a:p>
@@ -32690,7 +34704,7 @@
           <p:nvPr/>
         </p:nvPicPr>
         <p:blipFill>
-          <a:blip xmlns:r="http://schemas.openxmlformats.org/officeDocument/2006/relationships" xmlns:a="http://schemas.openxmlformats.org/drawingml/2006/main" r:embed="R998878d17fce4f2f"/>
+          <a:blip xmlns:r="http://schemas.openxmlformats.org/officeDocument/2006/relationships" xmlns:a="http://schemas.openxmlformats.org/drawingml/2006/main" r:embed="Rb1c0d4e55da248c9"/>
           <a:srcRect xmlns:a="http://schemas.openxmlformats.org/drawingml/2006/main" l="0" t="0" r="0" b="0"/>
           <a:stretch xmlns:a="http://schemas.openxmlformats.org/drawingml/2006/main">
             <a:fillRect l="0" t="0" r="0" b="0"/>
